--- a/docs/Final_Poster.pptx
+++ b/docs/Final_Poster.pptx
@@ -5,11 +5,12 @@
     <p:sldMasterId id="2147483648" r:id="rId1"/>
   </p:sldMasterIdLst>
   <p:notesMasterIdLst>
-    <p:notesMasterId r:id="rId4"/>
+    <p:notesMasterId r:id="rId5"/>
   </p:notesMasterIdLst>
   <p:sldIdLst>
     <p:sldId id="256" r:id="rId2"/>
-    <p:sldId id="257" r:id="rId3"/>
+    <p:sldId id="258" r:id="rId3"/>
+    <p:sldId id="257" r:id="rId4"/>
   </p:sldIdLst>
   <p:sldSz cx="38404800" cy="27432000"/>
   <p:notesSz cx="32004000" cy="51103213"/>
@@ -258,7 +259,7 @@
       </p15:sldGuideLst>
     </p:ext>
     <p:ext uri="GoogleSlidesCustomDataVersion2">
-      <go:slidesCustomData xmlns:go="http://customooxmlschemas.google.com/" xmlns:ahyp="http://schemas.microsoft.com/office/drawing/2018/hyperlinkcolor" xmlns:p15="http://schemas.microsoft.com/office/powerpoint/2012/main" xmlns:p14="http://schemas.microsoft.com/office/powerpoint/2010/main" xmlns:com="http://schemas.openxmlformats.org/drawingml/2006/compatibility" xmlns:pvml="urn:schemas-microsoft-com:office:powerpoint" xmlns:v="urn:schemas-microsoft-com:vml" xmlns:o="urn:schemas-microsoft-com:office:office" xmlns:dgm="http://schemas.openxmlformats.org/drawingml/2006/diagram" xmlns:c="http://schemas.openxmlformats.org/drawingml/2006/chart" xmlns:mv="urn:schemas-microsoft-com:mac:vml" xmlns:mc="http://schemas.openxmlformats.org/markup-compatibility/2006" xmlns="" r:id="rId7" roundtripDataSignature="AMtx7mj9fBI24rZHjAv0Qpv/VRtt9kzGvg=="/>
+      <go:slidesCustomData xmlns="" xmlns:mc="http://schemas.openxmlformats.org/markup-compatibility/2006" xmlns:mv="urn:schemas-microsoft-com:mac:vml" xmlns:c="http://schemas.openxmlformats.org/drawingml/2006/chart" xmlns:dgm="http://schemas.openxmlformats.org/drawingml/2006/diagram" xmlns:o="urn:schemas-microsoft-com:office:office" xmlns:v="urn:schemas-microsoft-com:vml" xmlns:pvml="urn:schemas-microsoft-com:office:powerpoint" xmlns:com="http://schemas.openxmlformats.org/drawingml/2006/compatibility" xmlns:p14="http://schemas.microsoft.com/office/powerpoint/2010/main" xmlns:p15="http://schemas.microsoft.com/office/powerpoint/2012/main" xmlns:ahyp="http://schemas.microsoft.com/office/drawing/2018/hyperlinkcolor" xmlns:go="http://customooxmlschemas.google.com/" r:id="rId7" roundtripDataSignature="AMtx7mj9fBI24rZHjAv0Qpv/VRtt9kzGvg=="/>
     </p:ext>
   </p:extLst>
 </p:presentation>
@@ -1907,6 +1908,217 @@
         <p:cNvPr id="1" name="Shape 84">
           <a:extLst>
             <a:ext uri="{FF2B5EF4-FFF2-40B4-BE49-F238E27FC236}">
+              <a16:creationId xmlns:a16="http://schemas.microsoft.com/office/drawing/2014/main" id="{0BCBA3BE-584B-F133-1B56-CD497D22443B}"/>
+            </a:ext>
+          </a:extLst>
+        </p:cNvPr>
+        <p:cNvGrpSpPr/>
+        <p:nvPr/>
+      </p:nvGrpSpPr>
+      <p:grpSpPr>
+        <a:xfrm>
+          <a:off x="0" y="0"/>
+          <a:ext cx="0" cy="0"/>
+          <a:chOff x="0" y="0"/>
+          <a:chExt cx="0" cy="0"/>
+        </a:xfrm>
+      </p:grpSpPr>
+      <p:sp>
+        <p:nvSpPr>
+          <p:cNvPr id="85" name="Google Shape;85;p1:notes">
+            <a:extLst>
+              <a:ext uri="{FF2B5EF4-FFF2-40B4-BE49-F238E27FC236}">
+                <a16:creationId xmlns:a16="http://schemas.microsoft.com/office/drawing/2014/main" id="{45D9DDFE-650D-20B1-4AF3-4E6E465F4CD1}"/>
+              </a:ext>
+            </a:extLst>
+          </p:cNvPr>
+          <p:cNvSpPr txBox="1"/>
+          <p:nvPr/>
+        </p:nvSpPr>
+        <p:spPr>
+          <a:xfrm>
+            <a:off x="18135600" y="48563212"/>
+            <a:ext cx="13868400" cy="2516187"/>
+          </a:xfrm>
+          <a:prstGeom prst="rect">
+            <a:avLst/>
+          </a:prstGeom>
+          <a:noFill/>
+          <a:ln>
+            <a:noFill/>
+          </a:ln>
+        </p:spPr>
+        <p:txBody>
+          <a:bodyPr spcFirstLastPara="1" wrap="square" lIns="19050" tIns="0" rIns="19050" bIns="0" anchor="b" anchorCtr="0">
+            <a:noAutofit/>
+          </a:bodyPr>
+          <a:lstStyle/>
+          <a:p>
+            <a:pPr marL="0" marR="0" lvl="0" indent="0" algn="r" rtl="0">
+              <a:lnSpc>
+                <a:spcPct val="100000"/>
+              </a:lnSpc>
+              <a:spcBef>
+                <a:spcPts val="0"/>
+              </a:spcBef>
+              <a:spcAft>
+                <a:spcPts val="0"/>
+              </a:spcAft>
+              <a:buClr>
+                <a:srgbClr val="000000"/>
+              </a:buClr>
+              <a:buSzPts val="1000"/>
+              <a:buFont typeface="Times New Roman"/>
+              <a:buNone/>
+            </a:pPr>
+            <a:fld id="{00000000-1234-1234-1234-123412341234}" type="slidenum">
+              <a:rPr lang="en-US" sz="1000" b="0" i="1" u="none" strike="noStrike" cap="none">
+                <a:solidFill>
+                  <a:srgbClr val="000000"/>
+                </a:solidFill>
+                <a:latin typeface="Times New Roman"/>
+                <a:ea typeface="Times New Roman"/>
+                <a:cs typeface="Times New Roman"/>
+                <a:sym typeface="Times New Roman"/>
+              </a:rPr>
+              <a:t>2</a:t>
+            </a:fld>
+            <a:endParaRPr sz="1200" b="0" i="0" u="none" strike="noStrike" cap="none">
+              <a:solidFill>
+                <a:srgbClr val="000000"/>
+              </a:solidFill>
+              <a:latin typeface="Arial"/>
+              <a:ea typeface="Arial"/>
+              <a:cs typeface="Arial"/>
+              <a:sym typeface="Arial"/>
+            </a:endParaRPr>
+          </a:p>
+        </p:txBody>
+      </p:sp>
+      <p:sp>
+        <p:nvSpPr>
+          <p:cNvPr id="86" name="Google Shape;86;p1:notes">
+            <a:extLst>
+              <a:ext uri="{FF2B5EF4-FFF2-40B4-BE49-F238E27FC236}">
+                <a16:creationId xmlns:a16="http://schemas.microsoft.com/office/drawing/2014/main" id="{7C058D2B-968D-44E0-8429-1BAFC344BA39}"/>
+              </a:ext>
+            </a:extLst>
+          </p:cNvPr>
+          <p:cNvSpPr>
+            <a:spLocks noGrp="1" noRot="1" noChangeAspect="1"/>
+          </p:cNvSpPr>
+          <p:nvPr>
+            <p:ph type="sldImg" idx="2"/>
+          </p:nvPr>
+        </p:nvSpPr>
+        <p:spPr>
+          <a:xfrm>
+            <a:off x="13601700" y="11698288"/>
+            <a:ext cx="4800600" cy="3429000"/>
+          </a:xfrm>
+          <a:custGeom>
+            <a:avLst/>
+            <a:gdLst/>
+            <a:ahLst/>
+            <a:cxnLst/>
+            <a:rect l="l" t="t" r="r" b="b"/>
+            <a:pathLst>
+              <a:path w="120000" h="120000" extrusionOk="0">
+                <a:moveTo>
+                  <a:pt x="0" y="0"/>
+                </a:moveTo>
+                <a:lnTo>
+                  <a:pt x="120000" y="0"/>
+                </a:lnTo>
+                <a:lnTo>
+                  <a:pt x="120000" y="120000"/>
+                </a:lnTo>
+                <a:lnTo>
+                  <a:pt x="0" y="120000"/>
+                </a:lnTo>
+                <a:close/>
+              </a:path>
+            </a:pathLst>
+          </a:custGeom>
+          <a:noFill/>
+          <a:ln>
+            <a:noFill/>
+          </a:ln>
+        </p:spPr>
+      </p:sp>
+      <p:sp>
+        <p:nvSpPr>
+          <p:cNvPr id="87" name="Google Shape;87;p1:notes">
+            <a:extLst>
+              <a:ext uri="{FF2B5EF4-FFF2-40B4-BE49-F238E27FC236}">
+                <a16:creationId xmlns:a16="http://schemas.microsoft.com/office/drawing/2014/main" id="{D9C126D4-86A8-036A-ABCF-8B58C4BA9469}"/>
+              </a:ext>
+            </a:extLst>
+          </p:cNvPr>
+          <p:cNvSpPr txBox="1">
+            <a:spLocks noGrp="1"/>
+          </p:cNvSpPr>
+          <p:nvPr>
+            <p:ph type="body" idx="1"/>
+          </p:nvPr>
+        </p:nvSpPr>
+        <p:spPr>
+          <a:xfrm>
+            <a:off x="4267200" y="24272875"/>
+            <a:ext cx="23469600" cy="22996525"/>
+          </a:xfrm>
+          <a:prstGeom prst="rect">
+            <a:avLst/>
+          </a:prstGeom>
+          <a:noFill/>
+          <a:ln>
+            <a:noFill/>
+          </a:ln>
+        </p:spPr>
+        <p:txBody>
+          <a:bodyPr spcFirstLastPara="1" wrap="square" lIns="430200" tIns="214300" rIns="430200" bIns="214300" anchor="t" anchorCtr="0">
+            <a:noAutofit/>
+          </a:bodyPr>
+          <a:lstStyle/>
+          <a:p>
+            <a:pPr marL="0" lvl="0" indent="0" algn="l" rtl="0">
+              <a:lnSpc>
+                <a:spcPct val="100000"/>
+              </a:lnSpc>
+              <a:spcBef>
+                <a:spcPts val="0"/>
+              </a:spcBef>
+              <a:spcAft>
+                <a:spcPts val="0"/>
+              </a:spcAft>
+              <a:buSzPts val="1400"/>
+              <a:buNone/>
+            </a:pPr>
+            <a:endParaRPr dirty="0"/>
+          </a:p>
+        </p:txBody>
+      </p:sp>
+    </p:spTree>
+    <p:extLst>
+      <p:ext uri="{BB962C8B-B14F-4D97-AF65-F5344CB8AC3E}">
+        <p14:creationId xmlns:p14="http://schemas.microsoft.com/office/powerpoint/2010/main" val="2502990355"/>
+      </p:ext>
+    </p:extLst>
+  </p:cSld>
+  <p:clrMapOvr>
+    <a:masterClrMapping/>
+  </p:clrMapOvr>
+</p:notes>
+</file>
+
+<file path=ppt/notesSlides/notesSlide3.xml><?xml version="1.0" encoding="utf-8"?>
+<p:notes xmlns:a="http://schemas.openxmlformats.org/drawingml/2006/main" xmlns:r="http://schemas.openxmlformats.org/officeDocument/2006/relationships" xmlns:p="http://schemas.openxmlformats.org/presentationml/2006/main" showMasterSp="0" showMasterPhAnim="0">
+  <p:cSld>
+    <p:spTree>
+      <p:nvGrpSpPr>
+        <p:cNvPr id="1" name="Shape 84">
+          <a:extLst>
+            <a:ext uri="{FF2B5EF4-FFF2-40B4-BE49-F238E27FC236}">
               <a16:creationId xmlns:a16="http://schemas.microsoft.com/office/drawing/2014/main" id="{EA55CBF5-9B48-4A84-1DB1-3B48B76B45D9}"/>
             </a:ext>
           </a:extLst>
@@ -1980,7 +2192,7 @@
                 <a:cs typeface="Times New Roman"/>
                 <a:sym typeface="Times New Roman"/>
               </a:rPr>
-              <a:t>2</a:t>
+              <a:t>3</a:t>
             </a:fld>
             <a:endParaRPr sz="1200" b="0" i="0" u="none" strike="noStrike" cap="none">
               <a:solidFill>
@@ -15459,10 +15671,10 @@
       </p:grpSpPr>
       <p:pic>
         <p:nvPicPr>
-          <p:cNvPr id="23" name="圖片 22">
+          <p:cNvPr id="24" name="圖片 23">
             <a:extLst>
               <a:ext uri="{FF2B5EF4-FFF2-40B4-BE49-F238E27FC236}">
-                <a16:creationId xmlns:a16="http://schemas.microsoft.com/office/drawing/2014/main" id="{75FFED0B-3372-7852-0021-1F430DD832F7}"/>
+                <a16:creationId xmlns:a16="http://schemas.microsoft.com/office/drawing/2014/main" id="{9513AB96-7813-A8E4-E069-7505944FE909}"/>
               </a:ext>
             </a:extLst>
           </p:cNvPr>
@@ -15479,8 +15691,8 @@
         </p:blipFill>
         <p:spPr>
           <a:xfrm>
-            <a:off x="24876679" y="14309630"/>
-            <a:ext cx="11559984" cy="4690723"/>
+            <a:off x="11298009" y="3924084"/>
+            <a:ext cx="12574328" cy="9101045"/>
           </a:xfrm>
           <a:prstGeom prst="rect">
             <a:avLst/>
@@ -15489,10 +15701,10 @@
       </p:pic>
       <p:pic>
         <p:nvPicPr>
-          <p:cNvPr id="16" name="圖片 15">
+          <p:cNvPr id="17" name="圖片 16">
             <a:extLst>
               <a:ext uri="{FF2B5EF4-FFF2-40B4-BE49-F238E27FC236}">
-                <a16:creationId xmlns:a16="http://schemas.microsoft.com/office/drawing/2014/main" id="{A1FB1969-C3CE-8EC7-007A-0E7432FBD783}"/>
+                <a16:creationId xmlns:a16="http://schemas.microsoft.com/office/drawing/2014/main" id="{615EE31A-D76B-B286-9474-CEFAEF6CB233}"/>
               </a:ext>
             </a:extLst>
           </p:cNvPr>
@@ -15509,8 +15721,8 @@
         </p:blipFill>
         <p:spPr>
           <a:xfrm>
-            <a:off x="1013460" y="21650288"/>
-            <a:ext cx="4521200" cy="4800600"/>
+            <a:off x="11587699" y="14302481"/>
+            <a:ext cx="11887307" cy="5105696"/>
           </a:xfrm>
           <a:prstGeom prst="rect">
             <a:avLst/>
@@ -15519,10 +15731,10 @@
       </p:pic>
       <p:pic>
         <p:nvPicPr>
-          <p:cNvPr id="18" name="圖片 17">
+          <p:cNvPr id="4" name="圖片 3">
             <a:extLst>
               <a:ext uri="{FF2B5EF4-FFF2-40B4-BE49-F238E27FC236}">
-                <a16:creationId xmlns:a16="http://schemas.microsoft.com/office/drawing/2014/main" id="{48903A7F-6197-74F1-5AEA-B5EB5BB5CDC0}"/>
+                <a16:creationId xmlns:a16="http://schemas.microsoft.com/office/drawing/2014/main" id="{F3173AD5-2B81-D2E0-4F75-FF878A8D7746}"/>
               </a:ext>
             </a:extLst>
           </p:cNvPr>
@@ -15539,8 +15751,8 @@
         </p:blipFill>
         <p:spPr>
           <a:xfrm>
-            <a:off x="6199267" y="21650288"/>
-            <a:ext cx="4660900" cy="4889500"/>
+            <a:off x="12444864" y="20595433"/>
+            <a:ext cx="10109706" cy="5007831"/>
           </a:xfrm>
           <a:prstGeom prst="rect">
             <a:avLst/>
@@ -15615,8 +15827,8 @@
         </p:nvSpPr>
         <p:spPr>
           <a:xfrm>
-            <a:off x="24014011" y="14284316"/>
-            <a:ext cx="13269300" cy="5691569"/>
+            <a:off x="11278344" y="20604205"/>
+            <a:ext cx="12486348" cy="6384449"/>
           </a:xfrm>
           <a:prstGeom prst="rect">
             <a:avLst/>
@@ -15986,8 +16198,8 @@
         </p:nvSpPr>
         <p:spPr>
           <a:xfrm>
-            <a:off x="11280066" y="13436780"/>
-            <a:ext cx="12472662" cy="852000"/>
+            <a:off x="983946" y="12173130"/>
+            <a:ext cx="10046813" cy="852000"/>
           </a:xfrm>
           <a:prstGeom prst="rect">
             <a:avLst/>
@@ -16056,7 +16268,7 @@
         </p:nvSpPr>
         <p:spPr>
           <a:xfrm>
-            <a:off x="23975423" y="20184106"/>
+            <a:off x="24031947" y="13433435"/>
             <a:ext cx="13269300" cy="852000"/>
           </a:xfrm>
           <a:prstGeom prst="rect">
@@ -16108,7 +16320,7 @@
                 <a:cs typeface="Arial"/>
                 <a:sym typeface="Arial"/>
               </a:rPr>
-              <a:t>Conclusion and Future Work</a:t>
+              <a:t>Conclusion</a:t>
             </a:r>
             <a:endParaRPr sz="1100" b="0" i="0" u="none" strike="noStrike" cap="none" dirty="0">
               <a:solidFill>
@@ -16130,8 +16342,8 @@
         </p:nvSpPr>
         <p:spPr>
           <a:xfrm>
-            <a:off x="24014011" y="13436780"/>
-            <a:ext cx="13269300" cy="852000"/>
+            <a:off x="11278343" y="19758106"/>
+            <a:ext cx="12486349" cy="852000"/>
           </a:xfrm>
           <a:prstGeom prst="rect">
             <a:avLst/>
@@ -16173,7 +16385,7 @@
               <a:buNone/>
             </a:pPr>
             <a:r>
-              <a:rPr lang="en-US" sz="3300" b="1" i="0" u="none" strike="noStrike" cap="none">
+              <a:rPr lang="en-US" sz="3300" b="1" i="0" u="none" strike="noStrike" cap="none" dirty="0">
                 <a:solidFill>
                   <a:schemeClr val="dk1"/>
                 </a:solidFill>
@@ -16184,7 +16396,7 @@
               </a:rPr>
               <a:t>Experimental Results</a:t>
             </a:r>
-            <a:endParaRPr sz="1100" b="0" i="0" u="none" strike="noStrike" cap="none">
+            <a:endParaRPr sz="1100" b="0" i="0" u="none" strike="noStrike" cap="none" dirty="0">
               <a:solidFill>
                 <a:srgbClr val="000000"/>
               </a:solidFill>
@@ -16332,8 +16544,8 @@
         </p:nvSpPr>
         <p:spPr>
           <a:xfrm>
-            <a:off x="23975423" y="21036106"/>
-            <a:ext cx="13269300" cy="4126487"/>
+            <a:off x="24031947" y="14285435"/>
+            <a:ext cx="13269300" cy="3006301"/>
           </a:xfrm>
           <a:prstGeom prst="rect">
             <a:avLst/>
@@ -16355,49 +16567,6 @@
           </a:bodyPr>
           <a:lstStyle/>
           <a:p>
-            <a:pPr marL="0" marR="0" lvl="0" indent="0" algn="just" rtl="0">
-              <a:lnSpc>
-                <a:spcPct val="100000"/>
-              </a:lnSpc>
-              <a:spcBef>
-                <a:spcPts val="0"/>
-              </a:spcBef>
-              <a:spcAft>
-                <a:spcPts val="0"/>
-              </a:spcAft>
-              <a:buClr>
-                <a:srgbClr val="000000"/>
-              </a:buClr>
-              <a:buSzPts val="2700"/>
-              <a:buFont typeface="Arial"/>
-              <a:buNone/>
-            </a:pPr>
-            <a:r>
-              <a:rPr lang="en-US" sz="2700" b="1" u="sng" dirty="0">
-                <a:solidFill>
-                  <a:srgbClr val="274E13"/>
-                </a:solidFill>
-                <a:highlight>
-                  <a:srgbClr val="D9EAD3"/>
-                </a:highlight>
-                <a:latin typeface="Times New Roman"/>
-                <a:ea typeface="Times New Roman"/>
-                <a:cs typeface="Times New Roman"/>
-                <a:sym typeface="Times New Roman"/>
-              </a:rPr>
-              <a:t>Conclusion:</a:t>
-            </a:r>
-            <a:endParaRPr lang="zh-TW" altLang="en-US" sz="2500" dirty="0">
-              <a:solidFill>
-                <a:schemeClr val="dk1"/>
-              </a:solidFill>
-              <a:latin typeface="Times New Roman"/>
-              <a:ea typeface="Times New Roman"/>
-              <a:cs typeface="Times New Roman"/>
-              <a:sym typeface="Times New Roman"/>
-            </a:endParaRPr>
-          </a:p>
-          <a:p>
             <a:pPr marL="457200" indent="-387350" algn="just">
               <a:buClr>
                 <a:schemeClr val="dk1"/>
@@ -16419,7 +16588,7 @@
               <a:t>Deterministic frontier masking (</a:t>
             </a:r>
             <a:r>
-              <a:rPr lang="en-US" altLang="zh-TW" sz="2500" dirty="0" err="1">
+              <a:rPr lang="en-US" altLang="zh-TW" sz="2500" b="1" dirty="0" err="1">
                 <a:solidFill>
                   <a:schemeClr val="dk1"/>
                 </a:solidFill>
@@ -16465,7 +16634,7 @@
               <a:t>Viterbi span repair (</a:t>
             </a:r>
             <a:r>
-              <a:rPr lang="en-US" altLang="zh-TW" sz="2500" dirty="0" err="1">
+              <a:rPr lang="en-US" altLang="zh-TW" sz="2500" b="1" dirty="0" err="1">
                 <a:solidFill>
                   <a:schemeClr val="dk1"/>
                 </a:solidFill>
@@ -16488,87 +16657,9 @@
               </a:rPr>
               <a:t>) closes the remaining gap with 99.2% validity, 1.06 mean resamples, by solving joint multi-token violations in one pass</a:t>
             </a:r>
-            <a:endParaRPr lang="en-US" sz="2500" dirty="0">
-              <a:solidFill>
-                <a:schemeClr val="dk1"/>
-              </a:solidFill>
-              <a:latin typeface="Times New Roman"/>
-              <a:ea typeface="Times New Roman"/>
-              <a:cs typeface="Times New Roman"/>
-              <a:sym typeface="Times New Roman"/>
-            </a:endParaRPr>
           </a:p>
           <a:p>
-            <a:pPr marL="457200" marR="0" lvl="0" indent="0" algn="just" rtl="0">
-              <a:lnSpc>
-                <a:spcPct val="100000"/>
-              </a:lnSpc>
-              <a:spcBef>
-                <a:spcPts val="0"/>
-              </a:spcBef>
-              <a:spcAft>
-                <a:spcPts val="0"/>
-              </a:spcAft>
-              <a:buNone/>
-            </a:pPr>
-            <a:endParaRPr lang="zh-TW" altLang="en-US" sz="2500" dirty="0">
-              <a:solidFill>
-                <a:schemeClr val="dk1"/>
-              </a:solidFill>
-              <a:latin typeface="Times New Roman"/>
-              <a:ea typeface="Times New Roman"/>
-              <a:cs typeface="Times New Roman"/>
-              <a:sym typeface="Times New Roman"/>
-            </a:endParaRPr>
-          </a:p>
-          <a:p>
-            <a:pPr marL="0" marR="0" lvl="0" indent="0" algn="just" rtl="0">
-              <a:lnSpc>
-                <a:spcPct val="100000"/>
-              </a:lnSpc>
-              <a:spcBef>
-                <a:spcPts val="0"/>
-              </a:spcBef>
-              <a:spcAft>
-                <a:spcPts val="0"/>
-              </a:spcAft>
-              <a:buClr>
-                <a:srgbClr val="000000"/>
-              </a:buClr>
-              <a:buSzPts val="2700"/>
-              <a:buFont typeface="Arial"/>
-              <a:buNone/>
-            </a:pPr>
-            <a:r>
-              <a:rPr lang="en-US" sz="2700" b="1" u="sng" dirty="0">
-                <a:solidFill>
-                  <a:srgbClr val="274E13"/>
-                </a:solidFill>
-                <a:highlight>
-                  <a:srgbClr val="D9EAD3"/>
-                </a:highlight>
-                <a:latin typeface="Times New Roman"/>
-                <a:ea typeface="Times New Roman"/>
-                <a:cs typeface="Times New Roman"/>
-                <a:sym typeface="Times New Roman"/>
-              </a:rPr>
-              <a:t>Future work:</a:t>
-            </a:r>
-            <a:endParaRPr sz="2700" b="1" i="0" u="sng" strike="noStrike" cap="none" dirty="0">
-              <a:solidFill>
-                <a:srgbClr val="274E13"/>
-              </a:solidFill>
-              <a:highlight>
-                <a:srgbClr val="D9EAD3"/>
-              </a:highlight>
-              <a:latin typeface="Times New Roman"/>
-              <a:ea typeface="Times New Roman"/>
-              <a:cs typeface="Times New Roman"/>
-              <a:sym typeface="Times New Roman"/>
-            </a:endParaRPr>
-          </a:p>
-          <a:p>
-            <a:pPr marL="412750" lvl="0" indent="-342900" algn="just">
+            <a:pPr marL="457200" indent="-387350" algn="just">
               <a:buClr>
                 <a:schemeClr val="dk1"/>
               </a:buClr>
@@ -16586,63 +16677,8 @@
                 <a:cs typeface="Times New Roman"/>
                 <a:sym typeface="Times New Roman"/>
               </a:rPr>
-              <a:t>Extend to code grammars and stricter JSON splits beyond </a:t>
-            </a:r>
-            <a:r>
-              <a:rPr lang="en-US" sz="2500" dirty="0" err="1">
-                <a:solidFill>
-                  <a:schemeClr val="dk1"/>
-                </a:solidFill>
-                <a:latin typeface="Courier New" panose="02070309020205020404" pitchFamily="49" charset="0"/>
-                <a:ea typeface="Times New Roman"/>
-                <a:cs typeface="Courier New" panose="02070309020205020404" pitchFamily="49" charset="0"/>
-                <a:sym typeface="Times New Roman"/>
-              </a:rPr>
-              <a:t>jsb_medium</a:t>
-            </a:r>
-            <a:r>
-              <a:rPr lang="en-US" sz="2500" dirty="0">
-                <a:solidFill>
-                  <a:schemeClr val="dk1"/>
-                </a:solidFill>
-                <a:latin typeface="Times New Roman"/>
-                <a:ea typeface="Times New Roman"/>
-                <a:cs typeface="Times New Roman"/>
-                <a:sym typeface="Times New Roman"/>
-              </a:rPr>
-              <a:t> and close the final 0.8% gap with tighter completion-phase fallbacks</a:t>
-            </a:r>
-          </a:p>
-          <a:p>
-            <a:pPr marL="412750" lvl="0" indent="-342900" algn="just">
-              <a:buClr>
-                <a:schemeClr val="dk1"/>
-              </a:buClr>
-              <a:buSzPts val="2500"/>
-              <a:buFont typeface="Wingdings" pitchFamily="2" charset="2"/>
-              <a:buChar char="l"/>
-            </a:pPr>
-            <a:r>
-              <a:rPr lang="en-US" sz="2500" dirty="0">
-                <a:solidFill>
-                  <a:schemeClr val="dk1"/>
-                </a:solidFill>
-                <a:latin typeface="Times New Roman"/>
-                <a:ea typeface="Times New Roman"/>
-                <a:cs typeface="Times New Roman"/>
-                <a:sym typeface="Times New Roman"/>
-              </a:rPr>
-              <a:t>Integrate sparse automata acceleration for large-vocabulary efficiency</a:t>
-            </a:r>
-            <a:endParaRPr sz="2500" dirty="0">
-              <a:solidFill>
-                <a:schemeClr val="dk1"/>
-              </a:solidFill>
-              <a:latin typeface="Times New Roman"/>
-              <a:ea typeface="Times New Roman"/>
-              <a:cs typeface="Times New Roman"/>
-              <a:sym typeface="Times New Roman"/>
-            </a:endParaRPr>
+              <a:t>Near-perfect structured generation under discrete diffusion requires both deterministic constraint enforcement and principled joint repair over violated spans</a:t>
+            </a:r>
           </a:p>
         </p:txBody>
       </p:sp>
@@ -16654,8 +16690,8 @@
         </p:nvSpPr>
         <p:spPr>
           <a:xfrm>
-            <a:off x="983946" y="20614767"/>
-            <a:ext cx="10058729" cy="852000"/>
+            <a:off x="11278344" y="13430433"/>
+            <a:ext cx="12486350" cy="852000"/>
           </a:xfrm>
           <a:prstGeom prst="rect">
             <a:avLst/>
@@ -16737,7 +16773,7 @@
         <p:spPr>
           <a:xfrm>
             <a:off x="1013460" y="3909675"/>
-            <a:ext cx="10017300" cy="13350300"/>
+            <a:ext cx="10017300" cy="7843710"/>
           </a:xfrm>
           <a:prstGeom prst="rect">
             <a:avLst/>
@@ -17102,314 +17138,6 @@
               <a:sym typeface="Times New Roman"/>
             </a:endParaRPr>
           </a:p>
-          <a:p>
-            <a:pPr marL="0" marR="0" lvl="0" indent="0" algn="just" rtl="0">
-              <a:lnSpc>
-                <a:spcPct val="100000"/>
-              </a:lnSpc>
-              <a:spcBef>
-                <a:spcPts val="0"/>
-              </a:spcBef>
-              <a:spcAft>
-                <a:spcPts val="0"/>
-              </a:spcAft>
-              <a:buClr>
-                <a:srgbClr val="000000"/>
-              </a:buClr>
-              <a:buSzPts val="1200"/>
-              <a:buFont typeface="Arial"/>
-              <a:buNone/>
-            </a:pPr>
-            <a:endParaRPr sz="1200" b="0" i="0" u="none" strike="noStrike" cap="none" dirty="0">
-              <a:solidFill>
-                <a:schemeClr val="dk1"/>
-              </a:solidFill>
-              <a:latin typeface="Times New Roman"/>
-              <a:ea typeface="Times New Roman"/>
-              <a:cs typeface="Times New Roman"/>
-              <a:sym typeface="Times New Roman"/>
-            </a:endParaRPr>
-          </a:p>
-          <a:p>
-            <a:pPr marL="0" marR="0" lvl="0" indent="0" algn="just" rtl="0">
-              <a:lnSpc>
-                <a:spcPct val="100000"/>
-              </a:lnSpc>
-              <a:spcBef>
-                <a:spcPts val="0"/>
-              </a:spcBef>
-              <a:spcAft>
-                <a:spcPts val="0"/>
-              </a:spcAft>
-              <a:buClr>
-                <a:srgbClr val="000000"/>
-              </a:buClr>
-              <a:buSzPts val="2700"/>
-              <a:buFont typeface="Arial"/>
-              <a:buNone/>
-            </a:pPr>
-            <a:r>
-              <a:rPr lang="en-US" sz="2700" b="1" i="0" u="sng" strike="noStrike" cap="none" dirty="0">
-                <a:solidFill>
-                  <a:srgbClr val="274E13"/>
-                </a:solidFill>
-                <a:highlight>
-                  <a:srgbClr val="D9EAD3"/>
-                </a:highlight>
-                <a:latin typeface="Times New Roman"/>
-                <a:ea typeface="Times New Roman"/>
-                <a:cs typeface="Times New Roman"/>
-                <a:sym typeface="Times New Roman"/>
-              </a:rPr>
-              <a:t>Our Solution: </a:t>
-            </a:r>
-            <a:endParaRPr sz="2400" b="0" i="0" u="none" strike="noStrike" cap="none" dirty="0">
-              <a:solidFill>
-                <a:schemeClr val="dk1"/>
-              </a:solidFill>
-              <a:highlight>
-                <a:srgbClr val="D9EAD3"/>
-              </a:highlight>
-              <a:latin typeface="Times New Roman"/>
-              <a:ea typeface="Times New Roman"/>
-              <a:cs typeface="Times New Roman"/>
-              <a:sym typeface="Times New Roman"/>
-            </a:endParaRPr>
-          </a:p>
-          <a:p>
-            <a:pPr marL="533400" marR="0" lvl="0" indent="-425450" algn="just" rtl="0">
-              <a:lnSpc>
-                <a:spcPct val="100000"/>
-              </a:lnSpc>
-              <a:spcBef>
-                <a:spcPts val="0"/>
-              </a:spcBef>
-              <a:spcAft>
-                <a:spcPts val="0"/>
-              </a:spcAft>
-              <a:buClr>
-                <a:schemeClr val="dk1"/>
-              </a:buClr>
-              <a:buSzPts val="2500"/>
-              <a:buFont typeface="Times New Roman"/>
-              <a:buChar char="★"/>
-            </a:pPr>
-            <a:r>
-              <a:rPr lang="en-US" sz="2500" b="1" dirty="0">
-                <a:solidFill>
-                  <a:schemeClr val="dk1"/>
-                </a:solidFill>
-                <a:latin typeface="Times New Roman"/>
-                <a:ea typeface="Times New Roman"/>
-                <a:cs typeface="Times New Roman"/>
-                <a:sym typeface="Times New Roman"/>
-              </a:rPr>
-              <a:t>Engineering Optimization (Efficiency Side – </a:t>
-            </a:r>
-            <a:r>
-              <a:rPr lang="en-US" sz="2500" b="1" dirty="0" err="1">
-                <a:solidFill>
-                  <a:schemeClr val="dk1"/>
-                </a:solidFill>
-                <a:latin typeface="Times New Roman"/>
-                <a:ea typeface="Times New Roman"/>
-                <a:cs typeface="Times New Roman"/>
-                <a:sym typeface="Times New Roman"/>
-              </a:rPr>
-              <a:t>DGrammar</a:t>
-            </a:r>
-            <a:r>
-              <a:rPr lang="en-US" sz="2500" b="1" dirty="0">
-                <a:solidFill>
-                  <a:schemeClr val="dk1"/>
-                </a:solidFill>
-                <a:latin typeface="Times New Roman"/>
-                <a:ea typeface="Times New Roman"/>
-                <a:cs typeface="Times New Roman"/>
-                <a:sym typeface="Times New Roman"/>
-              </a:rPr>
-              <a:t>)</a:t>
-            </a:r>
-            <a:endParaRPr sz="2500" b="1" dirty="0">
-              <a:solidFill>
-                <a:schemeClr val="dk1"/>
-              </a:solidFill>
-              <a:latin typeface="Times New Roman"/>
-              <a:ea typeface="Times New Roman"/>
-              <a:cs typeface="Times New Roman"/>
-              <a:sym typeface="Times New Roman"/>
-            </a:endParaRPr>
-          </a:p>
-          <a:p>
-            <a:pPr marL="914400" lvl="1" indent="-387350" algn="just">
-              <a:buClr>
-                <a:schemeClr val="dk1"/>
-              </a:buClr>
-              <a:buSzPts val="2500"/>
-              <a:buFont typeface="Times New Roman"/>
-              <a:buChar char="○"/>
-            </a:pPr>
-            <a:r>
-              <a:rPr lang="en-US" sz="2500" dirty="0">
-                <a:solidFill>
-                  <a:schemeClr val="dk1"/>
-                </a:solidFill>
-                <a:latin typeface="Times New Roman"/>
-                <a:ea typeface="Times New Roman"/>
-                <a:cs typeface="Times New Roman"/>
-                <a:sym typeface="Times New Roman"/>
-              </a:rPr>
-              <a:t>Replace stochastic lookahead with deterministic frontier masking, the valid token set is computed directly at each position via an incremental grammar automaton, with no random completions drawn.</a:t>
-            </a:r>
-          </a:p>
-          <a:p>
-            <a:pPr marL="914400" lvl="1" indent="-387350" algn="just">
-              <a:buClr>
-                <a:schemeClr val="dk1"/>
-              </a:buClr>
-              <a:buSzPts val="2500"/>
-              <a:buFont typeface="Times New Roman"/>
-              <a:buChar char="○"/>
-            </a:pPr>
-            <a:r>
-              <a:rPr lang="en-US" sz="2500" dirty="0">
-                <a:solidFill>
-                  <a:schemeClr val="dk1"/>
-                </a:solidFill>
-                <a:latin typeface="Times New Roman"/>
-                <a:ea typeface="Times New Roman"/>
-                <a:cs typeface="Times New Roman"/>
-                <a:sym typeface="Times New Roman"/>
-              </a:rPr>
-              <a:t>Implemente an Additive Increase / Multiplicative Decrease (AIMD) mechanism to dynamically scale token submission batches, maximizing hardware throughput</a:t>
-            </a:r>
-            <a:endParaRPr sz="2500" dirty="0">
-              <a:solidFill>
-                <a:schemeClr val="dk1"/>
-              </a:solidFill>
-              <a:latin typeface="Times New Roman"/>
-              <a:ea typeface="Times New Roman"/>
-              <a:cs typeface="Times New Roman"/>
-              <a:sym typeface="Times New Roman"/>
-            </a:endParaRPr>
-          </a:p>
-          <a:p>
-            <a:pPr marL="533400" marR="0" lvl="0" indent="-425450" algn="just" rtl="0">
-              <a:lnSpc>
-                <a:spcPct val="100000"/>
-              </a:lnSpc>
-              <a:spcBef>
-                <a:spcPts val="0"/>
-              </a:spcBef>
-              <a:spcAft>
-                <a:spcPts val="0"/>
-              </a:spcAft>
-              <a:buClr>
-                <a:schemeClr val="dk1"/>
-              </a:buClr>
-              <a:buSzPts val="2500"/>
-              <a:buFont typeface="Times New Roman"/>
-              <a:buChar char="★"/>
-            </a:pPr>
-            <a:r>
-              <a:rPr lang="en-US" sz="2500" b="1" dirty="0">
-                <a:solidFill>
-                  <a:schemeClr val="dk1"/>
-                </a:solidFill>
-                <a:latin typeface="Times New Roman"/>
-                <a:ea typeface="Times New Roman"/>
-                <a:cs typeface="Times New Roman"/>
-                <a:sym typeface="Times New Roman"/>
-              </a:rPr>
-              <a:t>Algorithmic Innovation (Accuracy Side – </a:t>
-            </a:r>
-            <a:r>
-              <a:rPr lang="en-US" sz="2500" b="1" dirty="0" err="1">
-                <a:solidFill>
-                  <a:schemeClr val="dk1"/>
-                </a:solidFill>
-                <a:latin typeface="Times New Roman"/>
-                <a:ea typeface="Times New Roman"/>
-                <a:cs typeface="Times New Roman"/>
-                <a:sym typeface="Times New Roman"/>
-              </a:rPr>
-              <a:t>DPGrammar</a:t>
-            </a:r>
-            <a:r>
-              <a:rPr lang="en-US" sz="2500" b="1" dirty="0">
-                <a:solidFill>
-                  <a:schemeClr val="dk1"/>
-                </a:solidFill>
-                <a:latin typeface="Times New Roman"/>
-                <a:ea typeface="Times New Roman"/>
-                <a:cs typeface="Times New Roman"/>
-                <a:sym typeface="Times New Roman"/>
-              </a:rPr>
-              <a:t>)</a:t>
-            </a:r>
-            <a:endParaRPr sz="2500" b="1" dirty="0">
-              <a:solidFill>
-                <a:schemeClr val="dk1"/>
-              </a:solidFill>
-              <a:latin typeface="Times New Roman"/>
-              <a:ea typeface="Times New Roman"/>
-              <a:cs typeface="Times New Roman"/>
-              <a:sym typeface="Times New Roman"/>
-            </a:endParaRPr>
-          </a:p>
-          <a:p>
-            <a:pPr marL="914400" lvl="1" indent="-387350" algn="just">
-              <a:buClr>
-                <a:schemeClr val="dk1"/>
-              </a:buClr>
-              <a:buSzPts val="2500"/>
-              <a:buFont typeface="Times New Roman"/>
-              <a:buChar char="○"/>
-            </a:pPr>
-            <a:r>
-              <a:rPr lang="en-US" sz="2500" dirty="0">
-                <a:solidFill>
-                  <a:schemeClr val="dk1"/>
-                </a:solidFill>
-                <a:latin typeface="Times New Roman"/>
-                <a:ea typeface="Times New Roman"/>
-                <a:cs typeface="Times New Roman"/>
-                <a:sym typeface="Times New Roman"/>
-              </a:rPr>
-              <a:t>Detects violated spans [c, s) after each batch unmask, positions where the committed tokens break the grammar automaton state.</a:t>
-            </a:r>
-          </a:p>
-          <a:p>
-            <a:pPr marL="914400" lvl="1" indent="-387350" algn="just">
-              <a:buClr>
-                <a:schemeClr val="dk1"/>
-              </a:buClr>
-              <a:buSzPts val="2500"/>
-              <a:buFont typeface="Times New Roman"/>
-              <a:buChar char="○"/>
-            </a:pPr>
-            <a:r>
-              <a:rPr lang="en-US" sz="2500" dirty="0">
-                <a:solidFill>
-                  <a:schemeClr val="dk1"/>
-                </a:solidFill>
-                <a:latin typeface="Times New Roman"/>
-                <a:ea typeface="Times New Roman"/>
-                <a:cs typeface="Times New Roman"/>
-                <a:sym typeface="Times New Roman"/>
-              </a:rPr>
-              <a:t>Runs a Viterbi Dynamic Programming over the entire span, tracking grammar DFA states across top-K token candidates to jointly select the highest-probability valid replacement sequence in one pass.</a:t>
-            </a:r>
-            <a:endParaRPr sz="2400" b="0" i="0" u="none" strike="noStrike" cap="none" dirty="0">
-              <a:solidFill>
-                <a:schemeClr val="dk1"/>
-              </a:solidFill>
-              <a:latin typeface="Times New Roman"/>
-              <a:ea typeface="Times New Roman"/>
-              <a:cs typeface="Times New Roman"/>
-              <a:sym typeface="Times New Roman"/>
-            </a:endParaRPr>
-          </a:p>
         </p:txBody>
       </p:sp>
       <p:sp>
@@ -17420,8 +17148,8 @@
         </p:nvSpPr>
         <p:spPr>
           <a:xfrm>
-            <a:off x="983975" y="21476099"/>
-            <a:ext cx="10058700" cy="5148675"/>
+            <a:off x="11278343" y="14302481"/>
+            <a:ext cx="12486350" cy="5148675"/>
           </a:xfrm>
           <a:prstGeom prst="rect">
             <a:avLst/>
@@ -17480,8 +17208,8 @@
         </p:nvSpPr>
         <p:spPr>
           <a:xfrm>
-            <a:off x="11298013" y="14284316"/>
-            <a:ext cx="12442800" cy="12360222"/>
+            <a:off x="983945" y="13025129"/>
+            <a:ext cx="10046813" cy="13963525"/>
           </a:xfrm>
           <a:prstGeom prst="rect">
             <a:avLst/>
@@ -17503,25 +17231,11 @@
           </a:bodyPr>
           <a:lstStyle/>
           <a:p>
-            <a:pPr marL="0" marR="0" lvl="0" indent="0" algn="just" rtl="0">
-              <a:lnSpc>
-                <a:spcPct val="100000"/>
-              </a:lnSpc>
-              <a:spcBef>
-                <a:spcPts val="0"/>
-              </a:spcBef>
-              <a:spcAft>
-                <a:spcPts val="0"/>
-              </a:spcAft>
-              <a:buClr>
-                <a:srgbClr val="000000"/>
-              </a:buClr>
+            <a:pPr lvl="0" algn="just">
               <a:buSzPts val="2700"/>
-              <a:buFont typeface="Arial"/>
-              <a:buNone/>
             </a:pPr>
             <a:r>
-              <a:rPr lang="en-US" sz="2700" b="1" u="sng" dirty="0" err="1">
+              <a:rPr lang="en-US" altLang="zh-TW" sz="2800" b="1" u="sng" dirty="0">
                 <a:solidFill>
                   <a:srgbClr val="274E13"/>
                 </a:solidFill>
@@ -17533,10 +17247,10 @@
                 <a:cs typeface="Times New Roman"/>
                 <a:sym typeface="Times New Roman"/>
               </a:rPr>
-              <a:t>DGrammar</a:t>
-            </a:r>
-            <a:r>
-              <a:rPr lang="en-US" sz="2700" b="1" u="sng" dirty="0">
+              <a:t>Engineering Optimization (</a:t>
+            </a:r>
+            <a:r>
+              <a:rPr lang="en-US" altLang="zh-TW" sz="2800" b="1" u="sng" dirty="0" err="1">
                 <a:solidFill>
                   <a:srgbClr val="274E13"/>
                 </a:solidFill>
@@ -17548,20 +17262,23 @@
                 <a:cs typeface="Times New Roman"/>
                 <a:sym typeface="Times New Roman"/>
               </a:rPr>
-              <a:t>:</a:t>
-            </a:r>
-            <a:endParaRPr sz="2400" dirty="0">
-              <a:solidFill>
-                <a:schemeClr val="dk1"/>
-              </a:solidFill>
-              <a:highlight>
-                <a:srgbClr val="D9EAD3"/>
-              </a:highlight>
-              <a:latin typeface="Times New Roman"/>
-              <a:ea typeface="Times New Roman"/>
-              <a:cs typeface="Times New Roman"/>
-              <a:sym typeface="Times New Roman"/>
-            </a:endParaRPr>
+              <a:t>Dgrammar</a:t>
+            </a:r>
+            <a:r>
+              <a:rPr lang="en-US" altLang="zh-TW" sz="2800" b="1" u="sng" dirty="0">
+                <a:solidFill>
+                  <a:srgbClr val="274E13"/>
+                </a:solidFill>
+                <a:highlight>
+                  <a:srgbClr val="D9EAD3"/>
+                </a:highlight>
+                <a:latin typeface="Times New Roman"/>
+                <a:ea typeface="Times New Roman"/>
+                <a:cs typeface="Times New Roman"/>
+                <a:sym typeface="Times New Roman"/>
+              </a:rPr>
+              <a:t>): </a:t>
+            </a:r>
           </a:p>
           <a:p>
             <a:pPr marL="457200" lvl="0" indent="-387350" algn="just">
@@ -17582,7 +17299,7 @@
                 <a:cs typeface="Times New Roman"/>
                 <a:sym typeface="Times New Roman"/>
               </a:rPr>
-              <a:t>Incremental parser state</a:t>
+              <a:t>Frontier-only masking: </a:t>
             </a:r>
             <a:r>
               <a:rPr lang="en-US" sz="2500" dirty="0">
@@ -17594,31 +17311,7 @@
                 <a:cs typeface="Times New Roman"/>
                 <a:sym typeface="Times New Roman"/>
               </a:rPr>
-              <a:t>: maintains a live grammar automaton (</a:t>
-            </a:r>
-            <a:r>
-              <a:rPr lang="en-US" sz="2500" dirty="0" err="1">
-                <a:solidFill>
-                  <a:schemeClr val="dk1"/>
-                </a:solidFill>
-                <a:latin typeface="Courier New" panose="02070309020205020404" pitchFamily="49" charset="0"/>
-                <a:ea typeface="Times New Roman"/>
-                <a:cs typeface="Courier New" panose="02070309020205020404" pitchFamily="49" charset="0"/>
-                <a:sym typeface="Times New Roman"/>
-              </a:rPr>
-              <a:t>LLMatcher</a:t>
-            </a:r>
-            <a:r>
-              <a:rPr lang="en-US" sz="2500" dirty="0">
-                <a:solidFill>
-                  <a:schemeClr val="dk1"/>
-                </a:solidFill>
-                <a:latin typeface="Times New Roman"/>
-                <a:ea typeface="Times New Roman"/>
-                <a:cs typeface="Times New Roman"/>
-                <a:sym typeface="Times New Roman"/>
-              </a:rPr>
-              <a:t>) that advances token-by-token, so mask computation at each position requires only a diff from the previous state rather than recomputing from scratch</a:t>
+              <a:t>grammar constraints apply exclusively at the first unfilled position; all other parallel slots sample freely, avoiding the K-completion overhead of stochastic lookahead and making token placement fully deterministic</a:t>
             </a:r>
           </a:p>
           <a:p>
@@ -17640,7 +17333,7 @@
                 <a:cs typeface="Times New Roman"/>
                 <a:sym typeface="Times New Roman"/>
               </a:rPr>
-              <a:t>Async mask overlap</a:t>
+              <a:t>Incremental parser state</a:t>
             </a:r>
             <a:r>
               <a:rPr lang="en-US" sz="2500" dirty="0">
@@ -17652,7 +17345,31 @@
                 <a:cs typeface="Times New Roman"/>
                 <a:sym typeface="Times New Roman"/>
               </a:rPr>
-              <a:t>: CPU grammar mask construction runs concurrently with the GPU forward pass, by the time logits are ready, the allowed-token mask is already computed, effectively hiding constraint overhead</a:t>
+              <a:t>: a live </a:t>
+            </a:r>
+            <a:r>
+              <a:rPr lang="en-US" sz="2500" dirty="0" err="1">
+                <a:solidFill>
+                  <a:schemeClr val="dk1"/>
+                </a:solidFill>
+                <a:latin typeface="Courier New" panose="02070309020205020404" pitchFamily="49" charset="0"/>
+                <a:ea typeface="Times New Roman"/>
+                <a:cs typeface="Courier New" panose="02070309020205020404" pitchFamily="49" charset="0"/>
+                <a:sym typeface="Times New Roman"/>
+              </a:rPr>
+              <a:t>LLMatcher</a:t>
+            </a:r>
+            <a:r>
+              <a:rPr lang="en-US" sz="2500" dirty="0">
+                <a:solidFill>
+                  <a:schemeClr val="dk1"/>
+                </a:solidFill>
+                <a:latin typeface="Times New Roman"/>
+                <a:ea typeface="Times New Roman"/>
+                <a:cs typeface="Times New Roman"/>
+                <a:sym typeface="Times New Roman"/>
+              </a:rPr>
+              <a:t> automaton advances token-by-token as tokens are committed, so each mask computation is a diff from the current state rather than a full replay from the prompt</a:t>
             </a:r>
           </a:p>
           <a:p>
@@ -17686,7 +17403,7 @@
                 <a:cs typeface="Times New Roman"/>
                 <a:sym typeface="Times New Roman"/>
               </a:rPr>
-              <a:t>: batch size grows additively when tokens are accepted and shrinks multiplicatively on violation, dynamically balancing throughput against resample risk without manual tuning</a:t>
+              <a:t>: batch size grows by 1 on each successful commit and resets to 1 on any grammar violation, dynamically balancing throughput against resample risk without manual tuning</a:t>
             </a:r>
           </a:p>
           <a:p>
@@ -17720,17 +17437,15 @@
                 <a:cs typeface="Times New Roman"/>
                 <a:sym typeface="Times New Roman"/>
               </a:rPr>
-              <a:t>: once the automaton signals a complete, schema-valid string, remaining diffusion steps are skipped, avoiding unnecessary forward passes on already-settled tokens</a:t>
+              <a:t>: once the automaton signals a complete, schema-valid string, remaining diffusion steps are skipped entirely, avoiding wasted forward passes on already-settled tokens</a:t>
             </a:r>
           </a:p>
           <a:p>
-            <a:pPr marL="457200" lvl="0" indent="-387350" algn="just">
+            <a:pPr marL="69850" lvl="0" algn="just">
               <a:buClr>
                 <a:schemeClr val="dk1"/>
               </a:buClr>
               <a:buSzPts val="2500"/>
-              <a:buFont typeface="Times New Roman"/>
-              <a:buChar char="●"/>
             </a:pPr>
             <a:endParaRPr sz="2500" dirty="0">
               <a:solidFill>
@@ -17743,25 +17458,11 @@
             </a:endParaRPr>
           </a:p>
           <a:p>
-            <a:pPr marL="0" marR="0" lvl="0" indent="0" algn="just" rtl="0">
-              <a:lnSpc>
-                <a:spcPct val="100000"/>
-              </a:lnSpc>
-              <a:spcBef>
-                <a:spcPts val="0"/>
-              </a:spcBef>
-              <a:spcAft>
-                <a:spcPts val="0"/>
-              </a:spcAft>
-              <a:buClr>
-                <a:srgbClr val="000000"/>
-              </a:buClr>
+            <a:pPr lvl="0" algn="just">
               <a:buSzPts val="2700"/>
-              <a:buFont typeface="Arial"/>
-              <a:buNone/>
             </a:pPr>
             <a:r>
-              <a:rPr lang="en-US" sz="2700" b="1" u="sng" dirty="0" err="1">
+              <a:rPr lang="en-US" altLang="zh-TW" sz="2800" b="1" u="sng" dirty="0">
                 <a:solidFill>
                   <a:srgbClr val="274E13"/>
                 </a:solidFill>
@@ -17773,10 +17474,10 @@
                 <a:cs typeface="Times New Roman"/>
                 <a:sym typeface="Times New Roman"/>
               </a:rPr>
-              <a:t>DPGrammar</a:t>
-            </a:r>
-            <a:r>
-              <a:rPr lang="en-US" sz="2700" b="1" u="sng" dirty="0">
+              <a:t>Algorithmic Innovation (</a:t>
+            </a:r>
+            <a:r>
+              <a:rPr lang="en-US" altLang="zh-TW" sz="2800" b="1" u="sng" dirty="0" err="1">
                 <a:solidFill>
                   <a:srgbClr val="274E13"/>
                 </a:solidFill>
@@ -17788,7 +17489,22 @@
                 <a:cs typeface="Times New Roman"/>
                 <a:sym typeface="Times New Roman"/>
               </a:rPr>
-              <a:t>:</a:t>
+              <a:t>DPGrammar</a:t>
+            </a:r>
+            <a:r>
+              <a:rPr lang="en-US" altLang="zh-TW" sz="2800" b="1" u="sng" dirty="0">
+                <a:solidFill>
+                  <a:srgbClr val="274E13"/>
+                </a:solidFill>
+                <a:highlight>
+                  <a:srgbClr val="D9EAD3"/>
+                </a:highlight>
+                <a:latin typeface="Times New Roman"/>
+                <a:ea typeface="Times New Roman"/>
+                <a:cs typeface="Times New Roman"/>
+                <a:sym typeface="Times New Roman"/>
+              </a:rPr>
+              <a:t>): </a:t>
             </a:r>
           </a:p>
           <a:p>
@@ -17870,7 +17586,31 @@
                 <a:cs typeface="Times New Roman"/>
                 <a:sym typeface="Times New Roman"/>
               </a:rPr>
-              <a:t> fails marks the start c of the violated span [c, s)</a:t>
+              <a:t> fails marks the start </a:t>
+            </a:r>
+            <a:r>
+              <a:rPr lang="en-US" sz="2500" dirty="0">
+                <a:solidFill>
+                  <a:schemeClr val="dk1"/>
+                </a:solidFill>
+                <a:latin typeface="Courier New" panose="02070309020205020404" pitchFamily="49" charset="0"/>
+                <a:ea typeface="Times New Roman"/>
+                <a:cs typeface="Courier New" panose="02070309020205020404" pitchFamily="49" charset="0"/>
+                <a:sym typeface="Times New Roman"/>
+              </a:rPr>
+              <a:t>c</a:t>
+            </a:r>
+            <a:r>
+              <a:rPr lang="en-US" sz="2500" dirty="0">
+                <a:solidFill>
+                  <a:schemeClr val="dk1"/>
+                </a:solidFill>
+                <a:latin typeface="Times New Roman"/>
+                <a:ea typeface="Times New Roman"/>
+                <a:cs typeface="Times New Roman"/>
+                <a:sym typeface="Times New Roman"/>
+              </a:rPr>
+              <a:t> of the violated span</a:t>
             </a:r>
           </a:p>
           <a:p>
@@ -17892,7 +17632,31 @@
                 <a:cs typeface="Times New Roman"/>
                 <a:sym typeface="Times New Roman"/>
               </a:rPr>
-              <a:t>Phase 1 – rollback exploration</a:t>
+              <a:t>Span boundary (</a:t>
+            </a:r>
+            <a:r>
+              <a:rPr lang="en-US" sz="2500" b="1" dirty="0" err="1">
+                <a:solidFill>
+                  <a:schemeClr val="dk1"/>
+                </a:solidFill>
+                <a:latin typeface="Times New Roman"/>
+                <a:ea typeface="Times New Roman"/>
+                <a:cs typeface="Times New Roman"/>
+                <a:sym typeface="Times New Roman"/>
+              </a:rPr>
+              <a:t>find_constraint_end</a:t>
+            </a:r>
+            <a:r>
+              <a:rPr lang="en-US" sz="2500" b="1" dirty="0">
+                <a:solidFill>
+                  <a:schemeClr val="dk1"/>
+                </a:solidFill>
+                <a:latin typeface="Times New Roman"/>
+                <a:ea typeface="Times New Roman"/>
+                <a:cs typeface="Times New Roman"/>
+                <a:sym typeface="Times New Roman"/>
+              </a:rPr>
+              <a:t>)</a:t>
             </a:r>
             <a:r>
               <a:rPr lang="en-US" sz="2500" dirty="0">
@@ -17904,10 +17668,10 @@
                 <a:cs typeface="Times New Roman"/>
                 <a:sym typeface="Times New Roman"/>
               </a:rPr>
-              <a:t>: for each position in [c, s), iterates over top-K tokens and calls </a:t>
-            </a:r>
-            <a:r>
-              <a:rPr lang="en-US" sz="2500" dirty="0" err="1">
+              <a:t>: probes forward from </a:t>
+            </a:r>
+            <a:r>
+              <a:rPr lang="en-US" sz="2500" dirty="0">
                 <a:solidFill>
                   <a:schemeClr val="dk1"/>
                 </a:solidFill>
@@ -17916,7 +17680,7 @@
                 <a:cs typeface="Courier New" panose="02070309020205020404" pitchFamily="49" charset="0"/>
                 <a:sym typeface="Times New Roman"/>
               </a:rPr>
-              <a:t>try_consume</a:t>
+              <a:t>c</a:t>
             </a:r>
             <a:r>
               <a:rPr lang="en-US" sz="2500" dirty="0">
@@ -17928,7 +17692,31 @@
                 <a:cs typeface="Times New Roman"/>
                 <a:sym typeface="Times New Roman"/>
               </a:rPr>
-              <a:t> then rollback on the shared matcher, no cloning, pure in-place state manipulation, to cheaply score all candidates</a:t>
+              <a:t> using the automaton while tracking bracket depth in the original token sequence; the span end </a:t>
+            </a:r>
+            <a:r>
+              <a:rPr lang="en-US" sz="2500" dirty="0">
+                <a:solidFill>
+                  <a:schemeClr val="dk1"/>
+                </a:solidFill>
+                <a:latin typeface="Courier New" panose="02070309020205020404" pitchFamily="49" charset="0"/>
+                <a:ea typeface="Times New Roman"/>
+                <a:cs typeface="Courier New" panose="02070309020205020404" pitchFamily="49" charset="0"/>
+                <a:sym typeface="Times New Roman"/>
+              </a:rPr>
+              <a:t>s</a:t>
+            </a:r>
+            <a:r>
+              <a:rPr lang="en-US" sz="2500" dirty="0">
+                <a:solidFill>
+                  <a:schemeClr val="dk1"/>
+                </a:solidFill>
+                <a:latin typeface="Times New Roman"/>
+                <a:ea typeface="Times New Roman"/>
+                <a:cs typeface="Times New Roman"/>
+                <a:sym typeface="Times New Roman"/>
+              </a:rPr>
+              <a:t> is set at the first grammar-consistent junction where net bracket depth returns to zero, preventing the DP from stopping inside an unclosed array or object</a:t>
             </a:r>
           </a:p>
           <a:p>
@@ -17950,7 +17738,7 @@
                 <a:cs typeface="Times New Roman"/>
                 <a:sym typeface="Times New Roman"/>
               </a:rPr>
-              <a:t>Phase 2 – clone winners</a:t>
+              <a:t>Phase 1 – rollback exploration</a:t>
             </a:r>
             <a:r>
               <a:rPr lang="en-US" sz="2500" dirty="0">
@@ -17962,7 +17750,55 @@
                 <a:cs typeface="Times New Roman"/>
                 <a:sym typeface="Times New Roman"/>
               </a:rPr>
-              <a:t>: only the surviving DFA states (one per unique automaton state reached) are deep-copied, so memory scales with grammar branching factor rather than K</a:t>
+              <a:t>: for each position in </a:t>
+            </a:r>
+            <a:r>
+              <a:rPr lang="en-US" sz="2500" dirty="0">
+                <a:solidFill>
+                  <a:schemeClr val="dk1"/>
+                </a:solidFill>
+                <a:latin typeface="Courier New" panose="02070309020205020404" pitchFamily="49" charset="0"/>
+                <a:ea typeface="Times New Roman"/>
+                <a:cs typeface="Courier New" panose="02070309020205020404" pitchFamily="49" charset="0"/>
+                <a:sym typeface="Times New Roman"/>
+              </a:rPr>
+              <a:t>[c, s)</a:t>
+            </a:r>
+            <a:r>
+              <a:rPr lang="en-US" sz="2500" dirty="0">
+                <a:solidFill>
+                  <a:schemeClr val="dk1"/>
+                </a:solidFill>
+                <a:latin typeface="Times New Roman"/>
+                <a:ea typeface="Times New Roman"/>
+                <a:cs typeface="Times New Roman"/>
+                <a:sym typeface="Times New Roman"/>
+              </a:rPr>
+              <a:t>, iterates over top-K tokens, calling </a:t>
+            </a:r>
+            <a:r>
+              <a:rPr lang="en-US" sz="2500" dirty="0" err="1">
+                <a:solidFill>
+                  <a:schemeClr val="dk1"/>
+                </a:solidFill>
+                <a:latin typeface="Courier New" panose="02070309020205020404" pitchFamily="49" charset="0"/>
+                <a:ea typeface="Times New Roman"/>
+                <a:cs typeface="Courier New" panose="02070309020205020404" pitchFamily="49" charset="0"/>
+                <a:sym typeface="Times New Roman"/>
+              </a:rPr>
+              <a:t>try_consume</a:t>
+            </a:r>
+            <a:r>
+              <a:rPr lang="en-US" sz="2500" dirty="0">
+                <a:solidFill>
+                  <a:schemeClr val="dk1"/>
+                </a:solidFill>
+                <a:latin typeface="Times New Roman"/>
+                <a:ea typeface="Times New Roman"/>
+                <a:cs typeface="Times New Roman"/>
+                <a:sym typeface="Times New Roman"/>
+              </a:rPr>
+              <a:t> then rollback on the shared matcher to cheaply score all candidates in-place</a:t>
             </a:r>
           </a:p>
           <a:p>
@@ -17984,6 +17820,49 @@
                 <a:cs typeface="Times New Roman"/>
                 <a:sym typeface="Times New Roman"/>
               </a:rPr>
+              <a:t>Phase 2 – clone winners</a:t>
+            </a:r>
+            <a:r>
+              <a:rPr lang="en-US" sz="2500" dirty="0">
+                <a:solidFill>
+                  <a:schemeClr val="dk1"/>
+                </a:solidFill>
+                <a:latin typeface="Times New Roman"/>
+                <a:ea typeface="Times New Roman"/>
+                <a:cs typeface="Times New Roman"/>
+                <a:sym typeface="Times New Roman"/>
+              </a:rPr>
+              <a:t>: only the surviving DFA states (one per unique automaton state reachable at this step) are deep-copied; memory and clone cost scale with the number of reachable DFA states (~20–200 for typical JSON schemas), not with K</a:t>
+            </a:r>
+            <a:endParaRPr lang="en-US" sz="2500" dirty="0">
+              <a:solidFill>
+                <a:schemeClr val="dk1"/>
+              </a:solidFill>
+              <a:latin typeface="Courier New" panose="02070309020205020404" pitchFamily="49" charset="0"/>
+              <a:ea typeface="Times New Roman"/>
+              <a:cs typeface="Courier New" panose="02070309020205020404" pitchFamily="49" charset="0"/>
+              <a:sym typeface="Times New Roman"/>
+            </a:endParaRPr>
+          </a:p>
+          <a:p>
+            <a:pPr marL="457200" lvl="0" indent="-387350" algn="just">
+              <a:buClr>
+                <a:schemeClr val="dk1"/>
+              </a:buClr>
+              <a:buSzPts val="2500"/>
+              <a:buFont typeface="Times New Roman"/>
+              <a:buChar char="●"/>
+            </a:pPr>
+            <a:r>
+              <a:rPr lang="en-US" sz="2500" b="1" dirty="0">
+                <a:solidFill>
+                  <a:schemeClr val="dk1"/>
+                </a:solidFill>
+                <a:latin typeface="Times New Roman"/>
+                <a:ea typeface="Times New Roman"/>
+                <a:cs typeface="Times New Roman"/>
+                <a:sym typeface="Times New Roman"/>
+              </a:rPr>
               <a:t>Viterbi merge</a:t>
             </a:r>
             <a:r>
@@ -17996,7 +17875,7 @@
                 <a:cs typeface="Times New Roman"/>
                 <a:sym typeface="Times New Roman"/>
               </a:rPr>
-              <a:t>: when two token paths arrive at the same DFA state, the lower-log-probability path is pruned, guaranteeing the backtracked sequence is globally optimal over the span under the current forward's log-probabilities</a:t>
+              <a:t>: when two token paths arrive at the same DFA state, the lower-log-probability path is pruned; the backtracked sequence is thus globally optimal over the span under the current forward's log-probabilities</a:t>
             </a:r>
           </a:p>
         </p:txBody>
@@ -18009,8 +17888,8 @@
         </p:nvSpPr>
         <p:spPr>
           <a:xfrm>
-            <a:off x="24150805" y="19000353"/>
-            <a:ext cx="13011731" cy="857400"/>
+            <a:off x="11697525" y="25867259"/>
+            <a:ext cx="11667655" cy="857400"/>
           </a:xfrm>
           <a:prstGeom prst="rect">
             <a:avLst/>
@@ -18134,36 +18013,6 @@
           </a:p>
         </p:txBody>
       </p:sp>
-      <p:pic>
-        <p:nvPicPr>
-          <p:cNvPr id="3" name="圖片 2">
-            <a:extLst>
-              <a:ext uri="{FF2B5EF4-FFF2-40B4-BE49-F238E27FC236}">
-                <a16:creationId xmlns:a16="http://schemas.microsoft.com/office/drawing/2014/main" id="{871A607D-3EB9-07E0-2D1D-0BD893DC42DB}"/>
-              </a:ext>
-            </a:extLst>
-          </p:cNvPr>
-          <p:cNvPicPr>
-            <a:picLocks noChangeAspect="1"/>
-          </p:cNvPicPr>
-          <p:nvPr/>
-        </p:nvPicPr>
-        <p:blipFill>
-          <a:blip r:embed="rId10"/>
-          <a:stretch>
-            <a:fillRect/>
-          </a:stretch>
-        </p:blipFill>
-        <p:spPr>
-          <a:xfrm>
-            <a:off x="11541456" y="4094589"/>
-            <a:ext cx="12139010" cy="8993614"/>
-          </a:xfrm>
-          <a:prstGeom prst="rect">
-            <a:avLst/>
-          </a:prstGeom>
-        </p:spPr>
-      </p:pic>
       <p:sp>
         <p:nvSpPr>
           <p:cNvPr id="6" name="Google Shape;103;p1">
@@ -18258,7 +18107,7 @@
         </p:nvSpPr>
         <p:spPr>
           <a:xfrm>
-            <a:off x="11298012" y="3915312"/>
+            <a:off x="11298011" y="3913875"/>
             <a:ext cx="12466682" cy="9268232"/>
           </a:xfrm>
           <a:prstGeom prst="rect">
@@ -18470,6 +18319,3622 @@
         </p:nvSpPr>
         <p:spPr>
           <a:xfrm>
+            <a:off x="24031947" y="25603264"/>
+            <a:ext cx="13269300" cy="1385390"/>
+          </a:xfrm>
+          <a:prstGeom prst="rect">
+            <a:avLst/>
+          </a:prstGeom>
+          <a:noFill/>
+          <a:ln w="9525" cap="flat" cmpd="sng">
+            <a:solidFill>
+              <a:srgbClr val="005700"/>
+            </a:solidFill>
+            <a:prstDash val="solid"/>
+            <a:round/>
+            <a:headEnd type="none" w="sm" len="sm"/>
+            <a:tailEnd type="none" w="sm" len="sm"/>
+          </a:ln>
+        </p:spPr>
+        <p:txBody>
+          <a:bodyPr spcFirstLastPara="1" wrap="square" lIns="84625" tIns="84625" rIns="84625" bIns="84625" anchor="t" anchorCtr="0">
+            <a:noAutofit/>
+          </a:bodyPr>
+          <a:lstStyle/>
+          <a:p>
+            <a:pPr marL="0" marR="0" lvl="0" indent="0" algn="just" rtl="0">
+              <a:lnSpc>
+                <a:spcPct val="100000"/>
+              </a:lnSpc>
+              <a:spcBef>
+                <a:spcPts val="0"/>
+              </a:spcBef>
+              <a:spcAft>
+                <a:spcPts val="0"/>
+              </a:spcAft>
+              <a:buClr>
+                <a:srgbClr val="000000"/>
+              </a:buClr>
+              <a:buSzPts val="2700"/>
+              <a:buFont typeface="Arial"/>
+              <a:buNone/>
+            </a:pPr>
+            <a:r>
+              <a:rPr lang="en-US" sz="2500" dirty="0">
+                <a:solidFill>
+                  <a:schemeClr val="dk1"/>
+                </a:solidFill>
+                <a:latin typeface="Times New Roman"/>
+                <a:ea typeface="Times New Roman"/>
+                <a:cs typeface="Times New Roman"/>
+                <a:sym typeface="Times New Roman"/>
+              </a:rPr>
+              <a:t>References:</a:t>
+            </a:r>
+          </a:p>
+          <a:p>
+            <a:pPr lvl="0" algn="just">
+              <a:buSzPts val="2700"/>
+            </a:pPr>
+            <a:r>
+              <a:rPr lang="en-US" sz="2500" dirty="0">
+                <a:solidFill>
+                  <a:schemeClr val="dk1"/>
+                </a:solidFill>
+                <a:latin typeface="Times New Roman"/>
+                <a:ea typeface="Times New Roman"/>
+                <a:cs typeface="Times New Roman"/>
+                <a:sym typeface="Times New Roman"/>
+              </a:rPr>
+              <a:t>[1] Zhang et al., “Lookahead-then-Verify: Reliable Constrained Decoding for Diffusion LLMs under Context-Free Grammars”,  ACM’26</a:t>
+            </a:r>
+            <a:endParaRPr sz="2500" dirty="0">
+              <a:solidFill>
+                <a:schemeClr val="dk1"/>
+              </a:solidFill>
+              <a:latin typeface="Times New Roman"/>
+              <a:ea typeface="Times New Roman"/>
+              <a:cs typeface="Times New Roman"/>
+              <a:sym typeface="Times New Roman"/>
+            </a:endParaRPr>
+          </a:p>
+        </p:txBody>
+      </p:sp>
+      <p:sp>
+        <p:nvSpPr>
+          <p:cNvPr id="5" name="Google Shape;97;p1">
+            <a:extLst>
+              <a:ext uri="{FF2B5EF4-FFF2-40B4-BE49-F238E27FC236}">
+                <a16:creationId xmlns:a16="http://schemas.microsoft.com/office/drawing/2014/main" id="{A472E736-DFC6-ACFC-1BDC-59153D48348F}"/>
+              </a:ext>
+            </a:extLst>
+          </p:cNvPr>
+          <p:cNvSpPr txBox="1"/>
+          <p:nvPr/>
+        </p:nvSpPr>
+        <p:spPr>
+          <a:xfrm>
+            <a:off x="24031947" y="20758577"/>
+            <a:ext cx="13269300" cy="852000"/>
+          </a:xfrm>
+          <a:prstGeom prst="rect">
+            <a:avLst/>
+          </a:prstGeom>
+          <a:solidFill>
+            <a:srgbClr val="93C47D"/>
+          </a:solidFill>
+          <a:ln w="9525" cap="flat" cmpd="sng">
+            <a:solidFill>
+              <a:srgbClr val="005700"/>
+            </a:solidFill>
+            <a:prstDash val="solid"/>
+            <a:round/>
+            <a:headEnd type="none" w="sm" len="sm"/>
+            <a:tailEnd type="none" w="sm" len="sm"/>
+          </a:ln>
+        </p:spPr>
+        <p:txBody>
+          <a:bodyPr spcFirstLastPara="1" wrap="square" lIns="340775" tIns="170375" rIns="340775" bIns="170375" anchor="t" anchorCtr="0">
+            <a:spAutoFit/>
+          </a:bodyPr>
+          <a:lstStyle/>
+          <a:p>
+            <a:pPr marL="0" marR="0" lvl="0" indent="0" algn="l" rtl="0">
+              <a:lnSpc>
+                <a:spcPct val="100000"/>
+              </a:lnSpc>
+              <a:spcBef>
+                <a:spcPts val="0"/>
+              </a:spcBef>
+              <a:spcAft>
+                <a:spcPts val="0"/>
+              </a:spcAft>
+              <a:buClr>
+                <a:srgbClr val="000000"/>
+              </a:buClr>
+              <a:buSzPts val="3300"/>
+              <a:buFont typeface="Arial"/>
+              <a:buNone/>
+            </a:pPr>
+            <a:r>
+              <a:rPr lang="en-US" sz="3300" b="1" i="0" u="none" strike="noStrike" cap="none" dirty="0">
+                <a:solidFill>
+                  <a:schemeClr val="dk1"/>
+                </a:solidFill>
+                <a:latin typeface="Arial"/>
+                <a:ea typeface="Arial"/>
+                <a:cs typeface="Arial"/>
+                <a:sym typeface="Arial"/>
+              </a:rPr>
+              <a:t>Limitations</a:t>
+            </a:r>
+            <a:endParaRPr sz="1100" b="0" i="0" u="none" strike="noStrike" cap="none" dirty="0">
+              <a:solidFill>
+                <a:srgbClr val="000000"/>
+              </a:solidFill>
+              <a:latin typeface="Arial"/>
+              <a:ea typeface="Arial"/>
+              <a:cs typeface="Arial"/>
+              <a:sym typeface="Arial"/>
+            </a:endParaRPr>
+          </a:p>
+        </p:txBody>
+      </p:sp>
+      <p:sp>
+        <p:nvSpPr>
+          <p:cNvPr id="7" name="Google Shape;104;p1">
+            <a:extLst>
+              <a:ext uri="{FF2B5EF4-FFF2-40B4-BE49-F238E27FC236}">
+                <a16:creationId xmlns:a16="http://schemas.microsoft.com/office/drawing/2014/main" id="{8013CE5E-4C4B-547A-3195-6D20511AC32A}"/>
+              </a:ext>
+            </a:extLst>
+          </p:cNvPr>
+          <p:cNvSpPr txBox="1"/>
+          <p:nvPr/>
+        </p:nvSpPr>
+        <p:spPr>
+          <a:xfrm>
+            <a:off x="24031947" y="21610577"/>
+            <a:ext cx="13269300" cy="3732988"/>
+          </a:xfrm>
+          <a:prstGeom prst="rect">
+            <a:avLst/>
+          </a:prstGeom>
+          <a:noFill/>
+          <a:ln w="9525" cap="flat" cmpd="sng">
+            <a:solidFill>
+              <a:srgbClr val="005700"/>
+            </a:solidFill>
+            <a:prstDash val="solid"/>
+            <a:round/>
+            <a:headEnd type="none" w="sm" len="sm"/>
+            <a:tailEnd type="none" w="sm" len="sm"/>
+          </a:ln>
+        </p:spPr>
+        <p:txBody>
+          <a:bodyPr spcFirstLastPara="1" wrap="square" lIns="84625" tIns="84625" rIns="84625" bIns="84625" anchor="t" anchorCtr="0">
+            <a:noAutofit/>
+          </a:bodyPr>
+          <a:lstStyle/>
+          <a:p>
+            <a:pPr marL="457200" indent="-387350" algn="just">
+              <a:buClr>
+                <a:schemeClr val="dk1"/>
+              </a:buClr>
+              <a:buSzPts val="2500"/>
+              <a:buFont typeface="Wingdings" pitchFamily="2" charset="2"/>
+              <a:buChar char="l"/>
+            </a:pPr>
+            <a:r>
+              <a:rPr lang="en-US" altLang="zh-TW" sz="2500" b="1" dirty="0">
+                <a:solidFill>
+                  <a:schemeClr val="dk1"/>
+                </a:solidFill>
+                <a:latin typeface="Times New Roman"/>
+                <a:ea typeface="Times New Roman"/>
+                <a:cs typeface="Times New Roman"/>
+                <a:sym typeface="Times New Roman"/>
+              </a:rPr>
+              <a:t>Validity ≠ Content Quality</a:t>
+            </a:r>
+            <a:r>
+              <a:rPr lang="en-US" altLang="zh-TW" sz="2500" dirty="0">
+                <a:solidFill>
+                  <a:schemeClr val="dk1"/>
+                </a:solidFill>
+                <a:latin typeface="Times New Roman"/>
+                <a:ea typeface="Times New Roman"/>
+                <a:cs typeface="Times New Roman"/>
+                <a:sym typeface="Times New Roman"/>
+              </a:rPr>
+              <a:t>: grammar constraints guarantee structural correctness but cannot improve semantic richness, LLaDA-8B-Instruct still produces degenerate yet valid outputs ([], {}, "x") on complex schemas, a property of the underlying model rather than the constraint method</a:t>
+            </a:r>
+          </a:p>
+          <a:p>
+            <a:pPr marL="457200" indent="-387350" algn="just">
+              <a:buClr>
+                <a:schemeClr val="dk1"/>
+              </a:buClr>
+              <a:buSzPts val="2500"/>
+              <a:buFont typeface="Wingdings" pitchFamily="2" charset="2"/>
+              <a:buChar char="l"/>
+            </a:pPr>
+            <a:r>
+              <a:rPr lang="en-US" altLang="zh-TW" sz="2500" b="1" dirty="0">
+                <a:solidFill>
+                  <a:schemeClr val="dk1"/>
+                </a:solidFill>
+                <a:latin typeface="Times New Roman"/>
+                <a:ea typeface="Times New Roman"/>
+                <a:cs typeface="Times New Roman"/>
+                <a:sym typeface="Times New Roman"/>
+              </a:rPr>
+              <a:t>DP cannot fix empty-value degenerate outputs</a:t>
+            </a:r>
+            <a:r>
+              <a:rPr lang="en-US" altLang="zh-TW" sz="2500" dirty="0">
+                <a:solidFill>
+                  <a:schemeClr val="dk1"/>
+                </a:solidFill>
+                <a:latin typeface="Times New Roman"/>
+                <a:ea typeface="Times New Roman"/>
+                <a:cs typeface="Times New Roman"/>
+                <a:sym typeface="Times New Roman"/>
+              </a:rPr>
+              <a:t>: the Viterbi repair only triggers on grammar violations; once generation completes, {} and [] are already placed as concrete tokens (no MASK positions remain), and both are grammatically valid JSON, the automaton never raises a violation, so data: {} or links: [] are never visible to the DP; this is a fundamental limitation of violation-driven repair, not a beam-width issue</a:t>
+            </a:r>
+          </a:p>
+        </p:txBody>
+      </p:sp>
+      <p:sp>
+        <p:nvSpPr>
+          <p:cNvPr id="11" name="Google Shape;97;p1">
+            <a:extLst>
+              <a:ext uri="{FF2B5EF4-FFF2-40B4-BE49-F238E27FC236}">
+                <a16:creationId xmlns:a16="http://schemas.microsoft.com/office/drawing/2014/main" id="{59977086-9D42-2ABE-6FFA-358AF48C659C}"/>
+              </a:ext>
+            </a:extLst>
+          </p:cNvPr>
+          <p:cNvSpPr txBox="1"/>
+          <p:nvPr/>
+        </p:nvSpPr>
+        <p:spPr>
+          <a:xfrm>
+            <a:off x="24031947" y="17645753"/>
+            <a:ext cx="13269300" cy="852000"/>
+          </a:xfrm>
+          <a:prstGeom prst="rect">
+            <a:avLst/>
+          </a:prstGeom>
+          <a:solidFill>
+            <a:srgbClr val="93C47D"/>
+          </a:solidFill>
+          <a:ln w="9525" cap="flat" cmpd="sng">
+            <a:solidFill>
+              <a:srgbClr val="005700"/>
+            </a:solidFill>
+            <a:prstDash val="solid"/>
+            <a:round/>
+            <a:headEnd type="none" w="sm" len="sm"/>
+            <a:tailEnd type="none" w="sm" len="sm"/>
+          </a:ln>
+        </p:spPr>
+        <p:txBody>
+          <a:bodyPr spcFirstLastPara="1" wrap="square" lIns="340775" tIns="170375" rIns="340775" bIns="170375" anchor="t" anchorCtr="0">
+            <a:spAutoFit/>
+          </a:bodyPr>
+          <a:lstStyle/>
+          <a:p>
+            <a:pPr marL="0" marR="0" lvl="0" indent="0" algn="l" rtl="0">
+              <a:lnSpc>
+                <a:spcPct val="100000"/>
+              </a:lnSpc>
+              <a:spcBef>
+                <a:spcPts val="0"/>
+              </a:spcBef>
+              <a:spcAft>
+                <a:spcPts val="0"/>
+              </a:spcAft>
+              <a:buClr>
+                <a:srgbClr val="000000"/>
+              </a:buClr>
+              <a:buSzPts val="3300"/>
+              <a:buFont typeface="Arial"/>
+              <a:buNone/>
+            </a:pPr>
+            <a:r>
+              <a:rPr lang="en-US" sz="3300" b="1" i="0" u="none" strike="noStrike" cap="none" dirty="0">
+                <a:solidFill>
+                  <a:schemeClr val="dk1"/>
+                </a:solidFill>
+                <a:latin typeface="Arial"/>
+                <a:ea typeface="Arial"/>
+                <a:cs typeface="Arial"/>
+                <a:sym typeface="Arial"/>
+              </a:rPr>
+              <a:t>Future Work</a:t>
+            </a:r>
+            <a:endParaRPr sz="1100" b="0" i="0" u="none" strike="noStrike" cap="none" dirty="0">
+              <a:solidFill>
+                <a:srgbClr val="000000"/>
+              </a:solidFill>
+              <a:latin typeface="Arial"/>
+              <a:ea typeface="Arial"/>
+              <a:cs typeface="Arial"/>
+              <a:sym typeface="Arial"/>
+            </a:endParaRPr>
+          </a:p>
+        </p:txBody>
+      </p:sp>
+      <p:sp>
+        <p:nvSpPr>
+          <p:cNvPr id="13" name="Google Shape;104;p1">
+            <a:extLst>
+              <a:ext uri="{FF2B5EF4-FFF2-40B4-BE49-F238E27FC236}">
+                <a16:creationId xmlns:a16="http://schemas.microsoft.com/office/drawing/2014/main" id="{606A1702-1557-8989-7DE2-486560C8AD80}"/>
+              </a:ext>
+            </a:extLst>
+          </p:cNvPr>
+          <p:cNvSpPr txBox="1"/>
+          <p:nvPr/>
+        </p:nvSpPr>
+        <p:spPr>
+          <a:xfrm>
+            <a:off x="24031947" y="18497753"/>
+            <a:ext cx="13269300" cy="1906807"/>
+          </a:xfrm>
+          <a:prstGeom prst="rect">
+            <a:avLst/>
+          </a:prstGeom>
+          <a:noFill/>
+          <a:ln w="9525" cap="flat" cmpd="sng">
+            <a:solidFill>
+              <a:srgbClr val="005700"/>
+            </a:solidFill>
+            <a:prstDash val="solid"/>
+            <a:round/>
+            <a:headEnd type="none" w="sm" len="sm"/>
+            <a:tailEnd type="none" w="sm" len="sm"/>
+          </a:ln>
+        </p:spPr>
+        <p:txBody>
+          <a:bodyPr spcFirstLastPara="1" wrap="square" lIns="84625" tIns="84625" rIns="84625" bIns="84625" anchor="t" anchorCtr="0">
+            <a:noAutofit/>
+          </a:bodyPr>
+          <a:lstStyle/>
+          <a:p>
+            <a:pPr marL="412750" lvl="0" indent="-342900" algn="just">
+              <a:buClr>
+                <a:schemeClr val="dk1"/>
+              </a:buClr>
+              <a:buSzPts val="2500"/>
+              <a:buFont typeface="Wingdings" pitchFamily="2" charset="2"/>
+              <a:buChar char="l"/>
+            </a:pPr>
+            <a:r>
+              <a:rPr lang="en-US" sz="2500" dirty="0">
+                <a:solidFill>
+                  <a:schemeClr val="dk1"/>
+                </a:solidFill>
+                <a:latin typeface="Times New Roman"/>
+                <a:ea typeface="Times New Roman"/>
+                <a:cs typeface="Times New Roman"/>
+                <a:sym typeface="Times New Roman"/>
+              </a:rPr>
+              <a:t>Extend evaluation to additional benchmark splits (e.g., </a:t>
+            </a:r>
+            <a:r>
+              <a:rPr lang="en-US" sz="2500" dirty="0" err="1">
+                <a:solidFill>
+                  <a:schemeClr val="dk1"/>
+                </a:solidFill>
+                <a:latin typeface="Courier New" panose="02070309020205020404" pitchFamily="49" charset="0"/>
+                <a:ea typeface="Times New Roman"/>
+                <a:cs typeface="Courier New" panose="02070309020205020404" pitchFamily="49" charset="0"/>
+                <a:sym typeface="Times New Roman"/>
+              </a:rPr>
+              <a:t>jsb_hard</a:t>
+            </a:r>
+            <a:r>
+              <a:rPr lang="en-US" sz="2500" dirty="0">
+                <a:solidFill>
+                  <a:schemeClr val="dk1"/>
+                </a:solidFill>
+                <a:latin typeface="Times New Roman"/>
+                <a:ea typeface="Times New Roman"/>
+                <a:cs typeface="Times New Roman"/>
+                <a:sym typeface="Times New Roman"/>
+              </a:rPr>
+              <a:t>, code grammars) and larger backbones to test generalization beyond LLaDA-8B</a:t>
+            </a:r>
+          </a:p>
+          <a:p>
+            <a:pPr marL="412750" lvl="0" indent="-342900" algn="just">
+              <a:buClr>
+                <a:schemeClr val="dk1"/>
+              </a:buClr>
+              <a:buSzPts val="2500"/>
+              <a:buFont typeface="Wingdings" pitchFamily="2" charset="2"/>
+              <a:buChar char="l"/>
+            </a:pPr>
+            <a:r>
+              <a:rPr lang="en-US" sz="2500" dirty="0">
+                <a:solidFill>
+                  <a:schemeClr val="dk1"/>
+                </a:solidFill>
+                <a:latin typeface="Times New Roman"/>
+                <a:ea typeface="Times New Roman"/>
+                <a:cs typeface="Times New Roman"/>
+                <a:sym typeface="Times New Roman"/>
+              </a:rPr>
+              <a:t>Integrate sparse automaton acceleration (CSR-based DFA transitions) to reduce DP cost on grammars with large state spaces or wide vocabularies</a:t>
+            </a:r>
+            <a:endParaRPr sz="2500" dirty="0">
+              <a:solidFill>
+                <a:schemeClr val="dk1"/>
+              </a:solidFill>
+              <a:latin typeface="Times New Roman"/>
+              <a:ea typeface="Times New Roman"/>
+              <a:cs typeface="Times New Roman"/>
+              <a:sym typeface="Times New Roman"/>
+            </a:endParaRPr>
+          </a:p>
+        </p:txBody>
+      </p:sp>
+    </p:spTree>
+  </p:cSld>
+  <p:clrMapOvr>
+    <a:masterClrMapping/>
+  </p:clrMapOvr>
+</p:sld>
+</file>
+
+<file path=ppt/slides/slide2.xml><?xml version="1.0" encoding="utf-8"?>
+<p:sld xmlns:a="http://schemas.openxmlformats.org/drawingml/2006/main" xmlns:r="http://schemas.openxmlformats.org/officeDocument/2006/relationships" xmlns:p="http://schemas.openxmlformats.org/presentationml/2006/main" show="0">
+  <p:cSld>
+    <p:bg>
+      <p:bgPr>
+        <a:solidFill>
+          <a:schemeClr val="lt1"/>
+        </a:solidFill>
+        <a:effectLst/>
+      </p:bgPr>
+    </p:bg>
+    <p:spTree>
+      <p:nvGrpSpPr>
+        <p:cNvPr id="1" name="Shape 88">
+          <a:extLst>
+            <a:ext uri="{FF2B5EF4-FFF2-40B4-BE49-F238E27FC236}">
+              <a16:creationId xmlns:a16="http://schemas.microsoft.com/office/drawing/2014/main" id="{0626B726-D29D-6BF2-C46B-36D313764E83}"/>
+            </a:ext>
+          </a:extLst>
+        </p:cNvPr>
+        <p:cNvGrpSpPr/>
+        <p:nvPr/>
+      </p:nvGrpSpPr>
+      <p:grpSpPr>
+        <a:xfrm>
+          <a:off x="0" y="0"/>
+          <a:ext cx="0" cy="0"/>
+          <a:chOff x="0" y="0"/>
+          <a:chExt cx="0" cy="0"/>
+        </a:xfrm>
+      </p:grpSpPr>
+      <p:pic>
+        <p:nvPicPr>
+          <p:cNvPr id="23" name="圖片 22">
+            <a:extLst>
+              <a:ext uri="{FF2B5EF4-FFF2-40B4-BE49-F238E27FC236}">
+                <a16:creationId xmlns:a16="http://schemas.microsoft.com/office/drawing/2014/main" id="{996F966A-40A0-0DDD-BC13-FB1381A1AAC0}"/>
+              </a:ext>
+            </a:extLst>
+          </p:cNvPr>
+          <p:cNvPicPr>
+            <a:picLocks noChangeAspect="1"/>
+          </p:cNvPicPr>
+          <p:nvPr/>
+        </p:nvPicPr>
+        <p:blipFill>
+          <a:blip r:embed="rId3"/>
+          <a:stretch>
+            <a:fillRect/>
+          </a:stretch>
+        </p:blipFill>
+        <p:spPr>
+          <a:xfrm>
+            <a:off x="24876679" y="14309630"/>
+            <a:ext cx="11559984" cy="4690723"/>
+          </a:xfrm>
+          <a:prstGeom prst="rect">
+            <a:avLst/>
+          </a:prstGeom>
+        </p:spPr>
+      </p:pic>
+      <p:pic>
+        <p:nvPicPr>
+          <p:cNvPr id="16" name="圖片 15">
+            <a:extLst>
+              <a:ext uri="{FF2B5EF4-FFF2-40B4-BE49-F238E27FC236}">
+                <a16:creationId xmlns:a16="http://schemas.microsoft.com/office/drawing/2014/main" id="{2DEA0415-4A79-E81E-C26E-FD1D34E5073E}"/>
+              </a:ext>
+            </a:extLst>
+          </p:cNvPr>
+          <p:cNvPicPr>
+            <a:picLocks noChangeAspect="1"/>
+          </p:cNvPicPr>
+          <p:nvPr/>
+        </p:nvPicPr>
+        <p:blipFill>
+          <a:blip r:embed="rId4"/>
+          <a:stretch>
+            <a:fillRect/>
+          </a:stretch>
+        </p:blipFill>
+        <p:spPr>
+          <a:xfrm>
+            <a:off x="1013460" y="21650288"/>
+            <a:ext cx="4521200" cy="4800600"/>
+          </a:xfrm>
+          <a:prstGeom prst="rect">
+            <a:avLst/>
+          </a:prstGeom>
+        </p:spPr>
+      </p:pic>
+      <p:pic>
+        <p:nvPicPr>
+          <p:cNvPr id="18" name="圖片 17">
+            <a:extLst>
+              <a:ext uri="{FF2B5EF4-FFF2-40B4-BE49-F238E27FC236}">
+                <a16:creationId xmlns:a16="http://schemas.microsoft.com/office/drawing/2014/main" id="{2E3F7550-8610-3DB1-FE1E-BD8246FCC106}"/>
+              </a:ext>
+            </a:extLst>
+          </p:cNvPr>
+          <p:cNvPicPr>
+            <a:picLocks noChangeAspect="1"/>
+          </p:cNvPicPr>
+          <p:nvPr/>
+        </p:nvPicPr>
+        <p:blipFill>
+          <a:blip r:embed="rId5"/>
+          <a:stretch>
+            <a:fillRect/>
+          </a:stretch>
+        </p:blipFill>
+        <p:spPr>
+          <a:xfrm>
+            <a:off x="6199267" y="21650288"/>
+            <a:ext cx="4660900" cy="4889500"/>
+          </a:xfrm>
+          <a:prstGeom prst="rect">
+            <a:avLst/>
+          </a:prstGeom>
+        </p:spPr>
+      </p:pic>
+      <p:pic>
+        <p:nvPicPr>
+          <p:cNvPr id="14" name="圖片 13">
+            <a:extLst>
+              <a:ext uri="{FF2B5EF4-FFF2-40B4-BE49-F238E27FC236}">
+                <a16:creationId xmlns:a16="http://schemas.microsoft.com/office/drawing/2014/main" id="{1E18DF04-F882-D800-DB7F-47336F0BDBF9}"/>
+              </a:ext>
+            </a:extLst>
+          </p:cNvPr>
+          <p:cNvPicPr>
+            <a:picLocks noChangeAspect="1"/>
+          </p:cNvPicPr>
+          <p:nvPr/>
+        </p:nvPicPr>
+        <p:blipFill>
+          <a:blip r:embed="rId6"/>
+          <a:stretch>
+            <a:fillRect/>
+          </a:stretch>
+        </p:blipFill>
+        <p:spPr>
+          <a:xfrm>
+            <a:off x="31213354" y="4054716"/>
+            <a:ext cx="6052021" cy="9128828"/>
+          </a:xfrm>
+          <a:prstGeom prst="rect">
+            <a:avLst/>
+          </a:prstGeom>
+        </p:spPr>
+      </p:pic>
+      <p:pic>
+        <p:nvPicPr>
+          <p:cNvPr id="12" name="圖片 11">
+            <a:extLst>
+              <a:ext uri="{FF2B5EF4-FFF2-40B4-BE49-F238E27FC236}">
+                <a16:creationId xmlns:a16="http://schemas.microsoft.com/office/drawing/2014/main" id="{5B1B1F37-C4C7-1F84-489F-5BF3A670264B}"/>
+              </a:ext>
+            </a:extLst>
+          </p:cNvPr>
+          <p:cNvPicPr>
+            <a:picLocks noChangeAspect="1"/>
+          </p:cNvPicPr>
+          <p:nvPr/>
+        </p:nvPicPr>
+        <p:blipFill>
+          <a:blip r:embed="rId7"/>
+          <a:stretch>
+            <a:fillRect/>
+          </a:stretch>
+        </p:blipFill>
+        <p:spPr>
+          <a:xfrm>
+            <a:off x="24104209" y="3995475"/>
+            <a:ext cx="6939120" cy="9059755"/>
+          </a:xfrm>
+          <a:prstGeom prst="rect">
+            <a:avLst/>
+          </a:prstGeom>
+        </p:spPr>
+      </p:pic>
+      <p:sp>
+        <p:nvSpPr>
+          <p:cNvPr id="89" name="Google Shape;89;p1">
+            <a:extLst>
+              <a:ext uri="{FF2B5EF4-FFF2-40B4-BE49-F238E27FC236}">
+                <a16:creationId xmlns:a16="http://schemas.microsoft.com/office/drawing/2014/main" id="{A5DEFA05-BE69-DA57-A11E-AC175948CE5A}"/>
+              </a:ext>
+            </a:extLst>
+          </p:cNvPr>
+          <p:cNvSpPr txBox="1"/>
+          <p:nvPr/>
+        </p:nvSpPr>
+        <p:spPr>
+          <a:xfrm>
+            <a:off x="24014011" y="14284316"/>
+            <a:ext cx="13269300" cy="5691569"/>
+          </a:xfrm>
+          <a:prstGeom prst="rect">
+            <a:avLst/>
+          </a:prstGeom>
+          <a:noFill/>
+          <a:ln w="12700" cap="flat" cmpd="sng">
+            <a:solidFill>
+              <a:srgbClr val="274E13"/>
+            </a:solidFill>
+            <a:prstDash val="solid"/>
+            <a:miter lim="800000"/>
+            <a:headEnd type="none" w="sm" len="sm"/>
+            <a:tailEnd type="none" w="sm" len="sm"/>
+          </a:ln>
+        </p:spPr>
+        <p:txBody>
+          <a:bodyPr spcFirstLastPara="1" wrap="square" lIns="84625" tIns="42300" rIns="84625" bIns="42300" anchor="ctr" anchorCtr="0">
+            <a:noAutofit/>
+          </a:bodyPr>
+          <a:lstStyle/>
+          <a:p>
+            <a:pPr marL="0" marR="0" lvl="0" indent="0" algn="l" rtl="0">
+              <a:lnSpc>
+                <a:spcPct val="100000"/>
+              </a:lnSpc>
+              <a:spcBef>
+                <a:spcPts val="0"/>
+              </a:spcBef>
+              <a:spcAft>
+                <a:spcPts val="0"/>
+              </a:spcAft>
+              <a:buClr>
+                <a:srgbClr val="000000"/>
+              </a:buClr>
+              <a:buSzPts val="2400"/>
+              <a:buFont typeface="Arial"/>
+              <a:buNone/>
+            </a:pPr>
+            <a:endParaRPr sz="2400" b="0" i="0" u="none" strike="noStrike" cap="none" dirty="0">
+              <a:solidFill>
+                <a:schemeClr val="dk1"/>
+              </a:solidFill>
+              <a:latin typeface="Times New Roman"/>
+              <a:ea typeface="Times New Roman"/>
+              <a:cs typeface="Times New Roman"/>
+              <a:sym typeface="Times New Roman"/>
+            </a:endParaRPr>
+          </a:p>
+        </p:txBody>
+      </p:sp>
+      <p:sp>
+        <p:nvSpPr>
+          <p:cNvPr id="90" name="Google Shape;90;p1">
+            <a:extLst>
+              <a:ext uri="{FF2B5EF4-FFF2-40B4-BE49-F238E27FC236}">
+                <a16:creationId xmlns:a16="http://schemas.microsoft.com/office/drawing/2014/main" id="{5996B830-A321-284D-2AA1-3AE1001E3A5A}"/>
+              </a:ext>
+            </a:extLst>
+          </p:cNvPr>
+          <p:cNvSpPr txBox="1">
+            <a:spLocks noGrp="1"/>
+          </p:cNvSpPr>
+          <p:nvPr>
+            <p:ph type="ctrTitle"/>
+          </p:nvPr>
+        </p:nvSpPr>
+        <p:spPr>
+          <a:xfrm>
+            <a:off x="0" y="0"/>
+            <a:ext cx="38404800" cy="1866600"/>
+          </a:xfrm>
+          <a:prstGeom prst="rect">
+            <a:avLst/>
+          </a:prstGeom>
+          <a:solidFill>
+            <a:srgbClr val="93C47D"/>
+          </a:solidFill>
+          <a:ln>
+            <a:noFill/>
+          </a:ln>
+        </p:spPr>
+        <p:txBody>
+          <a:bodyPr spcFirstLastPara="1" wrap="square" lIns="340775" tIns="170375" rIns="340775" bIns="170375" anchor="ctr" anchorCtr="0">
+            <a:noAutofit/>
+          </a:bodyPr>
+          <a:lstStyle/>
+          <a:p>
+            <a:pPr lvl="0">
+              <a:buClr>
+                <a:srgbClr val="C00000"/>
+              </a:buClr>
+              <a:buSzPts val="8300"/>
+            </a:pPr>
+            <a:r>
+              <a:rPr lang="en-US" sz="6000" b="1" dirty="0" err="1">
+                <a:solidFill>
+                  <a:schemeClr val="dk1"/>
+                </a:solidFill>
+              </a:rPr>
+              <a:t>DPGrammar</a:t>
+            </a:r>
+            <a:r>
+              <a:rPr lang="en-US" sz="6000" b="1" dirty="0">
+                <a:solidFill>
+                  <a:schemeClr val="dk1"/>
+                </a:solidFill>
+              </a:rPr>
+              <a:t>: Frontier Constrained Decoding for Diffusion Language Models</a:t>
+            </a:r>
+            <a:endParaRPr sz="16600" dirty="0">
+              <a:solidFill>
+                <a:schemeClr val="dk1"/>
+              </a:solidFill>
+            </a:endParaRPr>
+          </a:p>
+        </p:txBody>
+      </p:sp>
+      <p:sp>
+        <p:nvSpPr>
+          <p:cNvPr id="92" name="Google Shape;92;p1">
+            <a:extLst>
+              <a:ext uri="{FF2B5EF4-FFF2-40B4-BE49-F238E27FC236}">
+                <a16:creationId xmlns:a16="http://schemas.microsoft.com/office/drawing/2014/main" id="{737E55AC-1949-5C54-2023-115E84E128B3}"/>
+              </a:ext>
+            </a:extLst>
+          </p:cNvPr>
+          <p:cNvSpPr txBox="1"/>
+          <p:nvPr/>
+        </p:nvSpPr>
+        <p:spPr>
+          <a:xfrm>
+            <a:off x="3698240" y="1692276"/>
+            <a:ext cx="30723900" cy="1375500"/>
+          </a:xfrm>
+          <a:prstGeom prst="rect">
+            <a:avLst/>
+          </a:prstGeom>
+          <a:noFill/>
+          <a:ln>
+            <a:noFill/>
+          </a:ln>
+        </p:spPr>
+        <p:txBody>
+          <a:bodyPr spcFirstLastPara="1" wrap="square" lIns="340775" tIns="170375" rIns="340775" bIns="170375" anchor="t" anchorCtr="0">
+            <a:spAutoFit/>
+          </a:bodyPr>
+          <a:lstStyle/>
+          <a:p>
+            <a:pPr marL="0" marR="0" lvl="0" indent="0" algn="ctr" rtl="0">
+              <a:lnSpc>
+                <a:spcPct val="100000"/>
+              </a:lnSpc>
+              <a:spcBef>
+                <a:spcPts val="0"/>
+              </a:spcBef>
+              <a:spcAft>
+                <a:spcPts val="0"/>
+              </a:spcAft>
+              <a:buClr>
+                <a:srgbClr val="000000"/>
+              </a:buClr>
+              <a:buSzPts val="3700"/>
+              <a:buFont typeface="Arial"/>
+              <a:buNone/>
+            </a:pPr>
+            <a:r>
+              <a:rPr lang="en-US" sz="3700" b="1" i="1" dirty="0">
+                <a:solidFill>
+                  <a:schemeClr val="dk1"/>
+                </a:solidFill>
+                <a:latin typeface="Times New Roman"/>
+                <a:ea typeface="Times New Roman"/>
+                <a:cs typeface="Times New Roman"/>
+                <a:sym typeface="Times New Roman"/>
+              </a:rPr>
+              <a:t>Jeng-Yue Liu, Wilson Zheng, </a:t>
+            </a:r>
+            <a:r>
+              <a:rPr lang="en-US" sz="3700" b="1" i="1" dirty="0" err="1">
+                <a:solidFill>
+                  <a:schemeClr val="dk1"/>
+                </a:solidFill>
+                <a:latin typeface="Times New Roman"/>
+                <a:ea typeface="Times New Roman"/>
+                <a:cs typeface="Times New Roman"/>
+                <a:sym typeface="Times New Roman"/>
+              </a:rPr>
+              <a:t>Haoling</a:t>
+            </a:r>
+            <a:r>
+              <a:rPr lang="en-US" sz="3700" b="1" i="1" dirty="0">
+                <a:solidFill>
+                  <a:schemeClr val="dk1"/>
+                </a:solidFill>
+                <a:latin typeface="Times New Roman"/>
+                <a:ea typeface="Times New Roman"/>
+                <a:cs typeface="Times New Roman"/>
+                <a:sym typeface="Times New Roman"/>
+              </a:rPr>
+              <a:t> Pu</a:t>
+            </a:r>
+            <a:endParaRPr sz="3700" b="1" i="1" u="none" strike="noStrike" cap="none" dirty="0">
+              <a:solidFill>
+                <a:schemeClr val="dk1"/>
+              </a:solidFill>
+              <a:latin typeface="Times New Roman"/>
+              <a:ea typeface="Times New Roman"/>
+              <a:cs typeface="Times New Roman"/>
+              <a:sym typeface="Times New Roman"/>
+            </a:endParaRPr>
+          </a:p>
+          <a:p>
+            <a:pPr marL="0" marR="0" lvl="0" indent="0" algn="ctr" rtl="0">
+              <a:lnSpc>
+                <a:spcPct val="100000"/>
+              </a:lnSpc>
+              <a:spcBef>
+                <a:spcPts val="0"/>
+              </a:spcBef>
+              <a:spcAft>
+                <a:spcPts val="0"/>
+              </a:spcAft>
+              <a:buClr>
+                <a:srgbClr val="000000"/>
+              </a:buClr>
+              <a:buSzPts val="3000"/>
+              <a:buFont typeface="Arial"/>
+              <a:buNone/>
+            </a:pPr>
+            <a:r>
+              <a:rPr lang="en-US" sz="3000" b="0" i="1" u="none" strike="noStrike" cap="none" dirty="0">
+                <a:solidFill>
+                  <a:schemeClr val="dk1"/>
+                </a:solidFill>
+                <a:latin typeface="Times New Roman"/>
+                <a:ea typeface="Times New Roman"/>
+                <a:cs typeface="Times New Roman"/>
+                <a:sym typeface="Times New Roman"/>
+              </a:rPr>
+              <a:t>Carnegie Mellon University, </a:t>
+            </a:r>
+            <a:r>
+              <a:rPr lang="en-US" sz="3000" i="1" dirty="0">
+                <a:solidFill>
+                  <a:schemeClr val="dk1"/>
+                </a:solidFill>
+                <a:latin typeface="Times New Roman"/>
+                <a:ea typeface="Times New Roman"/>
+                <a:cs typeface="Times New Roman"/>
+                <a:sym typeface="Times New Roman"/>
+              </a:rPr>
+              <a:t>Language Technologies Institute</a:t>
+            </a:r>
+            <a:endParaRPr sz="3000" i="1" dirty="0">
+              <a:solidFill>
+                <a:schemeClr val="dk1"/>
+              </a:solidFill>
+              <a:latin typeface="Times New Roman"/>
+              <a:ea typeface="Times New Roman"/>
+              <a:cs typeface="Times New Roman"/>
+              <a:sym typeface="Times New Roman"/>
+            </a:endParaRPr>
+          </a:p>
+        </p:txBody>
+      </p:sp>
+      <p:sp>
+        <p:nvSpPr>
+          <p:cNvPr id="93" name="Google Shape;93;p1">
+            <a:extLst>
+              <a:ext uri="{FF2B5EF4-FFF2-40B4-BE49-F238E27FC236}">
+                <a16:creationId xmlns:a16="http://schemas.microsoft.com/office/drawing/2014/main" id="{87C73698-FBDF-E338-704A-4FB5CDECBC48}"/>
+              </a:ext>
+            </a:extLst>
+          </p:cNvPr>
+          <p:cNvSpPr txBox="1"/>
+          <p:nvPr/>
+        </p:nvSpPr>
+        <p:spPr>
+          <a:xfrm>
+            <a:off x="3970867" y="7010400"/>
+            <a:ext cx="2228400" cy="857400"/>
+          </a:xfrm>
+          <a:prstGeom prst="rect">
+            <a:avLst/>
+          </a:prstGeom>
+          <a:noFill/>
+          <a:ln>
+            <a:noFill/>
+          </a:ln>
+        </p:spPr>
+        <p:txBody>
+          <a:bodyPr spcFirstLastPara="1" wrap="square" lIns="84625" tIns="42300" rIns="84625" bIns="42300" anchor="ctr" anchorCtr="0">
+            <a:noAutofit/>
+          </a:bodyPr>
+          <a:lstStyle/>
+          <a:p>
+            <a:pPr marL="0" marR="0" lvl="0" indent="0" algn="l" rtl="0">
+              <a:lnSpc>
+                <a:spcPct val="100000"/>
+              </a:lnSpc>
+              <a:spcBef>
+                <a:spcPts val="0"/>
+              </a:spcBef>
+              <a:spcAft>
+                <a:spcPts val="0"/>
+              </a:spcAft>
+              <a:buClr>
+                <a:srgbClr val="000000"/>
+              </a:buClr>
+              <a:buSzPts val="3000"/>
+              <a:buFont typeface="Arial"/>
+              <a:buNone/>
+            </a:pPr>
+            <a:endParaRPr sz="3000" b="0" i="0" u="none" strike="noStrike" cap="none">
+              <a:solidFill>
+                <a:schemeClr val="dk1"/>
+              </a:solidFill>
+              <a:latin typeface="Times New Roman"/>
+              <a:ea typeface="Times New Roman"/>
+              <a:cs typeface="Times New Roman"/>
+              <a:sym typeface="Times New Roman"/>
+            </a:endParaRPr>
+          </a:p>
+        </p:txBody>
+      </p:sp>
+      <p:sp>
+        <p:nvSpPr>
+          <p:cNvPr id="94" name="Google Shape;94;p1">
+            <a:extLst>
+              <a:ext uri="{FF2B5EF4-FFF2-40B4-BE49-F238E27FC236}">
+                <a16:creationId xmlns:a16="http://schemas.microsoft.com/office/drawing/2014/main" id="{66320BBB-B04F-2227-EC10-8A8F1206AF6B}"/>
+              </a:ext>
+            </a:extLst>
+          </p:cNvPr>
+          <p:cNvSpPr txBox="1"/>
+          <p:nvPr/>
+        </p:nvSpPr>
+        <p:spPr>
+          <a:xfrm>
+            <a:off x="13427610" y="6388888"/>
+            <a:ext cx="2240400" cy="857400"/>
+          </a:xfrm>
+          <a:prstGeom prst="rect">
+            <a:avLst/>
+          </a:prstGeom>
+          <a:noFill/>
+          <a:ln>
+            <a:noFill/>
+          </a:ln>
+        </p:spPr>
+        <p:txBody>
+          <a:bodyPr spcFirstLastPara="1" wrap="square" lIns="84625" tIns="42300" rIns="84625" bIns="42300" anchor="ctr" anchorCtr="0">
+            <a:noAutofit/>
+          </a:bodyPr>
+          <a:lstStyle/>
+          <a:p>
+            <a:pPr marL="0" marR="0" lvl="0" indent="0" algn="l" rtl="0">
+              <a:lnSpc>
+                <a:spcPct val="100000"/>
+              </a:lnSpc>
+              <a:spcBef>
+                <a:spcPts val="0"/>
+              </a:spcBef>
+              <a:spcAft>
+                <a:spcPts val="0"/>
+              </a:spcAft>
+              <a:buClr>
+                <a:srgbClr val="000000"/>
+              </a:buClr>
+              <a:buSzPts val="3000"/>
+              <a:buFont typeface="Arial"/>
+              <a:buNone/>
+            </a:pPr>
+            <a:endParaRPr sz="3000" b="0" i="0" u="none" strike="noStrike" cap="none">
+              <a:solidFill>
+                <a:schemeClr val="dk1"/>
+              </a:solidFill>
+              <a:latin typeface="Times New Roman"/>
+              <a:ea typeface="Times New Roman"/>
+              <a:cs typeface="Times New Roman"/>
+              <a:sym typeface="Times New Roman"/>
+            </a:endParaRPr>
+          </a:p>
+        </p:txBody>
+      </p:sp>
+      <p:sp>
+        <p:nvSpPr>
+          <p:cNvPr id="95" name="Google Shape;95;p1">
+            <a:extLst>
+              <a:ext uri="{FF2B5EF4-FFF2-40B4-BE49-F238E27FC236}">
+                <a16:creationId xmlns:a16="http://schemas.microsoft.com/office/drawing/2014/main" id="{79F7A64A-6D0A-2648-5BC1-FB336F44855B}"/>
+              </a:ext>
+            </a:extLst>
+          </p:cNvPr>
+          <p:cNvSpPr txBox="1"/>
+          <p:nvPr/>
+        </p:nvSpPr>
+        <p:spPr>
+          <a:xfrm>
+            <a:off x="11280066" y="13436780"/>
+            <a:ext cx="12472662" cy="852000"/>
+          </a:xfrm>
+          <a:prstGeom prst="rect">
+            <a:avLst/>
+          </a:prstGeom>
+          <a:solidFill>
+            <a:srgbClr val="93C47D"/>
+          </a:solidFill>
+          <a:ln w="9525" cap="flat" cmpd="sng">
+            <a:solidFill>
+              <a:srgbClr val="005700"/>
+            </a:solidFill>
+            <a:prstDash val="solid"/>
+            <a:round/>
+            <a:headEnd type="none" w="sm" len="sm"/>
+            <a:tailEnd type="none" w="sm" len="sm"/>
+          </a:ln>
+        </p:spPr>
+        <p:txBody>
+          <a:bodyPr spcFirstLastPara="1" wrap="square" lIns="340775" tIns="170375" rIns="340775" bIns="170375" anchor="t" anchorCtr="0">
+            <a:spAutoFit/>
+          </a:bodyPr>
+          <a:lstStyle/>
+          <a:p>
+            <a:pPr marL="0" marR="0" lvl="0" indent="0" algn="l" rtl="0">
+              <a:lnSpc>
+                <a:spcPct val="100000"/>
+              </a:lnSpc>
+              <a:spcBef>
+                <a:spcPts val="0"/>
+              </a:spcBef>
+              <a:spcAft>
+                <a:spcPts val="0"/>
+              </a:spcAft>
+              <a:buClr>
+                <a:srgbClr val="000000"/>
+              </a:buClr>
+              <a:buSzPts val="3300"/>
+              <a:buFont typeface="Arial"/>
+              <a:buNone/>
+            </a:pPr>
+            <a:r>
+              <a:rPr lang="en-US" sz="3300" b="1">
+                <a:solidFill>
+                  <a:schemeClr val="dk1"/>
+                </a:solidFill>
+              </a:rPr>
+              <a:t>Method </a:t>
+            </a:r>
+            <a:endParaRPr sz="1100" b="0" i="0" u="none" strike="noStrike" cap="none">
+              <a:solidFill>
+                <a:srgbClr val="000000"/>
+              </a:solidFill>
+              <a:latin typeface="Arial"/>
+              <a:ea typeface="Arial"/>
+              <a:cs typeface="Arial"/>
+              <a:sym typeface="Arial"/>
+            </a:endParaRPr>
+          </a:p>
+        </p:txBody>
+      </p:sp>
+      <p:sp>
+        <p:nvSpPr>
+          <p:cNvPr id="97" name="Google Shape;97;p1">
+            <a:extLst>
+              <a:ext uri="{FF2B5EF4-FFF2-40B4-BE49-F238E27FC236}">
+                <a16:creationId xmlns:a16="http://schemas.microsoft.com/office/drawing/2014/main" id="{702AC7AD-C025-5504-5BB2-A79E361A5D23}"/>
+              </a:ext>
+            </a:extLst>
+          </p:cNvPr>
+          <p:cNvSpPr txBox="1"/>
+          <p:nvPr/>
+        </p:nvSpPr>
+        <p:spPr>
+          <a:xfrm>
+            <a:off x="23975423" y="20184106"/>
+            <a:ext cx="13269300" cy="852000"/>
+          </a:xfrm>
+          <a:prstGeom prst="rect">
+            <a:avLst/>
+          </a:prstGeom>
+          <a:solidFill>
+            <a:srgbClr val="93C47D"/>
+          </a:solidFill>
+          <a:ln w="9525" cap="flat" cmpd="sng">
+            <a:solidFill>
+              <a:srgbClr val="005700"/>
+            </a:solidFill>
+            <a:prstDash val="solid"/>
+            <a:round/>
+            <a:headEnd type="none" w="sm" len="sm"/>
+            <a:tailEnd type="none" w="sm" len="sm"/>
+          </a:ln>
+        </p:spPr>
+        <p:txBody>
+          <a:bodyPr spcFirstLastPara="1" wrap="square" lIns="340775" tIns="170375" rIns="340775" bIns="170375" anchor="t" anchorCtr="0">
+            <a:spAutoFit/>
+          </a:bodyPr>
+          <a:lstStyle/>
+          <a:p>
+            <a:pPr marL="0" marR="0" lvl="0" indent="0" algn="l" rtl="0">
+              <a:lnSpc>
+                <a:spcPct val="100000"/>
+              </a:lnSpc>
+              <a:spcBef>
+                <a:spcPts val="0"/>
+              </a:spcBef>
+              <a:spcAft>
+                <a:spcPts val="0"/>
+              </a:spcAft>
+              <a:buClr>
+                <a:srgbClr val="000000"/>
+              </a:buClr>
+              <a:buSzPts val="3300"/>
+              <a:buFont typeface="Arial"/>
+              <a:buNone/>
+            </a:pPr>
+            <a:r>
+              <a:rPr lang="en-US" sz="3300" b="1" i="0" u="none" strike="noStrike" cap="none" dirty="0">
+                <a:solidFill>
+                  <a:schemeClr val="dk1"/>
+                </a:solidFill>
+                <a:latin typeface="Arial"/>
+                <a:ea typeface="Arial"/>
+                <a:cs typeface="Arial"/>
+                <a:sym typeface="Arial"/>
+              </a:rPr>
+              <a:t>Conclusion and Future Work</a:t>
+            </a:r>
+            <a:endParaRPr sz="1100" b="0" i="0" u="none" strike="noStrike" cap="none" dirty="0">
+              <a:solidFill>
+                <a:srgbClr val="000000"/>
+              </a:solidFill>
+              <a:latin typeface="Arial"/>
+              <a:ea typeface="Arial"/>
+              <a:cs typeface="Arial"/>
+              <a:sym typeface="Arial"/>
+            </a:endParaRPr>
+          </a:p>
+        </p:txBody>
+      </p:sp>
+      <p:sp>
+        <p:nvSpPr>
+          <p:cNvPr id="100" name="Google Shape;100;p1">
+            <a:extLst>
+              <a:ext uri="{FF2B5EF4-FFF2-40B4-BE49-F238E27FC236}">
+                <a16:creationId xmlns:a16="http://schemas.microsoft.com/office/drawing/2014/main" id="{1DCE8FF3-3024-CED5-C709-E179CA4A473F}"/>
+              </a:ext>
+            </a:extLst>
+          </p:cNvPr>
+          <p:cNvSpPr txBox="1"/>
+          <p:nvPr/>
+        </p:nvSpPr>
+        <p:spPr>
+          <a:xfrm>
+            <a:off x="24014011" y="13436780"/>
+            <a:ext cx="13269300" cy="852000"/>
+          </a:xfrm>
+          <a:prstGeom prst="rect">
+            <a:avLst/>
+          </a:prstGeom>
+          <a:solidFill>
+            <a:srgbClr val="93C47D"/>
+          </a:solidFill>
+          <a:ln w="9525" cap="flat" cmpd="sng">
+            <a:solidFill>
+              <a:srgbClr val="005700"/>
+            </a:solidFill>
+            <a:prstDash val="solid"/>
+            <a:round/>
+            <a:headEnd type="none" w="sm" len="sm"/>
+            <a:tailEnd type="none" w="sm" len="sm"/>
+          </a:ln>
+        </p:spPr>
+        <p:txBody>
+          <a:bodyPr spcFirstLastPara="1" wrap="square" lIns="340775" tIns="170375" rIns="340775" bIns="170375" anchor="t" anchorCtr="0">
+            <a:spAutoFit/>
+          </a:bodyPr>
+          <a:lstStyle/>
+          <a:p>
+            <a:pPr marL="0" marR="0" lvl="0" indent="0" algn="l" rtl="0">
+              <a:lnSpc>
+                <a:spcPct val="100000"/>
+              </a:lnSpc>
+              <a:spcBef>
+                <a:spcPts val="0"/>
+              </a:spcBef>
+              <a:spcAft>
+                <a:spcPts val="0"/>
+              </a:spcAft>
+              <a:buClr>
+                <a:srgbClr val="000000"/>
+              </a:buClr>
+              <a:buSzPts val="3300"/>
+              <a:buFont typeface="Arial"/>
+              <a:buNone/>
+            </a:pPr>
+            <a:r>
+              <a:rPr lang="en-US" sz="3300" b="1" i="0" u="none" strike="noStrike" cap="none">
+                <a:solidFill>
+                  <a:schemeClr val="dk1"/>
+                </a:solidFill>
+                <a:latin typeface="Arial"/>
+                <a:ea typeface="Arial"/>
+                <a:cs typeface="Arial"/>
+                <a:sym typeface="Arial"/>
+              </a:rPr>
+              <a:t>Experimental Results</a:t>
+            </a:r>
+            <a:endParaRPr sz="1100" b="0" i="0" u="none" strike="noStrike" cap="none">
+              <a:solidFill>
+                <a:srgbClr val="000000"/>
+              </a:solidFill>
+              <a:latin typeface="Arial"/>
+              <a:ea typeface="Arial"/>
+              <a:cs typeface="Arial"/>
+              <a:sym typeface="Arial"/>
+            </a:endParaRPr>
+          </a:p>
+        </p:txBody>
+      </p:sp>
+      <p:pic>
+        <p:nvPicPr>
+          <p:cNvPr id="101" name="Google Shape;101;p1">
+            <a:extLst>
+              <a:ext uri="{FF2B5EF4-FFF2-40B4-BE49-F238E27FC236}">
+                <a16:creationId xmlns:a16="http://schemas.microsoft.com/office/drawing/2014/main" id="{1FEAD620-EFE8-C8D9-47D0-3E2A65D6CC18}"/>
+              </a:ext>
+            </a:extLst>
+          </p:cNvPr>
+          <p:cNvPicPr preferRelativeResize="0"/>
+          <p:nvPr/>
+        </p:nvPicPr>
+        <p:blipFill rotWithShape="1">
+          <a:blip r:embed="rId8">
+            <a:alphaModFix/>
+          </a:blip>
+          <a:srcRect/>
+          <a:stretch/>
+        </p:blipFill>
+        <p:spPr>
+          <a:xfrm>
+            <a:off x="33852062" y="384969"/>
+            <a:ext cx="3263878" cy="1273174"/>
+          </a:xfrm>
+          <a:prstGeom prst="rect">
+            <a:avLst/>
+          </a:prstGeom>
+          <a:noFill/>
+          <a:ln>
+            <a:noFill/>
+          </a:ln>
+        </p:spPr>
+      </p:pic>
+      <p:pic>
+        <p:nvPicPr>
+          <p:cNvPr id="102" name="Google Shape;102;p1">
+            <a:extLst>
+              <a:ext uri="{FF2B5EF4-FFF2-40B4-BE49-F238E27FC236}">
+                <a16:creationId xmlns:a16="http://schemas.microsoft.com/office/drawing/2014/main" id="{D3118DB8-6FB9-1C7A-D979-E1C89823DFB2}"/>
+              </a:ext>
+            </a:extLst>
+          </p:cNvPr>
+          <p:cNvPicPr preferRelativeResize="0"/>
+          <p:nvPr/>
+        </p:nvPicPr>
+        <p:blipFill rotWithShape="1">
+          <a:blip r:embed="rId9">
+            <a:alphaModFix/>
+          </a:blip>
+          <a:srcRect/>
+          <a:stretch/>
+        </p:blipFill>
+        <p:spPr>
+          <a:xfrm>
+            <a:off x="32242941" y="415243"/>
+            <a:ext cx="1334783" cy="1370388"/>
+          </a:xfrm>
+          <a:prstGeom prst="rect">
+            <a:avLst/>
+          </a:prstGeom>
+          <a:noFill/>
+          <a:ln>
+            <a:noFill/>
+          </a:ln>
+        </p:spPr>
+      </p:pic>
+      <p:sp>
+        <p:nvSpPr>
+          <p:cNvPr id="103" name="Google Shape;103;p1">
+            <a:extLst>
+              <a:ext uri="{FF2B5EF4-FFF2-40B4-BE49-F238E27FC236}">
+                <a16:creationId xmlns:a16="http://schemas.microsoft.com/office/drawing/2014/main" id="{3801DDD1-47CD-C6C7-42D7-3976BF6641DD}"/>
+              </a:ext>
+            </a:extLst>
+          </p:cNvPr>
+          <p:cNvSpPr txBox="1"/>
+          <p:nvPr/>
+        </p:nvSpPr>
+        <p:spPr>
+          <a:xfrm>
+            <a:off x="1013460" y="3052275"/>
+            <a:ext cx="10017300" cy="852000"/>
+          </a:xfrm>
+          <a:prstGeom prst="rect">
+            <a:avLst/>
+          </a:prstGeom>
+          <a:solidFill>
+            <a:srgbClr val="93C47D"/>
+          </a:solidFill>
+          <a:ln w="9525" cap="flat" cmpd="sng">
+            <a:solidFill>
+              <a:srgbClr val="005700"/>
+            </a:solidFill>
+            <a:prstDash val="solid"/>
+            <a:round/>
+            <a:headEnd type="none" w="sm" len="sm"/>
+            <a:tailEnd type="none" w="sm" len="sm"/>
+          </a:ln>
+        </p:spPr>
+        <p:txBody>
+          <a:bodyPr spcFirstLastPara="1" wrap="square" lIns="340775" tIns="170375" rIns="340775" bIns="170375" anchor="t" anchorCtr="0">
+            <a:spAutoFit/>
+          </a:bodyPr>
+          <a:lstStyle/>
+          <a:p>
+            <a:pPr marL="0" marR="0" lvl="0" indent="0" algn="l" rtl="0">
+              <a:lnSpc>
+                <a:spcPct val="100000"/>
+              </a:lnSpc>
+              <a:spcBef>
+                <a:spcPts val="0"/>
+              </a:spcBef>
+              <a:spcAft>
+                <a:spcPts val="0"/>
+              </a:spcAft>
+              <a:buClr>
+                <a:srgbClr val="000000"/>
+              </a:buClr>
+              <a:buSzPts val="3300"/>
+              <a:buFont typeface="Arial"/>
+              <a:buNone/>
+            </a:pPr>
+            <a:r>
+              <a:rPr lang="en-US" sz="3300" b="1" i="0" u="none" strike="noStrike" cap="none" dirty="0">
+                <a:solidFill>
+                  <a:schemeClr val="dk1"/>
+                </a:solidFill>
+                <a:latin typeface="Arial"/>
+                <a:ea typeface="Arial"/>
+                <a:cs typeface="Arial"/>
+                <a:sym typeface="Arial"/>
+              </a:rPr>
+              <a:t>Introduction</a:t>
+            </a:r>
+            <a:endParaRPr sz="1100" b="0" i="0" u="none" strike="noStrike" cap="none" dirty="0">
+              <a:solidFill>
+                <a:srgbClr val="000000"/>
+              </a:solidFill>
+              <a:latin typeface="Arial"/>
+              <a:ea typeface="Arial"/>
+              <a:cs typeface="Arial"/>
+              <a:sym typeface="Arial"/>
+            </a:endParaRPr>
+          </a:p>
+        </p:txBody>
+      </p:sp>
+      <p:sp>
+        <p:nvSpPr>
+          <p:cNvPr id="104" name="Google Shape;104;p1">
+            <a:extLst>
+              <a:ext uri="{FF2B5EF4-FFF2-40B4-BE49-F238E27FC236}">
+                <a16:creationId xmlns:a16="http://schemas.microsoft.com/office/drawing/2014/main" id="{CF667371-167E-B28C-067A-A205706336AD}"/>
+              </a:ext>
+            </a:extLst>
+          </p:cNvPr>
+          <p:cNvSpPr txBox="1"/>
+          <p:nvPr/>
+        </p:nvSpPr>
+        <p:spPr>
+          <a:xfrm>
+            <a:off x="23975423" y="21036106"/>
+            <a:ext cx="13269300" cy="4126487"/>
+          </a:xfrm>
+          <a:prstGeom prst="rect">
+            <a:avLst/>
+          </a:prstGeom>
+          <a:noFill/>
+          <a:ln w="9525" cap="flat" cmpd="sng">
+            <a:solidFill>
+              <a:srgbClr val="005700"/>
+            </a:solidFill>
+            <a:prstDash val="solid"/>
+            <a:round/>
+            <a:headEnd type="none" w="sm" len="sm"/>
+            <a:tailEnd type="none" w="sm" len="sm"/>
+          </a:ln>
+        </p:spPr>
+        <p:txBody>
+          <a:bodyPr spcFirstLastPara="1" wrap="square" lIns="84625" tIns="84625" rIns="84625" bIns="84625" anchor="t" anchorCtr="0">
+            <a:noAutofit/>
+          </a:bodyPr>
+          <a:lstStyle/>
+          <a:p>
+            <a:pPr marL="0" marR="0" lvl="0" indent="0" algn="just" rtl="0">
+              <a:lnSpc>
+                <a:spcPct val="100000"/>
+              </a:lnSpc>
+              <a:spcBef>
+                <a:spcPts val="0"/>
+              </a:spcBef>
+              <a:spcAft>
+                <a:spcPts val="0"/>
+              </a:spcAft>
+              <a:buClr>
+                <a:srgbClr val="000000"/>
+              </a:buClr>
+              <a:buSzPts val="2700"/>
+              <a:buFont typeface="Arial"/>
+              <a:buNone/>
+            </a:pPr>
+            <a:r>
+              <a:rPr lang="en-US" sz="2700" b="1" u="sng" dirty="0">
+                <a:solidFill>
+                  <a:srgbClr val="274E13"/>
+                </a:solidFill>
+                <a:highlight>
+                  <a:srgbClr val="D9EAD3"/>
+                </a:highlight>
+                <a:latin typeface="Times New Roman"/>
+                <a:ea typeface="Times New Roman"/>
+                <a:cs typeface="Times New Roman"/>
+                <a:sym typeface="Times New Roman"/>
+              </a:rPr>
+              <a:t>Conclusion:</a:t>
+            </a:r>
+            <a:endParaRPr lang="zh-TW" altLang="en-US" sz="2500" dirty="0">
+              <a:solidFill>
+                <a:schemeClr val="dk1"/>
+              </a:solidFill>
+              <a:latin typeface="Times New Roman"/>
+              <a:ea typeface="Times New Roman"/>
+              <a:cs typeface="Times New Roman"/>
+              <a:sym typeface="Times New Roman"/>
+            </a:endParaRPr>
+          </a:p>
+          <a:p>
+            <a:pPr marL="457200" indent="-387350" algn="just">
+              <a:buClr>
+                <a:schemeClr val="dk1"/>
+              </a:buClr>
+              <a:buSzPts val="2500"/>
+              <a:buFont typeface="Wingdings" pitchFamily="2" charset="2"/>
+              <a:buChar char="l"/>
+            </a:pPr>
+            <a:r>
+              <a:rPr lang="en-US" altLang="zh-TW" sz="2500" dirty="0">
+                <a:solidFill>
+                  <a:schemeClr val="dk1"/>
+                </a:solidFill>
+                <a:latin typeface="Times New Roman"/>
+                <a:ea typeface="Times New Roman"/>
+                <a:cs typeface="Times New Roman"/>
+                <a:sym typeface="Times New Roman"/>
+              </a:rPr>
+              <a:t>Deterministic frontier masking (</a:t>
+            </a:r>
+            <a:r>
+              <a:rPr lang="en-US" altLang="zh-TW" sz="2500" dirty="0" err="1">
+                <a:solidFill>
+                  <a:schemeClr val="dk1"/>
+                </a:solidFill>
+                <a:latin typeface="Times New Roman"/>
+                <a:ea typeface="Times New Roman"/>
+                <a:cs typeface="Times New Roman"/>
+                <a:sym typeface="Times New Roman"/>
+              </a:rPr>
+              <a:t>Dgrammar</a:t>
+            </a:r>
+            <a:r>
+              <a:rPr lang="en-US" altLang="zh-TW" sz="2500" dirty="0">
+                <a:solidFill>
+                  <a:schemeClr val="dk1"/>
+                </a:solidFill>
+                <a:latin typeface="Times New Roman"/>
+                <a:ea typeface="Times New Roman"/>
+                <a:cs typeface="Times New Roman"/>
+                <a:sym typeface="Times New Roman"/>
+              </a:rPr>
+              <a:t>) eliminates stochastic lookahead, removing all timeouts and raising validity to 84.9%</a:t>
+            </a:r>
+          </a:p>
+          <a:p>
+            <a:pPr marL="457200" indent="-387350" algn="just">
+              <a:buClr>
+                <a:schemeClr val="dk1"/>
+              </a:buClr>
+              <a:buSzPts val="2500"/>
+              <a:buFont typeface="Wingdings" pitchFamily="2" charset="2"/>
+              <a:buChar char="l"/>
+            </a:pPr>
+            <a:r>
+              <a:rPr lang="en-US" altLang="zh-TW" sz="2500" dirty="0">
+                <a:solidFill>
+                  <a:schemeClr val="dk1"/>
+                </a:solidFill>
+                <a:latin typeface="Times New Roman"/>
+                <a:ea typeface="Times New Roman"/>
+                <a:cs typeface="Times New Roman"/>
+                <a:sym typeface="Times New Roman"/>
+              </a:rPr>
+              <a:t>Viterbi span repair (</a:t>
+            </a:r>
+            <a:r>
+              <a:rPr lang="en-US" altLang="zh-TW" sz="2500" dirty="0" err="1">
+                <a:solidFill>
+                  <a:schemeClr val="dk1"/>
+                </a:solidFill>
+                <a:latin typeface="Times New Roman"/>
+                <a:ea typeface="Times New Roman"/>
+                <a:cs typeface="Times New Roman"/>
+                <a:sym typeface="Times New Roman"/>
+              </a:rPr>
+              <a:t>DPGrammar</a:t>
+            </a:r>
+            <a:r>
+              <a:rPr lang="en-US" altLang="zh-TW" sz="2500" dirty="0">
+                <a:solidFill>
+                  <a:schemeClr val="dk1"/>
+                </a:solidFill>
+                <a:latin typeface="Times New Roman"/>
+                <a:ea typeface="Times New Roman"/>
+                <a:cs typeface="Times New Roman"/>
+                <a:sym typeface="Times New Roman"/>
+              </a:rPr>
+              <a:t>) closes the remaining gap with 99.2% validity, 1.06 mean resamples, by solving joint multi-token violations in one pass</a:t>
+            </a:r>
+            <a:endParaRPr lang="en-US" sz="2500" dirty="0">
+              <a:solidFill>
+                <a:schemeClr val="dk1"/>
+              </a:solidFill>
+              <a:latin typeface="Times New Roman"/>
+              <a:ea typeface="Times New Roman"/>
+              <a:cs typeface="Times New Roman"/>
+              <a:sym typeface="Times New Roman"/>
+            </a:endParaRPr>
+          </a:p>
+          <a:p>
+            <a:pPr marL="457200" marR="0" lvl="0" indent="0" algn="just" rtl="0">
+              <a:lnSpc>
+                <a:spcPct val="100000"/>
+              </a:lnSpc>
+              <a:spcBef>
+                <a:spcPts val="0"/>
+              </a:spcBef>
+              <a:spcAft>
+                <a:spcPts val="0"/>
+              </a:spcAft>
+              <a:buNone/>
+            </a:pPr>
+            <a:endParaRPr lang="zh-TW" altLang="en-US" sz="2500" dirty="0">
+              <a:solidFill>
+                <a:schemeClr val="dk1"/>
+              </a:solidFill>
+              <a:latin typeface="Times New Roman"/>
+              <a:ea typeface="Times New Roman"/>
+              <a:cs typeface="Times New Roman"/>
+              <a:sym typeface="Times New Roman"/>
+            </a:endParaRPr>
+          </a:p>
+          <a:p>
+            <a:pPr marL="0" marR="0" lvl="0" indent="0" algn="just" rtl="0">
+              <a:lnSpc>
+                <a:spcPct val="100000"/>
+              </a:lnSpc>
+              <a:spcBef>
+                <a:spcPts val="0"/>
+              </a:spcBef>
+              <a:spcAft>
+                <a:spcPts val="0"/>
+              </a:spcAft>
+              <a:buClr>
+                <a:srgbClr val="000000"/>
+              </a:buClr>
+              <a:buSzPts val="2700"/>
+              <a:buFont typeface="Arial"/>
+              <a:buNone/>
+            </a:pPr>
+            <a:r>
+              <a:rPr lang="en-US" sz="2700" b="1" u="sng" dirty="0">
+                <a:solidFill>
+                  <a:srgbClr val="274E13"/>
+                </a:solidFill>
+                <a:highlight>
+                  <a:srgbClr val="D9EAD3"/>
+                </a:highlight>
+                <a:latin typeface="Times New Roman"/>
+                <a:ea typeface="Times New Roman"/>
+                <a:cs typeface="Times New Roman"/>
+                <a:sym typeface="Times New Roman"/>
+              </a:rPr>
+              <a:t>Future work:</a:t>
+            </a:r>
+            <a:endParaRPr sz="2700" b="1" i="0" u="sng" strike="noStrike" cap="none" dirty="0">
+              <a:solidFill>
+                <a:srgbClr val="274E13"/>
+              </a:solidFill>
+              <a:highlight>
+                <a:srgbClr val="D9EAD3"/>
+              </a:highlight>
+              <a:latin typeface="Times New Roman"/>
+              <a:ea typeface="Times New Roman"/>
+              <a:cs typeface="Times New Roman"/>
+              <a:sym typeface="Times New Roman"/>
+            </a:endParaRPr>
+          </a:p>
+          <a:p>
+            <a:pPr marL="412750" lvl="0" indent="-342900" algn="just">
+              <a:buClr>
+                <a:schemeClr val="dk1"/>
+              </a:buClr>
+              <a:buSzPts val="2500"/>
+              <a:buFont typeface="Wingdings" pitchFamily="2" charset="2"/>
+              <a:buChar char="l"/>
+            </a:pPr>
+            <a:r>
+              <a:rPr lang="en-US" sz="2500" dirty="0">
+                <a:solidFill>
+                  <a:schemeClr val="dk1"/>
+                </a:solidFill>
+                <a:latin typeface="Times New Roman"/>
+                <a:ea typeface="Times New Roman"/>
+                <a:cs typeface="Times New Roman"/>
+                <a:sym typeface="Times New Roman"/>
+              </a:rPr>
+              <a:t>Extend to code grammars and stricter JSON splits beyond </a:t>
+            </a:r>
+            <a:r>
+              <a:rPr lang="en-US" sz="2500" dirty="0" err="1">
+                <a:solidFill>
+                  <a:schemeClr val="dk1"/>
+                </a:solidFill>
+                <a:latin typeface="Courier New" panose="02070309020205020404" pitchFamily="49" charset="0"/>
+                <a:ea typeface="Times New Roman"/>
+                <a:cs typeface="Courier New" panose="02070309020205020404" pitchFamily="49" charset="0"/>
+                <a:sym typeface="Times New Roman"/>
+              </a:rPr>
+              <a:t>jsb_medium</a:t>
+            </a:r>
+            <a:r>
+              <a:rPr lang="en-US" sz="2500" dirty="0">
+                <a:solidFill>
+                  <a:schemeClr val="dk1"/>
+                </a:solidFill>
+                <a:latin typeface="Times New Roman"/>
+                <a:ea typeface="Times New Roman"/>
+                <a:cs typeface="Times New Roman"/>
+                <a:sym typeface="Times New Roman"/>
+              </a:rPr>
+              <a:t> and close the final 0.8% gap with tighter completion-phase fallbacks</a:t>
+            </a:r>
+          </a:p>
+          <a:p>
+            <a:pPr marL="412750" lvl="0" indent="-342900" algn="just">
+              <a:buClr>
+                <a:schemeClr val="dk1"/>
+              </a:buClr>
+              <a:buSzPts val="2500"/>
+              <a:buFont typeface="Wingdings" pitchFamily="2" charset="2"/>
+              <a:buChar char="l"/>
+            </a:pPr>
+            <a:r>
+              <a:rPr lang="en-US" sz="2500" dirty="0">
+                <a:solidFill>
+                  <a:schemeClr val="dk1"/>
+                </a:solidFill>
+                <a:latin typeface="Times New Roman"/>
+                <a:ea typeface="Times New Roman"/>
+                <a:cs typeface="Times New Roman"/>
+                <a:sym typeface="Times New Roman"/>
+              </a:rPr>
+              <a:t>Integrate sparse automata acceleration for large-vocabulary efficiency</a:t>
+            </a:r>
+            <a:endParaRPr sz="2500" dirty="0">
+              <a:solidFill>
+                <a:schemeClr val="dk1"/>
+              </a:solidFill>
+              <a:latin typeface="Times New Roman"/>
+              <a:ea typeface="Times New Roman"/>
+              <a:cs typeface="Times New Roman"/>
+              <a:sym typeface="Times New Roman"/>
+            </a:endParaRPr>
+          </a:p>
+        </p:txBody>
+      </p:sp>
+      <p:sp>
+        <p:nvSpPr>
+          <p:cNvPr id="105" name="Google Shape;105;p1">
+            <a:extLst>
+              <a:ext uri="{FF2B5EF4-FFF2-40B4-BE49-F238E27FC236}">
+                <a16:creationId xmlns:a16="http://schemas.microsoft.com/office/drawing/2014/main" id="{72E8A364-1FF4-7A2F-C22F-65BD5DDAF5FB}"/>
+              </a:ext>
+            </a:extLst>
+          </p:cNvPr>
+          <p:cNvSpPr txBox="1"/>
+          <p:nvPr/>
+        </p:nvSpPr>
+        <p:spPr>
+          <a:xfrm>
+            <a:off x="983946" y="20614767"/>
+            <a:ext cx="10058729" cy="852000"/>
+          </a:xfrm>
+          <a:prstGeom prst="rect">
+            <a:avLst/>
+          </a:prstGeom>
+          <a:solidFill>
+            <a:srgbClr val="93C47D"/>
+          </a:solidFill>
+          <a:ln w="9525" cap="flat" cmpd="sng">
+            <a:solidFill>
+              <a:srgbClr val="005700"/>
+            </a:solidFill>
+            <a:prstDash val="solid"/>
+            <a:round/>
+            <a:headEnd type="none" w="sm" len="sm"/>
+            <a:tailEnd type="none" w="sm" len="sm"/>
+          </a:ln>
+        </p:spPr>
+        <p:txBody>
+          <a:bodyPr spcFirstLastPara="1" wrap="square" lIns="340775" tIns="170375" rIns="340775" bIns="170375" anchor="t" anchorCtr="0">
+            <a:spAutoFit/>
+          </a:bodyPr>
+          <a:lstStyle/>
+          <a:p>
+            <a:pPr marL="0" marR="0" lvl="0" indent="0" algn="l" rtl="0">
+              <a:lnSpc>
+                <a:spcPct val="100000"/>
+              </a:lnSpc>
+              <a:spcBef>
+                <a:spcPts val="0"/>
+              </a:spcBef>
+              <a:spcAft>
+                <a:spcPts val="0"/>
+              </a:spcAft>
+              <a:buClr>
+                <a:srgbClr val="000000"/>
+              </a:buClr>
+              <a:buSzPts val="3300"/>
+              <a:buFont typeface="Arial"/>
+              <a:buNone/>
+            </a:pPr>
+            <a:r>
+              <a:rPr lang="en-US" sz="3300" b="1" dirty="0">
+                <a:solidFill>
+                  <a:schemeClr val="dk1"/>
+                </a:solidFill>
+              </a:rPr>
+              <a:t>S</a:t>
+            </a:r>
+            <a:r>
+              <a:rPr lang="en-US" sz="3300" b="1" i="0" u="none" strike="noStrike" cap="none" dirty="0">
+                <a:solidFill>
+                  <a:schemeClr val="dk1"/>
+                </a:solidFill>
+                <a:latin typeface="Arial"/>
+                <a:ea typeface="Arial"/>
+                <a:cs typeface="Arial"/>
+                <a:sym typeface="Arial"/>
+              </a:rPr>
+              <a:t>tochastic vs. Deterministic</a:t>
+            </a:r>
+            <a:endParaRPr sz="1100" b="0" i="0" u="none" strike="noStrike" cap="none" dirty="0">
+              <a:solidFill>
+                <a:srgbClr val="000000"/>
+              </a:solidFill>
+              <a:latin typeface="Arial"/>
+              <a:ea typeface="Arial"/>
+              <a:cs typeface="Arial"/>
+              <a:sym typeface="Arial"/>
+            </a:endParaRPr>
+          </a:p>
+        </p:txBody>
+      </p:sp>
+      <p:sp>
+        <p:nvSpPr>
+          <p:cNvPr id="106" name="Google Shape;106;p1">
+            <a:extLst>
+              <a:ext uri="{FF2B5EF4-FFF2-40B4-BE49-F238E27FC236}">
+                <a16:creationId xmlns:a16="http://schemas.microsoft.com/office/drawing/2014/main" id="{3A10BAD3-0474-E842-FE45-554654B1ED95}"/>
+              </a:ext>
+            </a:extLst>
+          </p:cNvPr>
+          <p:cNvSpPr txBox="1"/>
+          <p:nvPr/>
+        </p:nvSpPr>
+        <p:spPr>
+          <a:xfrm>
+            <a:off x="1013460" y="3909675"/>
+            <a:ext cx="10017300" cy="13350300"/>
+          </a:xfrm>
+          <a:prstGeom prst="rect">
+            <a:avLst/>
+          </a:prstGeom>
+          <a:noFill/>
+          <a:ln w="9525" cap="flat" cmpd="sng">
+            <a:solidFill>
+              <a:srgbClr val="005700"/>
+            </a:solidFill>
+            <a:prstDash val="solid"/>
+            <a:round/>
+            <a:headEnd type="none" w="sm" len="sm"/>
+            <a:tailEnd type="none" w="sm" len="sm"/>
+          </a:ln>
+        </p:spPr>
+        <p:txBody>
+          <a:bodyPr spcFirstLastPara="1" wrap="square" lIns="84625" tIns="84625" rIns="84625" bIns="84625" anchor="t" anchorCtr="0">
+            <a:noAutofit/>
+          </a:bodyPr>
+          <a:lstStyle/>
+          <a:p>
+            <a:pPr marL="0" marR="0" lvl="0" indent="0" algn="just" rtl="0">
+              <a:lnSpc>
+                <a:spcPct val="100000"/>
+              </a:lnSpc>
+              <a:spcBef>
+                <a:spcPts val="0"/>
+              </a:spcBef>
+              <a:spcAft>
+                <a:spcPts val="0"/>
+              </a:spcAft>
+              <a:buClr>
+                <a:srgbClr val="000000"/>
+              </a:buClr>
+              <a:buSzPts val="2700"/>
+              <a:buFont typeface="Arial"/>
+              <a:buNone/>
+            </a:pPr>
+            <a:r>
+              <a:rPr lang="en-US" sz="2700" b="1" i="0" u="sng" strike="noStrike" cap="none" dirty="0">
+                <a:solidFill>
+                  <a:srgbClr val="274E13"/>
+                </a:solidFill>
+                <a:highlight>
+                  <a:srgbClr val="D9EAD3"/>
+                </a:highlight>
+                <a:latin typeface="Times New Roman"/>
+                <a:ea typeface="Times New Roman"/>
+                <a:cs typeface="Times New Roman"/>
+                <a:sym typeface="Times New Roman"/>
+              </a:rPr>
+              <a:t>Problem Statement: </a:t>
+            </a:r>
+            <a:endParaRPr sz="2700" b="1" i="0" u="sng" strike="noStrike" cap="none" dirty="0">
+              <a:solidFill>
+                <a:srgbClr val="274E13"/>
+              </a:solidFill>
+              <a:highlight>
+                <a:srgbClr val="D9EAD3"/>
+              </a:highlight>
+              <a:latin typeface="Times New Roman"/>
+              <a:ea typeface="Times New Roman"/>
+              <a:cs typeface="Times New Roman"/>
+              <a:sym typeface="Times New Roman"/>
+            </a:endParaRPr>
+          </a:p>
+          <a:p>
+            <a:pPr algn="just">
+              <a:buSzPts val="2400"/>
+            </a:pPr>
+            <a:r>
+              <a:rPr lang="en-US" altLang="zh-TW" sz="2500" dirty="0">
+                <a:latin typeface="Times New Roman" panose="02020603050405020304" pitchFamily="18" charset="0"/>
+                <a:cs typeface="Times New Roman" panose="02020603050405020304" pitchFamily="18" charset="0"/>
+              </a:rPr>
+              <a:t>Discrete Diffusion Language Models (</a:t>
+            </a:r>
+            <a:r>
+              <a:rPr lang="en-US" altLang="zh-TW" sz="2500" dirty="0" err="1">
+                <a:latin typeface="Times New Roman" panose="02020603050405020304" pitchFamily="18" charset="0"/>
+                <a:cs typeface="Times New Roman" panose="02020603050405020304" pitchFamily="18" charset="0"/>
+              </a:rPr>
+              <a:t>dLLMs</a:t>
+            </a:r>
+            <a:r>
+              <a:rPr lang="en-US" altLang="zh-TW" sz="2500" dirty="0">
+                <a:latin typeface="Times New Roman" panose="02020603050405020304" pitchFamily="18" charset="0"/>
+                <a:cs typeface="Times New Roman" panose="02020603050405020304" pitchFamily="18" charset="0"/>
+              </a:rPr>
+              <a:t>) are powerful because they generate and refine tokens in parallel. However, this parallel nature makes </a:t>
+            </a:r>
+            <a:r>
+              <a:rPr lang="en-US" altLang="zh-TW" sz="2500" b="1" dirty="0">
+                <a:latin typeface="Times New Roman" panose="02020603050405020304" pitchFamily="18" charset="0"/>
+                <a:cs typeface="Times New Roman" panose="02020603050405020304" pitchFamily="18" charset="0"/>
+              </a:rPr>
+              <a:t>Constrained Decoding</a:t>
+            </a:r>
+            <a:r>
+              <a:rPr lang="en-US" altLang="zh-TW" sz="2500" dirty="0">
+                <a:latin typeface="Times New Roman" panose="02020603050405020304" pitchFamily="18" charset="0"/>
+                <a:cs typeface="Times New Roman" panose="02020603050405020304" pitchFamily="18" charset="0"/>
+              </a:rPr>
+              <a:t> (ensuring the model follows a specific JSON schema or grammar) extremely difficult. Unlike traditional models that generate text from left to right, </a:t>
+            </a:r>
+            <a:r>
+              <a:rPr lang="en-US" altLang="zh-TW" sz="2500" dirty="0" err="1">
+                <a:latin typeface="Times New Roman" panose="02020603050405020304" pitchFamily="18" charset="0"/>
+                <a:cs typeface="Times New Roman" panose="02020603050405020304" pitchFamily="18" charset="0"/>
+              </a:rPr>
+              <a:t>dLLMs</a:t>
+            </a:r>
+            <a:r>
+              <a:rPr lang="en-US" altLang="zh-TW" sz="2500" dirty="0">
+                <a:latin typeface="Times New Roman" panose="02020603050405020304" pitchFamily="18" charset="0"/>
+                <a:cs typeface="Times New Roman" panose="02020603050405020304" pitchFamily="18" charset="0"/>
+              </a:rPr>
+              <a:t> update the entire sequence simultaneously, making it impossible to use standard Finite State Machine (FSM) masks directly.</a:t>
+            </a:r>
+          </a:p>
+          <a:p>
+            <a:pPr marL="0" marR="0" lvl="0" indent="0" algn="just" rtl="0">
+              <a:lnSpc>
+                <a:spcPct val="100000"/>
+              </a:lnSpc>
+              <a:spcBef>
+                <a:spcPts val="0"/>
+              </a:spcBef>
+              <a:spcAft>
+                <a:spcPts val="0"/>
+              </a:spcAft>
+              <a:buClr>
+                <a:srgbClr val="000000"/>
+              </a:buClr>
+              <a:buSzPts val="2400"/>
+              <a:buFont typeface="Arial"/>
+              <a:buNone/>
+            </a:pPr>
+            <a:endParaRPr sz="2500" dirty="0">
+              <a:solidFill>
+                <a:schemeClr val="dk1"/>
+              </a:solidFill>
+              <a:latin typeface="Times New Roman"/>
+              <a:ea typeface="Times New Roman"/>
+              <a:cs typeface="Times New Roman"/>
+              <a:sym typeface="Times New Roman"/>
+            </a:endParaRPr>
+          </a:p>
+          <a:p>
+            <a:pPr marL="0" marR="0" lvl="0" indent="0" algn="just" rtl="0">
+              <a:lnSpc>
+                <a:spcPct val="100000"/>
+              </a:lnSpc>
+              <a:spcBef>
+                <a:spcPts val="0"/>
+              </a:spcBef>
+              <a:spcAft>
+                <a:spcPts val="0"/>
+              </a:spcAft>
+              <a:buClr>
+                <a:srgbClr val="000000"/>
+              </a:buClr>
+              <a:buSzPts val="1200"/>
+              <a:buFont typeface="Arial"/>
+              <a:buNone/>
+            </a:pPr>
+            <a:endParaRPr sz="1200" b="0" i="0" u="none" strike="noStrike" cap="none" dirty="0">
+              <a:solidFill>
+                <a:schemeClr val="dk1"/>
+              </a:solidFill>
+              <a:latin typeface="Times New Roman"/>
+              <a:ea typeface="Times New Roman"/>
+              <a:cs typeface="Times New Roman"/>
+              <a:sym typeface="Times New Roman"/>
+            </a:endParaRPr>
+          </a:p>
+          <a:p>
+            <a:pPr marL="0" marR="0" lvl="0" indent="0" algn="just" rtl="0">
+              <a:lnSpc>
+                <a:spcPct val="100000"/>
+              </a:lnSpc>
+              <a:spcBef>
+                <a:spcPts val="0"/>
+              </a:spcBef>
+              <a:spcAft>
+                <a:spcPts val="0"/>
+              </a:spcAft>
+              <a:buClr>
+                <a:srgbClr val="000000"/>
+              </a:buClr>
+              <a:buSzPts val="2700"/>
+              <a:buFont typeface="Arial"/>
+              <a:buNone/>
+            </a:pPr>
+            <a:r>
+              <a:rPr lang="en-US" sz="2700" b="1" i="0" u="sng" strike="noStrike" cap="none" dirty="0">
+                <a:solidFill>
+                  <a:srgbClr val="274E13"/>
+                </a:solidFill>
+                <a:highlight>
+                  <a:srgbClr val="D9EAD3"/>
+                </a:highlight>
+                <a:latin typeface="Times New Roman"/>
+                <a:ea typeface="Times New Roman"/>
+                <a:cs typeface="Times New Roman"/>
+                <a:sym typeface="Times New Roman"/>
+              </a:rPr>
+              <a:t>Challenges: </a:t>
+            </a:r>
+            <a:endParaRPr sz="2700" b="1" i="0" u="sng" strike="noStrike" cap="none" dirty="0">
+              <a:solidFill>
+                <a:srgbClr val="274E13"/>
+              </a:solidFill>
+              <a:highlight>
+                <a:srgbClr val="D9EAD3"/>
+              </a:highlight>
+              <a:latin typeface="Times New Roman"/>
+              <a:ea typeface="Times New Roman"/>
+              <a:cs typeface="Times New Roman"/>
+              <a:sym typeface="Times New Roman"/>
+            </a:endParaRPr>
+          </a:p>
+          <a:p>
+            <a:pPr marL="419100" lvl="0" indent="-361950" algn="just">
+              <a:buClr>
+                <a:schemeClr val="dk1"/>
+              </a:buClr>
+              <a:buSzPts val="3100"/>
+              <a:buFont typeface="Times New Roman"/>
+              <a:buChar char="❏"/>
+            </a:pPr>
+            <a:r>
+              <a:rPr lang="en-US" sz="2500" b="1" dirty="0">
+                <a:solidFill>
+                  <a:schemeClr val="dk1"/>
+                </a:solidFill>
+                <a:latin typeface="Times New Roman"/>
+                <a:ea typeface="Times New Roman"/>
+                <a:cs typeface="Times New Roman"/>
+                <a:sym typeface="Times New Roman"/>
+              </a:rPr>
+              <a:t>Stochastic lookahead is unreliable on hard schemas</a:t>
+            </a:r>
+            <a:r>
+              <a:rPr lang="en-US" sz="2500" b="1" i="0" u="none" strike="noStrike" cap="none" dirty="0">
+                <a:solidFill>
+                  <a:schemeClr val="dk1"/>
+                </a:solidFill>
+                <a:latin typeface="Times New Roman"/>
+                <a:ea typeface="Times New Roman"/>
+                <a:cs typeface="Times New Roman"/>
+                <a:sym typeface="Times New Roman"/>
+              </a:rPr>
+              <a:t>: </a:t>
+            </a:r>
+          </a:p>
+          <a:p>
+            <a:pPr marL="419100" lvl="0" algn="just">
+              <a:buSzPts val="2400"/>
+            </a:pPr>
+            <a:r>
+              <a:rPr lang="en-US" altLang="zh-TW" sz="2500" dirty="0">
+                <a:latin typeface="Times New Roman" panose="02020603050405020304" pitchFamily="18" charset="0"/>
+                <a:cs typeface="Times New Roman" panose="02020603050405020304" pitchFamily="18" charset="0"/>
+              </a:rPr>
+              <a:t>LAVE</a:t>
+            </a:r>
+            <a:r>
+              <a:rPr lang="en-US" altLang="zh-TW" sz="2500" baseline="30000" dirty="0">
+                <a:latin typeface="Times New Roman" panose="02020603050405020304" pitchFamily="18" charset="0"/>
+                <a:cs typeface="Times New Roman" panose="02020603050405020304" pitchFamily="18" charset="0"/>
+              </a:rPr>
+              <a:t>[1]</a:t>
+            </a:r>
+            <a:r>
+              <a:rPr lang="en-US" altLang="zh-TW" sz="2500" dirty="0">
+                <a:latin typeface="Times New Roman" panose="02020603050405020304" pitchFamily="18" charset="0"/>
+                <a:cs typeface="Times New Roman" panose="02020603050405020304" pitchFamily="18" charset="0"/>
+              </a:rPr>
+              <a:t>, the leading method, verifies each token by sampling random completions, but on schemas with joint multi-token constraints (e.g., nested types, regex patterns), the probability that a random suffix is valid drops to near zero, causing false rejections, 255× redundant forward passes, and frequent timeouts.</a:t>
+            </a:r>
+            <a:endParaRPr lang="en-US" sz="2500" b="0" i="0" u="none" strike="noStrike" cap="none" dirty="0">
+              <a:solidFill>
+                <a:schemeClr val="dk1"/>
+              </a:solidFill>
+              <a:latin typeface="Times New Roman" panose="02020603050405020304" pitchFamily="18" charset="0"/>
+              <a:ea typeface="Times New Roman"/>
+              <a:cs typeface="Times New Roman" panose="02020603050405020304" pitchFamily="18" charset="0"/>
+              <a:sym typeface="Times New Roman"/>
+            </a:endParaRPr>
+          </a:p>
+          <a:p>
+            <a:pPr marL="419100" marR="0" lvl="0" indent="-361950" algn="just" rtl="0">
+              <a:lnSpc>
+                <a:spcPct val="100000"/>
+              </a:lnSpc>
+              <a:spcBef>
+                <a:spcPts val="0"/>
+              </a:spcBef>
+              <a:spcAft>
+                <a:spcPts val="0"/>
+              </a:spcAft>
+              <a:buClr>
+                <a:schemeClr val="dk1"/>
+              </a:buClr>
+              <a:buSzPts val="3100"/>
+              <a:buFont typeface="Times New Roman"/>
+              <a:buChar char="❏"/>
+            </a:pPr>
+            <a:r>
+              <a:rPr lang="en-US" sz="2500" b="1" dirty="0">
+                <a:solidFill>
+                  <a:schemeClr val="dk1"/>
+                </a:solidFill>
+                <a:latin typeface="Times New Roman"/>
+                <a:ea typeface="Times New Roman"/>
+                <a:cs typeface="Times New Roman"/>
+                <a:sym typeface="Times New Roman"/>
+              </a:rPr>
+              <a:t>Greedy per-position repair cascades</a:t>
+            </a:r>
+            <a:r>
+              <a:rPr lang="en-US" sz="2500" b="0" i="0" u="none" strike="noStrike" cap="none" dirty="0">
+                <a:solidFill>
+                  <a:schemeClr val="dk1"/>
+                </a:solidFill>
+                <a:latin typeface="Times New Roman"/>
+                <a:ea typeface="Times New Roman"/>
+                <a:cs typeface="Times New Roman"/>
+                <a:sym typeface="Times New Roman"/>
+              </a:rPr>
+              <a:t>: </a:t>
+            </a:r>
+            <a:endParaRPr sz="2500" b="0" i="0" u="none" strike="noStrike" cap="none" dirty="0">
+              <a:solidFill>
+                <a:schemeClr val="dk1"/>
+              </a:solidFill>
+              <a:latin typeface="Times New Roman"/>
+              <a:ea typeface="Times New Roman"/>
+              <a:cs typeface="Times New Roman"/>
+              <a:sym typeface="Times New Roman"/>
+            </a:endParaRPr>
+          </a:p>
+          <a:p>
+            <a:pPr marL="419100" lvl="0" algn="just">
+              <a:buSzPts val="2400"/>
+            </a:pPr>
+            <a:r>
+              <a:rPr lang="en-US" altLang="zh-TW" sz="2500" dirty="0">
+                <a:latin typeface="Times New Roman" panose="02020603050405020304" pitchFamily="18" charset="0"/>
+                <a:cs typeface="Times New Roman" panose="02020603050405020304" pitchFamily="18" charset="0"/>
+              </a:rPr>
+              <a:t>Fixing one violated token at a time ignores correlations, where re-masking position c can leave downstream positions in a newly invalid state, triggering repeated resamples across the span.</a:t>
+            </a:r>
+            <a:endParaRPr sz="2500" dirty="0">
+              <a:solidFill>
+                <a:schemeClr val="dk1"/>
+              </a:solidFill>
+              <a:latin typeface="Times New Roman"/>
+              <a:ea typeface="Times New Roman"/>
+              <a:cs typeface="Times New Roman"/>
+              <a:sym typeface="Times New Roman"/>
+            </a:endParaRPr>
+          </a:p>
+          <a:p>
+            <a:pPr marL="0" marR="0" lvl="0" indent="0" algn="just" rtl="0">
+              <a:lnSpc>
+                <a:spcPct val="100000"/>
+              </a:lnSpc>
+              <a:spcBef>
+                <a:spcPts val="0"/>
+              </a:spcBef>
+              <a:spcAft>
+                <a:spcPts val="0"/>
+              </a:spcAft>
+              <a:buClr>
+                <a:srgbClr val="000000"/>
+              </a:buClr>
+              <a:buSzPts val="1200"/>
+              <a:buFont typeface="Arial"/>
+              <a:buNone/>
+            </a:pPr>
+            <a:endParaRPr sz="1200" b="0" i="0" u="none" strike="noStrike" cap="none" dirty="0">
+              <a:solidFill>
+                <a:schemeClr val="dk1"/>
+              </a:solidFill>
+              <a:latin typeface="Times New Roman"/>
+              <a:ea typeface="Times New Roman"/>
+              <a:cs typeface="Times New Roman"/>
+              <a:sym typeface="Times New Roman"/>
+            </a:endParaRPr>
+          </a:p>
+          <a:p>
+            <a:pPr marL="0" marR="0" lvl="0" indent="0" algn="just" rtl="0">
+              <a:lnSpc>
+                <a:spcPct val="100000"/>
+              </a:lnSpc>
+              <a:spcBef>
+                <a:spcPts val="0"/>
+              </a:spcBef>
+              <a:spcAft>
+                <a:spcPts val="0"/>
+              </a:spcAft>
+              <a:buClr>
+                <a:srgbClr val="000000"/>
+              </a:buClr>
+              <a:buSzPts val="2700"/>
+              <a:buFont typeface="Arial"/>
+              <a:buNone/>
+            </a:pPr>
+            <a:r>
+              <a:rPr lang="en-US" sz="2700" b="1" i="0" u="sng" strike="noStrike" cap="none" dirty="0">
+                <a:solidFill>
+                  <a:srgbClr val="274E13"/>
+                </a:solidFill>
+                <a:highlight>
+                  <a:srgbClr val="D9EAD3"/>
+                </a:highlight>
+                <a:latin typeface="Times New Roman"/>
+                <a:ea typeface="Times New Roman"/>
+                <a:cs typeface="Times New Roman"/>
+                <a:sym typeface="Times New Roman"/>
+              </a:rPr>
+              <a:t>Our Solution: </a:t>
+            </a:r>
+            <a:endParaRPr sz="2400" b="0" i="0" u="none" strike="noStrike" cap="none" dirty="0">
+              <a:solidFill>
+                <a:schemeClr val="dk1"/>
+              </a:solidFill>
+              <a:highlight>
+                <a:srgbClr val="D9EAD3"/>
+              </a:highlight>
+              <a:latin typeface="Times New Roman"/>
+              <a:ea typeface="Times New Roman"/>
+              <a:cs typeface="Times New Roman"/>
+              <a:sym typeface="Times New Roman"/>
+            </a:endParaRPr>
+          </a:p>
+          <a:p>
+            <a:pPr marL="533400" marR="0" lvl="0" indent="-425450" algn="just" rtl="0">
+              <a:lnSpc>
+                <a:spcPct val="100000"/>
+              </a:lnSpc>
+              <a:spcBef>
+                <a:spcPts val="0"/>
+              </a:spcBef>
+              <a:spcAft>
+                <a:spcPts val="0"/>
+              </a:spcAft>
+              <a:buClr>
+                <a:schemeClr val="dk1"/>
+              </a:buClr>
+              <a:buSzPts val="2500"/>
+              <a:buFont typeface="Times New Roman"/>
+              <a:buChar char="★"/>
+            </a:pPr>
+            <a:r>
+              <a:rPr lang="en-US" sz="2500" b="1" dirty="0">
+                <a:solidFill>
+                  <a:schemeClr val="dk1"/>
+                </a:solidFill>
+                <a:latin typeface="Times New Roman"/>
+                <a:ea typeface="Times New Roman"/>
+                <a:cs typeface="Times New Roman"/>
+                <a:sym typeface="Times New Roman"/>
+              </a:rPr>
+              <a:t>Engineering Optimization (Efficiency Side – </a:t>
+            </a:r>
+            <a:r>
+              <a:rPr lang="en-US" sz="2500" b="1" dirty="0" err="1">
+                <a:solidFill>
+                  <a:schemeClr val="dk1"/>
+                </a:solidFill>
+                <a:latin typeface="Times New Roman"/>
+                <a:ea typeface="Times New Roman"/>
+                <a:cs typeface="Times New Roman"/>
+                <a:sym typeface="Times New Roman"/>
+              </a:rPr>
+              <a:t>DGrammar</a:t>
+            </a:r>
+            <a:r>
+              <a:rPr lang="en-US" sz="2500" b="1" dirty="0">
+                <a:solidFill>
+                  <a:schemeClr val="dk1"/>
+                </a:solidFill>
+                <a:latin typeface="Times New Roman"/>
+                <a:ea typeface="Times New Roman"/>
+                <a:cs typeface="Times New Roman"/>
+                <a:sym typeface="Times New Roman"/>
+              </a:rPr>
+              <a:t>)</a:t>
+            </a:r>
+            <a:endParaRPr sz="2500" b="1" dirty="0">
+              <a:solidFill>
+                <a:schemeClr val="dk1"/>
+              </a:solidFill>
+              <a:latin typeface="Times New Roman"/>
+              <a:ea typeface="Times New Roman"/>
+              <a:cs typeface="Times New Roman"/>
+              <a:sym typeface="Times New Roman"/>
+            </a:endParaRPr>
+          </a:p>
+          <a:p>
+            <a:pPr marL="914400" lvl="1" indent="-387350" algn="just">
+              <a:buClr>
+                <a:schemeClr val="dk1"/>
+              </a:buClr>
+              <a:buSzPts val="2500"/>
+              <a:buFont typeface="Times New Roman"/>
+              <a:buChar char="○"/>
+            </a:pPr>
+            <a:r>
+              <a:rPr lang="en-US" sz="2500" dirty="0">
+                <a:solidFill>
+                  <a:schemeClr val="dk1"/>
+                </a:solidFill>
+                <a:latin typeface="Times New Roman"/>
+                <a:ea typeface="Times New Roman"/>
+                <a:cs typeface="Times New Roman"/>
+                <a:sym typeface="Times New Roman"/>
+              </a:rPr>
+              <a:t>Replace stochastic lookahead with deterministic frontier masking, the valid token set is computed directly at each position via an incremental grammar automaton, with no random completions drawn.</a:t>
+            </a:r>
+          </a:p>
+          <a:p>
+            <a:pPr marL="914400" lvl="1" indent="-387350" algn="just">
+              <a:buClr>
+                <a:schemeClr val="dk1"/>
+              </a:buClr>
+              <a:buSzPts val="2500"/>
+              <a:buFont typeface="Times New Roman"/>
+              <a:buChar char="○"/>
+            </a:pPr>
+            <a:r>
+              <a:rPr lang="en-US" sz="2500" dirty="0">
+                <a:solidFill>
+                  <a:schemeClr val="dk1"/>
+                </a:solidFill>
+                <a:latin typeface="Times New Roman"/>
+                <a:ea typeface="Times New Roman"/>
+                <a:cs typeface="Times New Roman"/>
+                <a:sym typeface="Times New Roman"/>
+              </a:rPr>
+              <a:t>Implemente an Additive Increase / Multiplicative Decrease (AIMD) mechanism to dynamically scale token submission batches, maximizing hardware throughput</a:t>
+            </a:r>
+            <a:endParaRPr sz="2500" dirty="0">
+              <a:solidFill>
+                <a:schemeClr val="dk1"/>
+              </a:solidFill>
+              <a:latin typeface="Times New Roman"/>
+              <a:ea typeface="Times New Roman"/>
+              <a:cs typeface="Times New Roman"/>
+              <a:sym typeface="Times New Roman"/>
+            </a:endParaRPr>
+          </a:p>
+          <a:p>
+            <a:pPr marL="533400" marR="0" lvl="0" indent="-425450" algn="just" rtl="0">
+              <a:lnSpc>
+                <a:spcPct val="100000"/>
+              </a:lnSpc>
+              <a:spcBef>
+                <a:spcPts val="0"/>
+              </a:spcBef>
+              <a:spcAft>
+                <a:spcPts val="0"/>
+              </a:spcAft>
+              <a:buClr>
+                <a:schemeClr val="dk1"/>
+              </a:buClr>
+              <a:buSzPts val="2500"/>
+              <a:buFont typeface="Times New Roman"/>
+              <a:buChar char="★"/>
+            </a:pPr>
+            <a:r>
+              <a:rPr lang="en-US" sz="2500" b="1" dirty="0">
+                <a:solidFill>
+                  <a:schemeClr val="dk1"/>
+                </a:solidFill>
+                <a:latin typeface="Times New Roman"/>
+                <a:ea typeface="Times New Roman"/>
+                <a:cs typeface="Times New Roman"/>
+                <a:sym typeface="Times New Roman"/>
+              </a:rPr>
+              <a:t>Algorithmic Innovation (Accuracy Side – </a:t>
+            </a:r>
+            <a:r>
+              <a:rPr lang="en-US" sz="2500" b="1" dirty="0" err="1">
+                <a:solidFill>
+                  <a:schemeClr val="dk1"/>
+                </a:solidFill>
+                <a:latin typeface="Times New Roman"/>
+                <a:ea typeface="Times New Roman"/>
+                <a:cs typeface="Times New Roman"/>
+                <a:sym typeface="Times New Roman"/>
+              </a:rPr>
+              <a:t>DPGrammar</a:t>
+            </a:r>
+            <a:r>
+              <a:rPr lang="en-US" sz="2500" b="1" dirty="0">
+                <a:solidFill>
+                  <a:schemeClr val="dk1"/>
+                </a:solidFill>
+                <a:latin typeface="Times New Roman"/>
+                <a:ea typeface="Times New Roman"/>
+                <a:cs typeface="Times New Roman"/>
+                <a:sym typeface="Times New Roman"/>
+              </a:rPr>
+              <a:t>)</a:t>
+            </a:r>
+            <a:endParaRPr sz="2500" b="1" dirty="0">
+              <a:solidFill>
+                <a:schemeClr val="dk1"/>
+              </a:solidFill>
+              <a:latin typeface="Times New Roman"/>
+              <a:ea typeface="Times New Roman"/>
+              <a:cs typeface="Times New Roman"/>
+              <a:sym typeface="Times New Roman"/>
+            </a:endParaRPr>
+          </a:p>
+          <a:p>
+            <a:pPr marL="914400" lvl="1" indent="-387350" algn="just">
+              <a:buClr>
+                <a:schemeClr val="dk1"/>
+              </a:buClr>
+              <a:buSzPts val="2500"/>
+              <a:buFont typeface="Times New Roman"/>
+              <a:buChar char="○"/>
+            </a:pPr>
+            <a:r>
+              <a:rPr lang="en-US" sz="2500" dirty="0">
+                <a:solidFill>
+                  <a:schemeClr val="dk1"/>
+                </a:solidFill>
+                <a:latin typeface="Times New Roman"/>
+                <a:ea typeface="Times New Roman"/>
+                <a:cs typeface="Times New Roman"/>
+                <a:sym typeface="Times New Roman"/>
+              </a:rPr>
+              <a:t>Detects violated spans [c, s) after each batch unmask, positions where the committed tokens break the grammar automaton state.</a:t>
+            </a:r>
+          </a:p>
+          <a:p>
+            <a:pPr marL="914400" lvl="1" indent="-387350" algn="just">
+              <a:buClr>
+                <a:schemeClr val="dk1"/>
+              </a:buClr>
+              <a:buSzPts val="2500"/>
+              <a:buFont typeface="Times New Roman"/>
+              <a:buChar char="○"/>
+            </a:pPr>
+            <a:r>
+              <a:rPr lang="en-US" sz="2500" dirty="0">
+                <a:solidFill>
+                  <a:schemeClr val="dk1"/>
+                </a:solidFill>
+                <a:latin typeface="Times New Roman"/>
+                <a:ea typeface="Times New Roman"/>
+                <a:cs typeface="Times New Roman"/>
+                <a:sym typeface="Times New Roman"/>
+              </a:rPr>
+              <a:t>Runs a Viterbi Dynamic Programming over the entire span, tracking grammar DFA states across top-K token candidates to jointly select the highest-probability valid replacement sequence in one pass.</a:t>
+            </a:r>
+            <a:endParaRPr sz="2400" b="0" i="0" u="none" strike="noStrike" cap="none" dirty="0">
+              <a:solidFill>
+                <a:schemeClr val="dk1"/>
+              </a:solidFill>
+              <a:latin typeface="Times New Roman"/>
+              <a:ea typeface="Times New Roman"/>
+              <a:cs typeface="Times New Roman"/>
+              <a:sym typeface="Times New Roman"/>
+            </a:endParaRPr>
+          </a:p>
+        </p:txBody>
+      </p:sp>
+      <p:sp>
+        <p:nvSpPr>
+          <p:cNvPr id="107" name="Google Shape;107;p1">
+            <a:extLst>
+              <a:ext uri="{FF2B5EF4-FFF2-40B4-BE49-F238E27FC236}">
+                <a16:creationId xmlns:a16="http://schemas.microsoft.com/office/drawing/2014/main" id="{6B3F5489-B536-73D6-5F6E-E2A6BD41AC12}"/>
+              </a:ext>
+            </a:extLst>
+          </p:cNvPr>
+          <p:cNvSpPr txBox="1"/>
+          <p:nvPr/>
+        </p:nvSpPr>
+        <p:spPr>
+          <a:xfrm>
+            <a:off x="983975" y="21476099"/>
+            <a:ext cx="10058700" cy="5148675"/>
+          </a:xfrm>
+          <a:prstGeom prst="rect">
+            <a:avLst/>
+          </a:prstGeom>
+          <a:noFill/>
+          <a:ln w="9525" cap="flat" cmpd="sng">
+            <a:solidFill>
+              <a:srgbClr val="005700"/>
+            </a:solidFill>
+            <a:prstDash val="solid"/>
+            <a:round/>
+            <a:headEnd type="none" w="sm" len="sm"/>
+            <a:tailEnd type="none" w="sm" len="sm"/>
+          </a:ln>
+        </p:spPr>
+        <p:txBody>
+          <a:bodyPr spcFirstLastPara="1" wrap="square" lIns="84625" tIns="84625" rIns="84625" bIns="84625" anchor="t" anchorCtr="0">
+            <a:noAutofit/>
+          </a:bodyPr>
+          <a:lstStyle/>
+          <a:p>
+            <a:pPr marL="0" marR="0" lvl="0" indent="0" algn="just" rtl="0">
+              <a:lnSpc>
+                <a:spcPct val="100000"/>
+              </a:lnSpc>
+              <a:spcBef>
+                <a:spcPts val="0"/>
+              </a:spcBef>
+              <a:spcAft>
+                <a:spcPts val="0"/>
+              </a:spcAft>
+              <a:buClr>
+                <a:srgbClr val="000000"/>
+              </a:buClr>
+              <a:buSzPts val="2700"/>
+              <a:buFont typeface="Arial"/>
+              <a:buNone/>
+            </a:pPr>
+            <a:endParaRPr sz="2700" b="1" u="sng" dirty="0">
+              <a:solidFill>
+                <a:srgbClr val="274E13"/>
+              </a:solidFill>
+              <a:latin typeface="Times New Roman"/>
+              <a:ea typeface="Times New Roman"/>
+              <a:cs typeface="Times New Roman"/>
+              <a:sym typeface="Times New Roman"/>
+            </a:endParaRPr>
+          </a:p>
+        </p:txBody>
+      </p:sp>
+      <p:sp>
+        <p:nvSpPr>
+          <p:cNvPr id="108" name="Google Shape;108;p1">
+            <a:extLst>
+              <a:ext uri="{FF2B5EF4-FFF2-40B4-BE49-F238E27FC236}">
+                <a16:creationId xmlns:a16="http://schemas.microsoft.com/office/drawing/2014/main" id="{FCB42526-D3E2-EADB-99A5-29012FC2396E}"/>
+              </a:ext>
+            </a:extLst>
+          </p:cNvPr>
+          <p:cNvSpPr txBox="1"/>
+          <p:nvPr/>
+        </p:nvSpPr>
+        <p:spPr>
+          <a:xfrm>
+            <a:off x="11298013" y="14284316"/>
+            <a:ext cx="12442800" cy="12360222"/>
+          </a:xfrm>
+          <a:prstGeom prst="rect">
+            <a:avLst/>
+          </a:prstGeom>
+          <a:noFill/>
+          <a:ln w="9525" cap="flat" cmpd="sng">
+            <a:solidFill>
+              <a:srgbClr val="005700"/>
+            </a:solidFill>
+            <a:prstDash val="solid"/>
+            <a:round/>
+            <a:headEnd type="none" w="sm" len="sm"/>
+            <a:tailEnd type="none" w="sm" len="sm"/>
+          </a:ln>
+        </p:spPr>
+        <p:txBody>
+          <a:bodyPr spcFirstLastPara="1" wrap="square" lIns="84625" tIns="84625" rIns="84625" bIns="84625" anchor="t" anchorCtr="0">
+            <a:noAutofit/>
+          </a:bodyPr>
+          <a:lstStyle/>
+          <a:p>
+            <a:pPr marL="0" marR="0" lvl="0" indent="0" algn="just" rtl="0">
+              <a:lnSpc>
+                <a:spcPct val="100000"/>
+              </a:lnSpc>
+              <a:spcBef>
+                <a:spcPts val="0"/>
+              </a:spcBef>
+              <a:spcAft>
+                <a:spcPts val="0"/>
+              </a:spcAft>
+              <a:buClr>
+                <a:srgbClr val="000000"/>
+              </a:buClr>
+              <a:buSzPts val="2700"/>
+              <a:buFont typeface="Arial"/>
+              <a:buNone/>
+            </a:pPr>
+            <a:r>
+              <a:rPr lang="en-US" sz="2700" b="1" u="sng" dirty="0" err="1">
+                <a:solidFill>
+                  <a:srgbClr val="274E13"/>
+                </a:solidFill>
+                <a:highlight>
+                  <a:srgbClr val="D9EAD3"/>
+                </a:highlight>
+                <a:latin typeface="Times New Roman"/>
+                <a:ea typeface="Times New Roman"/>
+                <a:cs typeface="Times New Roman"/>
+                <a:sym typeface="Times New Roman"/>
+              </a:rPr>
+              <a:t>DGrammar</a:t>
+            </a:r>
+            <a:r>
+              <a:rPr lang="en-US" sz="2700" b="1" u="sng" dirty="0">
+                <a:solidFill>
+                  <a:srgbClr val="274E13"/>
+                </a:solidFill>
+                <a:highlight>
+                  <a:srgbClr val="D9EAD3"/>
+                </a:highlight>
+                <a:latin typeface="Times New Roman"/>
+                <a:ea typeface="Times New Roman"/>
+                <a:cs typeface="Times New Roman"/>
+                <a:sym typeface="Times New Roman"/>
+              </a:rPr>
+              <a:t>:</a:t>
+            </a:r>
+            <a:endParaRPr sz="2400" dirty="0">
+              <a:solidFill>
+                <a:schemeClr val="dk1"/>
+              </a:solidFill>
+              <a:highlight>
+                <a:srgbClr val="D9EAD3"/>
+              </a:highlight>
+              <a:latin typeface="Times New Roman"/>
+              <a:ea typeface="Times New Roman"/>
+              <a:cs typeface="Times New Roman"/>
+              <a:sym typeface="Times New Roman"/>
+            </a:endParaRPr>
+          </a:p>
+          <a:p>
+            <a:pPr marL="457200" lvl="0" indent="-387350" algn="just">
+              <a:buClr>
+                <a:schemeClr val="dk1"/>
+              </a:buClr>
+              <a:buSzPts val="2500"/>
+              <a:buFont typeface="Times New Roman"/>
+              <a:buChar char="●"/>
+            </a:pPr>
+            <a:r>
+              <a:rPr lang="en-US" sz="2500" b="1" dirty="0">
+                <a:solidFill>
+                  <a:schemeClr val="dk1"/>
+                </a:solidFill>
+                <a:latin typeface="Times New Roman"/>
+                <a:ea typeface="Times New Roman"/>
+                <a:cs typeface="Times New Roman"/>
+                <a:sym typeface="Times New Roman"/>
+              </a:rPr>
+              <a:t>Incremental parser state</a:t>
+            </a:r>
+            <a:r>
+              <a:rPr lang="en-US" sz="2500" dirty="0">
+                <a:solidFill>
+                  <a:schemeClr val="dk1"/>
+                </a:solidFill>
+                <a:latin typeface="Times New Roman"/>
+                <a:ea typeface="Times New Roman"/>
+                <a:cs typeface="Times New Roman"/>
+                <a:sym typeface="Times New Roman"/>
+              </a:rPr>
+              <a:t>: maintains a live grammar automaton (</a:t>
+            </a:r>
+            <a:r>
+              <a:rPr lang="en-US" sz="2500" dirty="0" err="1">
+                <a:solidFill>
+                  <a:schemeClr val="dk1"/>
+                </a:solidFill>
+                <a:latin typeface="Courier New" panose="02070309020205020404" pitchFamily="49" charset="0"/>
+                <a:ea typeface="Times New Roman"/>
+                <a:cs typeface="Courier New" panose="02070309020205020404" pitchFamily="49" charset="0"/>
+                <a:sym typeface="Times New Roman"/>
+              </a:rPr>
+              <a:t>LLMatcher</a:t>
+            </a:r>
+            <a:r>
+              <a:rPr lang="en-US" sz="2500" dirty="0">
+                <a:solidFill>
+                  <a:schemeClr val="dk1"/>
+                </a:solidFill>
+                <a:latin typeface="Times New Roman"/>
+                <a:ea typeface="Times New Roman"/>
+                <a:cs typeface="Times New Roman"/>
+                <a:sym typeface="Times New Roman"/>
+              </a:rPr>
+              <a:t>) that advances token-by-token, so mask computation at each position requires only a diff from the previous state rather than recomputing from scratch</a:t>
+            </a:r>
+          </a:p>
+          <a:p>
+            <a:pPr marL="457200" lvl="0" indent="-387350" algn="just">
+              <a:buClr>
+                <a:schemeClr val="dk1"/>
+              </a:buClr>
+              <a:buSzPts val="2500"/>
+              <a:buFont typeface="Times New Roman"/>
+              <a:buChar char="●"/>
+            </a:pPr>
+            <a:r>
+              <a:rPr lang="en-US" sz="2500" b="1" dirty="0">
+                <a:solidFill>
+                  <a:schemeClr val="dk1"/>
+                </a:solidFill>
+                <a:latin typeface="Times New Roman"/>
+                <a:ea typeface="Times New Roman"/>
+                <a:cs typeface="Times New Roman"/>
+                <a:sym typeface="Times New Roman"/>
+              </a:rPr>
+              <a:t>Async mask overlap</a:t>
+            </a:r>
+            <a:r>
+              <a:rPr lang="en-US" sz="2500" dirty="0">
+                <a:solidFill>
+                  <a:schemeClr val="dk1"/>
+                </a:solidFill>
+                <a:latin typeface="Times New Roman"/>
+                <a:ea typeface="Times New Roman"/>
+                <a:cs typeface="Times New Roman"/>
+                <a:sym typeface="Times New Roman"/>
+              </a:rPr>
+              <a:t>: CPU grammar mask construction runs concurrently with the GPU forward pass, by the time logits are ready, the allowed-token mask is already computed, effectively hiding constraint overhead</a:t>
+            </a:r>
+          </a:p>
+          <a:p>
+            <a:pPr marL="457200" lvl="0" indent="-387350" algn="just">
+              <a:buClr>
+                <a:schemeClr val="dk1"/>
+              </a:buClr>
+              <a:buSzPts val="2500"/>
+              <a:buFont typeface="Times New Roman"/>
+              <a:buChar char="●"/>
+            </a:pPr>
+            <a:r>
+              <a:rPr lang="en-US" sz="2500" b="1" dirty="0">
+                <a:solidFill>
+                  <a:schemeClr val="dk1"/>
+                </a:solidFill>
+                <a:latin typeface="Times New Roman"/>
+                <a:ea typeface="Times New Roman"/>
+                <a:cs typeface="Times New Roman"/>
+                <a:sym typeface="Times New Roman"/>
+              </a:rPr>
+              <a:t>AIMD batching</a:t>
+            </a:r>
+            <a:r>
+              <a:rPr lang="en-US" sz="2500" dirty="0">
+                <a:solidFill>
+                  <a:schemeClr val="dk1"/>
+                </a:solidFill>
+                <a:latin typeface="Times New Roman"/>
+                <a:ea typeface="Times New Roman"/>
+                <a:cs typeface="Times New Roman"/>
+                <a:sym typeface="Times New Roman"/>
+              </a:rPr>
+              <a:t>: batch size grows additively when tokens are accepted and shrinks multiplicatively on violation, dynamically balancing throughput against resample risk without manual tuning</a:t>
+            </a:r>
+          </a:p>
+          <a:p>
+            <a:pPr marL="457200" lvl="0" indent="-387350" algn="just">
+              <a:buClr>
+                <a:schemeClr val="dk1"/>
+              </a:buClr>
+              <a:buSzPts val="2500"/>
+              <a:buFont typeface="Times New Roman"/>
+              <a:buChar char="●"/>
+            </a:pPr>
+            <a:r>
+              <a:rPr lang="en-US" sz="2500" b="1" dirty="0">
+                <a:solidFill>
+                  <a:schemeClr val="dk1"/>
+                </a:solidFill>
+                <a:latin typeface="Times New Roman"/>
+                <a:ea typeface="Times New Roman"/>
+                <a:cs typeface="Times New Roman"/>
+                <a:sym typeface="Times New Roman"/>
+              </a:rPr>
+              <a:t>Early EOS</a:t>
+            </a:r>
+            <a:r>
+              <a:rPr lang="en-US" sz="2500" dirty="0">
+                <a:solidFill>
+                  <a:schemeClr val="dk1"/>
+                </a:solidFill>
+                <a:latin typeface="Times New Roman"/>
+                <a:ea typeface="Times New Roman"/>
+                <a:cs typeface="Times New Roman"/>
+                <a:sym typeface="Times New Roman"/>
+              </a:rPr>
+              <a:t>: once the automaton signals a complete, schema-valid string, remaining diffusion steps are skipped, avoiding unnecessary forward passes on already-settled tokens</a:t>
+            </a:r>
+          </a:p>
+          <a:p>
+            <a:pPr marL="457200" lvl="0" indent="-387350" algn="just">
+              <a:buClr>
+                <a:schemeClr val="dk1"/>
+              </a:buClr>
+              <a:buSzPts val="2500"/>
+              <a:buFont typeface="Times New Roman"/>
+              <a:buChar char="●"/>
+            </a:pPr>
+            <a:endParaRPr sz="2500" dirty="0">
+              <a:solidFill>
+                <a:schemeClr val="dk1"/>
+              </a:solidFill>
+              <a:latin typeface="Times New Roman"/>
+              <a:ea typeface="Times New Roman"/>
+              <a:cs typeface="Times New Roman"/>
+              <a:sym typeface="Times New Roman"/>
+            </a:endParaRPr>
+          </a:p>
+          <a:p>
+            <a:pPr marL="0" marR="0" lvl="0" indent="0" algn="just" rtl="0">
+              <a:lnSpc>
+                <a:spcPct val="100000"/>
+              </a:lnSpc>
+              <a:spcBef>
+                <a:spcPts val="0"/>
+              </a:spcBef>
+              <a:spcAft>
+                <a:spcPts val="0"/>
+              </a:spcAft>
+              <a:buClr>
+                <a:srgbClr val="000000"/>
+              </a:buClr>
+              <a:buSzPts val="2700"/>
+              <a:buFont typeface="Arial"/>
+              <a:buNone/>
+            </a:pPr>
+            <a:r>
+              <a:rPr lang="en-US" sz="2700" b="1" u="sng" dirty="0" err="1">
+                <a:solidFill>
+                  <a:srgbClr val="274E13"/>
+                </a:solidFill>
+                <a:highlight>
+                  <a:srgbClr val="D9EAD3"/>
+                </a:highlight>
+                <a:latin typeface="Times New Roman"/>
+                <a:ea typeface="Times New Roman"/>
+                <a:cs typeface="Times New Roman"/>
+                <a:sym typeface="Times New Roman"/>
+              </a:rPr>
+              <a:t>DPGrammar</a:t>
+            </a:r>
+            <a:r>
+              <a:rPr lang="en-US" sz="2700" b="1" u="sng" dirty="0">
+                <a:solidFill>
+                  <a:srgbClr val="274E13"/>
+                </a:solidFill>
+                <a:highlight>
+                  <a:srgbClr val="D9EAD3"/>
+                </a:highlight>
+                <a:latin typeface="Times New Roman"/>
+                <a:ea typeface="Times New Roman"/>
+                <a:cs typeface="Times New Roman"/>
+                <a:sym typeface="Times New Roman"/>
+              </a:rPr>
+              <a:t>:</a:t>
+            </a:r>
+          </a:p>
+          <a:p>
+            <a:pPr marL="457200" lvl="0" indent="-387350" algn="just">
+              <a:buClr>
+                <a:schemeClr val="dk1"/>
+              </a:buClr>
+              <a:buSzPts val="2500"/>
+              <a:buFont typeface="Times New Roman"/>
+              <a:buChar char="●"/>
+            </a:pPr>
+            <a:r>
+              <a:rPr lang="en-US" sz="2500" b="1" dirty="0">
+                <a:solidFill>
+                  <a:schemeClr val="dk1"/>
+                </a:solidFill>
+                <a:latin typeface="Times New Roman"/>
+                <a:ea typeface="Times New Roman"/>
+                <a:cs typeface="Times New Roman"/>
+                <a:sym typeface="Times New Roman"/>
+              </a:rPr>
+              <a:t>Violation detection</a:t>
+            </a:r>
+            <a:r>
+              <a:rPr lang="en-US" sz="2500" dirty="0">
+                <a:solidFill>
+                  <a:schemeClr val="dk1"/>
+                </a:solidFill>
+                <a:latin typeface="Times New Roman"/>
+                <a:ea typeface="Times New Roman"/>
+                <a:cs typeface="Times New Roman"/>
+                <a:sym typeface="Times New Roman"/>
+              </a:rPr>
+              <a:t>: after each batch unmask, </a:t>
+            </a:r>
+            <a:r>
+              <a:rPr lang="en-US" sz="2500" dirty="0" err="1">
+                <a:solidFill>
+                  <a:schemeClr val="dk1"/>
+                </a:solidFill>
+                <a:latin typeface="Courier New" panose="02070309020205020404" pitchFamily="49" charset="0"/>
+                <a:ea typeface="Times New Roman"/>
+                <a:cs typeface="Courier New" panose="02070309020205020404" pitchFamily="49" charset="0"/>
+                <a:sym typeface="Times New Roman"/>
+              </a:rPr>
+              <a:t>extend_prefix</a:t>
+            </a:r>
+            <a:r>
+              <a:rPr lang="en-US" sz="2500" dirty="0">
+                <a:solidFill>
+                  <a:schemeClr val="dk1"/>
+                </a:solidFill>
+                <a:latin typeface="Times New Roman"/>
+                <a:ea typeface="Times New Roman"/>
+                <a:cs typeface="Times New Roman"/>
+                <a:sym typeface="Times New Roman"/>
+              </a:rPr>
+              <a:t> walks the committed sequence through the grammar automaton; the first position where </a:t>
+            </a:r>
+            <a:r>
+              <a:rPr lang="en-US" sz="2500" dirty="0" err="1">
+                <a:solidFill>
+                  <a:schemeClr val="dk1"/>
+                </a:solidFill>
+                <a:latin typeface="Courier New" panose="02070309020205020404" pitchFamily="49" charset="0"/>
+                <a:ea typeface="Times New Roman"/>
+                <a:cs typeface="Courier New" panose="02070309020205020404" pitchFamily="49" charset="0"/>
+                <a:sym typeface="Times New Roman"/>
+              </a:rPr>
+              <a:t>try_consume</a:t>
+            </a:r>
+            <a:r>
+              <a:rPr lang="en-US" sz="2500" dirty="0">
+                <a:solidFill>
+                  <a:schemeClr val="dk1"/>
+                </a:solidFill>
+                <a:latin typeface="Times New Roman"/>
+                <a:ea typeface="Times New Roman"/>
+                <a:cs typeface="Times New Roman"/>
+                <a:sym typeface="Times New Roman"/>
+              </a:rPr>
+              <a:t> fails marks the start c of the violated span [c, s)</a:t>
+            </a:r>
+          </a:p>
+          <a:p>
+            <a:pPr marL="457200" lvl="0" indent="-387350" algn="just">
+              <a:buClr>
+                <a:schemeClr val="dk1"/>
+              </a:buClr>
+              <a:buSzPts val="2500"/>
+              <a:buFont typeface="Times New Roman"/>
+              <a:buChar char="●"/>
+            </a:pPr>
+            <a:r>
+              <a:rPr lang="en-US" sz="2500" b="1" dirty="0">
+                <a:solidFill>
+                  <a:schemeClr val="dk1"/>
+                </a:solidFill>
+                <a:latin typeface="Times New Roman"/>
+                <a:ea typeface="Times New Roman"/>
+                <a:cs typeface="Times New Roman"/>
+                <a:sym typeface="Times New Roman"/>
+              </a:rPr>
+              <a:t>Phase 1 – rollback exploration</a:t>
+            </a:r>
+            <a:r>
+              <a:rPr lang="en-US" sz="2500" dirty="0">
+                <a:solidFill>
+                  <a:schemeClr val="dk1"/>
+                </a:solidFill>
+                <a:latin typeface="Times New Roman"/>
+                <a:ea typeface="Times New Roman"/>
+                <a:cs typeface="Times New Roman"/>
+                <a:sym typeface="Times New Roman"/>
+              </a:rPr>
+              <a:t>: for each position in [c, s), iterates over top-K tokens and calls </a:t>
+            </a:r>
+            <a:r>
+              <a:rPr lang="en-US" sz="2500" dirty="0" err="1">
+                <a:solidFill>
+                  <a:schemeClr val="dk1"/>
+                </a:solidFill>
+                <a:latin typeface="Courier New" panose="02070309020205020404" pitchFamily="49" charset="0"/>
+                <a:ea typeface="Times New Roman"/>
+                <a:cs typeface="Courier New" panose="02070309020205020404" pitchFamily="49" charset="0"/>
+                <a:sym typeface="Times New Roman"/>
+              </a:rPr>
+              <a:t>try_consume</a:t>
+            </a:r>
+            <a:r>
+              <a:rPr lang="en-US" sz="2500" dirty="0">
+                <a:solidFill>
+                  <a:schemeClr val="dk1"/>
+                </a:solidFill>
+                <a:latin typeface="Times New Roman"/>
+                <a:ea typeface="Times New Roman"/>
+                <a:cs typeface="Times New Roman"/>
+                <a:sym typeface="Times New Roman"/>
+              </a:rPr>
+              <a:t> then rollback on the shared matcher, no cloning, pure in-place state manipulation, to cheaply score all candidates</a:t>
+            </a:r>
+          </a:p>
+          <a:p>
+            <a:pPr marL="457200" lvl="0" indent="-387350" algn="just">
+              <a:buClr>
+                <a:schemeClr val="dk1"/>
+              </a:buClr>
+              <a:buSzPts val="2500"/>
+              <a:buFont typeface="Times New Roman"/>
+              <a:buChar char="●"/>
+            </a:pPr>
+            <a:r>
+              <a:rPr lang="en-US" sz="2500" b="1" dirty="0">
+                <a:solidFill>
+                  <a:schemeClr val="dk1"/>
+                </a:solidFill>
+                <a:latin typeface="Times New Roman"/>
+                <a:ea typeface="Times New Roman"/>
+                <a:cs typeface="Times New Roman"/>
+                <a:sym typeface="Times New Roman"/>
+              </a:rPr>
+              <a:t>Phase 2 – clone winners</a:t>
+            </a:r>
+            <a:r>
+              <a:rPr lang="en-US" sz="2500" dirty="0">
+                <a:solidFill>
+                  <a:schemeClr val="dk1"/>
+                </a:solidFill>
+                <a:latin typeface="Times New Roman"/>
+                <a:ea typeface="Times New Roman"/>
+                <a:cs typeface="Times New Roman"/>
+                <a:sym typeface="Times New Roman"/>
+              </a:rPr>
+              <a:t>: only the surviving DFA states (one per unique automaton state reached) are deep-copied, so memory scales with grammar branching factor rather than K</a:t>
+            </a:r>
+          </a:p>
+          <a:p>
+            <a:pPr marL="457200" lvl="0" indent="-387350" algn="just">
+              <a:buClr>
+                <a:schemeClr val="dk1"/>
+              </a:buClr>
+              <a:buSzPts val="2500"/>
+              <a:buFont typeface="Times New Roman"/>
+              <a:buChar char="●"/>
+            </a:pPr>
+            <a:r>
+              <a:rPr lang="en-US" sz="2500" b="1" dirty="0">
+                <a:solidFill>
+                  <a:schemeClr val="dk1"/>
+                </a:solidFill>
+                <a:latin typeface="Times New Roman"/>
+                <a:ea typeface="Times New Roman"/>
+                <a:cs typeface="Times New Roman"/>
+                <a:sym typeface="Times New Roman"/>
+              </a:rPr>
+              <a:t>Viterbi merge</a:t>
+            </a:r>
+            <a:r>
+              <a:rPr lang="en-US" sz="2500" dirty="0">
+                <a:solidFill>
+                  <a:schemeClr val="dk1"/>
+                </a:solidFill>
+                <a:latin typeface="Times New Roman"/>
+                <a:ea typeface="Times New Roman"/>
+                <a:cs typeface="Times New Roman"/>
+                <a:sym typeface="Times New Roman"/>
+              </a:rPr>
+              <a:t>: when two token paths arrive at the same DFA state, the lower-log-probability path is pruned, guaranteeing the backtracked sequence is globally optimal over the span under the current forward's log-probabilities</a:t>
+            </a:r>
+          </a:p>
+        </p:txBody>
+      </p:sp>
+      <p:sp>
+        <p:nvSpPr>
+          <p:cNvPr id="111" name="Google Shape;111;p1">
+            <a:extLst>
+              <a:ext uri="{FF2B5EF4-FFF2-40B4-BE49-F238E27FC236}">
+                <a16:creationId xmlns:a16="http://schemas.microsoft.com/office/drawing/2014/main" id="{079FD56C-69FD-3F2C-075B-3DD308D09D2C}"/>
+              </a:ext>
+            </a:extLst>
+          </p:cNvPr>
+          <p:cNvSpPr txBox="1"/>
+          <p:nvPr/>
+        </p:nvSpPr>
+        <p:spPr>
+          <a:xfrm>
+            <a:off x="24150805" y="19000353"/>
+            <a:ext cx="13011731" cy="857400"/>
+          </a:xfrm>
+          <a:prstGeom prst="rect">
+            <a:avLst/>
+          </a:prstGeom>
+          <a:noFill/>
+          <a:ln>
+            <a:noFill/>
+          </a:ln>
+        </p:spPr>
+        <p:txBody>
+          <a:bodyPr spcFirstLastPara="1" wrap="square" lIns="84625" tIns="84625" rIns="84625" bIns="84625" anchor="t" anchorCtr="0">
+            <a:noAutofit/>
+          </a:bodyPr>
+          <a:lstStyle/>
+          <a:p>
+            <a:pPr marL="0" marR="0" lvl="0" indent="0" algn="l" rtl="0">
+              <a:lnSpc>
+                <a:spcPct val="100000"/>
+              </a:lnSpc>
+              <a:spcBef>
+                <a:spcPts val="0"/>
+              </a:spcBef>
+              <a:spcAft>
+                <a:spcPts val="0"/>
+              </a:spcAft>
+              <a:buNone/>
+            </a:pPr>
+            <a:r>
+              <a:rPr lang="en-US" sz="2500" b="1" dirty="0">
+                <a:solidFill>
+                  <a:schemeClr val="dk2"/>
+                </a:solidFill>
+                <a:latin typeface="Times New Roman"/>
+                <a:ea typeface="Times New Roman"/>
+                <a:cs typeface="Times New Roman"/>
+                <a:sym typeface="Times New Roman"/>
+              </a:rPr>
+              <a:t>Table 1: </a:t>
+            </a:r>
+            <a:r>
+              <a:rPr lang="en-US" sz="2500" b="1" dirty="0" err="1">
+                <a:solidFill>
+                  <a:schemeClr val="dk2"/>
+                </a:solidFill>
+                <a:latin typeface="Times New Roman"/>
+                <a:ea typeface="Times New Roman"/>
+                <a:cs typeface="Times New Roman"/>
+                <a:sym typeface="Times New Roman"/>
+              </a:rPr>
+              <a:t>jsb_medium</a:t>
+            </a:r>
+            <a:r>
+              <a:rPr lang="en-US" sz="2500" b="1" dirty="0">
+                <a:solidFill>
+                  <a:schemeClr val="dk2"/>
+                </a:solidFill>
+                <a:latin typeface="Times New Roman"/>
+                <a:ea typeface="Times New Roman"/>
+                <a:cs typeface="Times New Roman"/>
+                <a:sym typeface="Times New Roman"/>
+              </a:rPr>
+              <a:t> results (T = 128 steps). LAVE resamples count lookahead verification draws; </a:t>
+            </a:r>
+            <a:r>
+              <a:rPr lang="en-US" sz="2500" b="1" dirty="0" err="1">
+                <a:solidFill>
+                  <a:schemeClr val="dk2"/>
+                </a:solidFill>
+                <a:latin typeface="Times New Roman"/>
+                <a:ea typeface="Times New Roman"/>
+                <a:cs typeface="Times New Roman"/>
+                <a:sym typeface="Times New Roman"/>
+              </a:rPr>
+              <a:t>Dgrammar</a:t>
+            </a:r>
+            <a:r>
+              <a:rPr lang="en-US" sz="2500" b="1" dirty="0">
+                <a:solidFill>
+                  <a:schemeClr val="dk2"/>
+                </a:solidFill>
+                <a:latin typeface="Times New Roman"/>
+                <a:ea typeface="Times New Roman"/>
+                <a:cs typeface="Times New Roman"/>
+                <a:sym typeface="Times New Roman"/>
+              </a:rPr>
+              <a:t>/</a:t>
+            </a:r>
+            <a:r>
+              <a:rPr lang="en-US" sz="2500" b="1" dirty="0" err="1">
+                <a:solidFill>
+                  <a:schemeClr val="dk2"/>
+                </a:solidFill>
+                <a:latin typeface="Times New Roman"/>
+                <a:ea typeface="Times New Roman"/>
+                <a:cs typeface="Times New Roman"/>
+                <a:sym typeface="Times New Roman"/>
+              </a:rPr>
+              <a:t>DPGrammar</a:t>
+            </a:r>
+            <a:r>
+              <a:rPr lang="en-US" sz="2500" b="1" dirty="0">
+                <a:solidFill>
+                  <a:schemeClr val="dk2"/>
+                </a:solidFill>
+                <a:latin typeface="Times New Roman"/>
+                <a:ea typeface="Times New Roman"/>
+                <a:cs typeface="Times New Roman"/>
+                <a:sym typeface="Times New Roman"/>
+              </a:rPr>
+              <a:t> resamples count token re-mask events. </a:t>
+            </a:r>
+            <a:endParaRPr sz="2500" dirty="0">
+              <a:solidFill>
+                <a:schemeClr val="dk2"/>
+              </a:solidFill>
+              <a:latin typeface="Times New Roman"/>
+              <a:ea typeface="Times New Roman"/>
+              <a:cs typeface="Times New Roman"/>
+              <a:sym typeface="Times New Roman"/>
+            </a:endParaRPr>
+          </a:p>
+        </p:txBody>
+      </p:sp>
+      <p:pic>
+        <p:nvPicPr>
+          <p:cNvPr id="3" name="圖片 2">
+            <a:extLst>
+              <a:ext uri="{FF2B5EF4-FFF2-40B4-BE49-F238E27FC236}">
+                <a16:creationId xmlns:a16="http://schemas.microsoft.com/office/drawing/2014/main" id="{61CB9300-3A9B-C646-0806-5B3AE7DB8970}"/>
+              </a:ext>
+            </a:extLst>
+          </p:cNvPr>
+          <p:cNvPicPr>
+            <a:picLocks noChangeAspect="1"/>
+          </p:cNvPicPr>
+          <p:nvPr/>
+        </p:nvPicPr>
+        <p:blipFill>
+          <a:blip r:embed="rId10"/>
+          <a:stretch>
+            <a:fillRect/>
+          </a:stretch>
+        </p:blipFill>
+        <p:spPr>
+          <a:xfrm>
+            <a:off x="11541456" y="4094589"/>
+            <a:ext cx="12139010" cy="8993614"/>
+          </a:xfrm>
+          <a:prstGeom prst="rect">
+            <a:avLst/>
+          </a:prstGeom>
+        </p:spPr>
+      </p:pic>
+      <p:sp>
+        <p:nvSpPr>
+          <p:cNvPr id="6" name="Google Shape;103;p1">
+            <a:extLst>
+              <a:ext uri="{FF2B5EF4-FFF2-40B4-BE49-F238E27FC236}">
+                <a16:creationId xmlns:a16="http://schemas.microsoft.com/office/drawing/2014/main" id="{D3C71ECD-537C-D913-4238-F20886F20B7B}"/>
+              </a:ext>
+            </a:extLst>
+          </p:cNvPr>
+          <p:cNvSpPr txBox="1"/>
+          <p:nvPr/>
+        </p:nvSpPr>
+        <p:spPr>
+          <a:xfrm>
+            <a:off x="11298012" y="3063312"/>
+            <a:ext cx="12466683" cy="852000"/>
+          </a:xfrm>
+          <a:prstGeom prst="rect">
+            <a:avLst/>
+          </a:prstGeom>
+          <a:solidFill>
+            <a:srgbClr val="93C47D"/>
+          </a:solidFill>
+          <a:ln w="9525" cap="flat" cmpd="sng">
+            <a:solidFill>
+              <a:srgbClr val="005700"/>
+            </a:solidFill>
+            <a:prstDash val="solid"/>
+            <a:round/>
+            <a:headEnd type="none" w="sm" len="sm"/>
+            <a:tailEnd type="none" w="sm" len="sm"/>
+          </a:ln>
+        </p:spPr>
+        <p:txBody>
+          <a:bodyPr spcFirstLastPara="1" wrap="square" lIns="340775" tIns="170375" rIns="340775" bIns="170375" anchor="t" anchorCtr="0">
+            <a:spAutoFit/>
+          </a:bodyPr>
+          <a:lstStyle/>
+          <a:p>
+            <a:pPr marL="0" marR="0" lvl="0" indent="0" algn="l" rtl="0">
+              <a:lnSpc>
+                <a:spcPct val="100000"/>
+              </a:lnSpc>
+              <a:spcBef>
+                <a:spcPts val="0"/>
+              </a:spcBef>
+              <a:spcAft>
+                <a:spcPts val="0"/>
+              </a:spcAft>
+              <a:buClr>
+                <a:srgbClr val="000000"/>
+              </a:buClr>
+              <a:buSzPts val="3300"/>
+              <a:buFont typeface="Arial"/>
+              <a:buNone/>
+            </a:pPr>
+            <a:r>
+              <a:rPr lang="en-US" sz="3300" b="1" i="0" u="none" strike="noStrike" cap="none" dirty="0">
+                <a:solidFill>
+                  <a:schemeClr val="dk1"/>
+                </a:solidFill>
+                <a:latin typeface="Arial"/>
+                <a:ea typeface="Arial"/>
+                <a:cs typeface="Arial"/>
+                <a:sym typeface="Arial"/>
+              </a:rPr>
+              <a:t>Motivated Example</a:t>
+            </a:r>
+            <a:endParaRPr sz="1100" b="0" i="0" u="none" strike="noStrike" cap="none" dirty="0">
+              <a:solidFill>
+                <a:srgbClr val="000000"/>
+              </a:solidFill>
+              <a:latin typeface="Arial"/>
+              <a:ea typeface="Arial"/>
+              <a:cs typeface="Arial"/>
+              <a:sym typeface="Arial"/>
+            </a:endParaRPr>
+          </a:p>
+        </p:txBody>
+      </p:sp>
+      <p:sp>
+        <p:nvSpPr>
+          <p:cNvPr id="8" name="Google Shape;106;p1">
+            <a:extLst>
+              <a:ext uri="{FF2B5EF4-FFF2-40B4-BE49-F238E27FC236}">
+                <a16:creationId xmlns:a16="http://schemas.microsoft.com/office/drawing/2014/main" id="{F470296E-9E53-D936-D627-FD1F6F352D37}"/>
+              </a:ext>
+            </a:extLst>
+          </p:cNvPr>
+          <p:cNvSpPr txBox="1"/>
+          <p:nvPr/>
+        </p:nvSpPr>
+        <p:spPr>
+          <a:xfrm>
+            <a:off x="11298012" y="3915312"/>
+            <a:ext cx="12466682" cy="9268232"/>
+          </a:xfrm>
+          <a:prstGeom prst="rect">
+            <a:avLst/>
+          </a:prstGeom>
+          <a:noFill/>
+          <a:ln w="9525" cap="flat" cmpd="sng">
+            <a:solidFill>
+              <a:srgbClr val="005700"/>
+            </a:solidFill>
+            <a:prstDash val="solid"/>
+            <a:round/>
+            <a:headEnd type="none" w="sm" len="sm"/>
+            <a:tailEnd type="none" w="sm" len="sm"/>
+          </a:ln>
+        </p:spPr>
+        <p:txBody>
+          <a:bodyPr spcFirstLastPara="1" wrap="square" lIns="84625" tIns="84625" rIns="84625" bIns="84625" anchor="t" anchorCtr="0">
+            <a:noAutofit/>
+          </a:bodyPr>
+          <a:lstStyle/>
+          <a:p>
+            <a:pPr marL="0" marR="0" lvl="0" indent="0" algn="just" rtl="0">
+              <a:lnSpc>
+                <a:spcPct val="100000"/>
+              </a:lnSpc>
+              <a:spcBef>
+                <a:spcPts val="0"/>
+              </a:spcBef>
+              <a:spcAft>
+                <a:spcPts val="0"/>
+              </a:spcAft>
+              <a:buClr>
+                <a:srgbClr val="000000"/>
+              </a:buClr>
+              <a:buSzPts val="2700"/>
+              <a:buFont typeface="Arial"/>
+              <a:buNone/>
+            </a:pPr>
+            <a:endParaRPr sz="2400" b="0" i="0" u="none" strike="noStrike" cap="none" dirty="0">
+              <a:solidFill>
+                <a:schemeClr val="dk1"/>
+              </a:solidFill>
+              <a:latin typeface="Times New Roman"/>
+              <a:ea typeface="Times New Roman"/>
+              <a:cs typeface="Times New Roman"/>
+              <a:sym typeface="Times New Roman"/>
+            </a:endParaRPr>
+          </a:p>
+        </p:txBody>
+      </p:sp>
+      <p:sp>
+        <p:nvSpPr>
+          <p:cNvPr id="9" name="Google Shape;103;p1">
+            <a:extLst>
+              <a:ext uri="{FF2B5EF4-FFF2-40B4-BE49-F238E27FC236}">
+                <a16:creationId xmlns:a16="http://schemas.microsoft.com/office/drawing/2014/main" id="{FAD4DC5C-1D72-EC2A-4FF5-5E83992883C2}"/>
+              </a:ext>
+            </a:extLst>
+          </p:cNvPr>
+          <p:cNvSpPr txBox="1"/>
+          <p:nvPr/>
+        </p:nvSpPr>
+        <p:spPr>
+          <a:xfrm>
+            <a:off x="24031947" y="3051907"/>
+            <a:ext cx="13233428" cy="852000"/>
+          </a:xfrm>
+          <a:prstGeom prst="rect">
+            <a:avLst/>
+          </a:prstGeom>
+          <a:solidFill>
+            <a:srgbClr val="93C47D"/>
+          </a:solidFill>
+          <a:ln w="9525" cap="flat" cmpd="sng">
+            <a:solidFill>
+              <a:srgbClr val="005700"/>
+            </a:solidFill>
+            <a:prstDash val="solid"/>
+            <a:round/>
+            <a:headEnd type="none" w="sm" len="sm"/>
+            <a:tailEnd type="none" w="sm" len="sm"/>
+          </a:ln>
+        </p:spPr>
+        <p:txBody>
+          <a:bodyPr spcFirstLastPara="1" wrap="square" lIns="340775" tIns="170375" rIns="340775" bIns="170375" anchor="t" anchorCtr="0">
+            <a:spAutoFit/>
+          </a:bodyPr>
+          <a:lstStyle/>
+          <a:p>
+            <a:pPr marL="0" marR="0" lvl="0" indent="0" algn="l" rtl="0">
+              <a:lnSpc>
+                <a:spcPct val="100000"/>
+              </a:lnSpc>
+              <a:spcBef>
+                <a:spcPts val="0"/>
+              </a:spcBef>
+              <a:spcAft>
+                <a:spcPts val="0"/>
+              </a:spcAft>
+              <a:buClr>
+                <a:srgbClr val="000000"/>
+              </a:buClr>
+              <a:buSzPts val="3300"/>
+              <a:buFont typeface="Arial"/>
+              <a:buNone/>
+            </a:pPr>
+            <a:r>
+              <a:rPr lang="en-US" sz="3300" b="1" i="0" u="none" strike="noStrike" cap="none" dirty="0">
+                <a:solidFill>
+                  <a:schemeClr val="dk1"/>
+                </a:solidFill>
+                <a:latin typeface="Arial"/>
+                <a:ea typeface="Arial"/>
+                <a:cs typeface="Arial"/>
+                <a:sym typeface="Arial"/>
+              </a:rPr>
+              <a:t>Greedy vs. DP Viterbi Repair</a:t>
+            </a:r>
+            <a:endParaRPr sz="1100" b="0" i="0" u="none" strike="noStrike" cap="none" dirty="0">
+              <a:solidFill>
+                <a:srgbClr val="000000"/>
+              </a:solidFill>
+              <a:latin typeface="Arial"/>
+              <a:ea typeface="Arial"/>
+              <a:cs typeface="Arial"/>
+              <a:sym typeface="Arial"/>
+            </a:endParaRPr>
+          </a:p>
+        </p:txBody>
+      </p:sp>
+      <p:sp>
+        <p:nvSpPr>
+          <p:cNvPr id="10" name="Google Shape;106;p1">
+            <a:extLst>
+              <a:ext uri="{FF2B5EF4-FFF2-40B4-BE49-F238E27FC236}">
+                <a16:creationId xmlns:a16="http://schemas.microsoft.com/office/drawing/2014/main" id="{A92B721D-A6B7-1DAA-A99C-E292FD0475DF}"/>
+              </a:ext>
+            </a:extLst>
+          </p:cNvPr>
+          <p:cNvSpPr txBox="1"/>
+          <p:nvPr/>
+        </p:nvSpPr>
+        <p:spPr>
+          <a:xfrm>
+            <a:off x="24031947" y="3909608"/>
+            <a:ext cx="13233428" cy="9268231"/>
+          </a:xfrm>
+          <a:prstGeom prst="rect">
+            <a:avLst/>
+          </a:prstGeom>
+          <a:noFill/>
+          <a:ln w="9525" cap="flat" cmpd="sng">
+            <a:solidFill>
+              <a:srgbClr val="005700"/>
+            </a:solidFill>
+            <a:prstDash val="solid"/>
+            <a:round/>
+            <a:headEnd type="none" w="sm" len="sm"/>
+            <a:tailEnd type="none" w="sm" len="sm"/>
+          </a:ln>
+        </p:spPr>
+        <p:txBody>
+          <a:bodyPr spcFirstLastPara="1" wrap="square" lIns="84625" tIns="84625" rIns="84625" bIns="84625" anchor="t" anchorCtr="0">
+            <a:noAutofit/>
+          </a:bodyPr>
+          <a:lstStyle/>
+          <a:p>
+            <a:pPr marL="0" marR="0" lvl="0" indent="0" algn="just" rtl="0">
+              <a:lnSpc>
+                <a:spcPct val="100000"/>
+              </a:lnSpc>
+              <a:spcBef>
+                <a:spcPts val="0"/>
+              </a:spcBef>
+              <a:spcAft>
+                <a:spcPts val="0"/>
+              </a:spcAft>
+              <a:buClr>
+                <a:srgbClr val="000000"/>
+              </a:buClr>
+              <a:buSzPts val="2700"/>
+              <a:buFont typeface="Arial"/>
+              <a:buNone/>
+            </a:pPr>
+            <a:endParaRPr sz="2400" b="0" i="0" u="none" strike="noStrike" cap="none" dirty="0">
+              <a:solidFill>
+                <a:schemeClr val="dk1"/>
+              </a:solidFill>
+              <a:latin typeface="Times New Roman"/>
+              <a:ea typeface="Times New Roman"/>
+              <a:cs typeface="Times New Roman"/>
+              <a:sym typeface="Times New Roman"/>
+            </a:endParaRPr>
+          </a:p>
+        </p:txBody>
+      </p:sp>
+      <p:sp>
+        <p:nvSpPr>
+          <p:cNvPr id="21" name="Google Shape;104;p1">
+            <a:extLst>
+              <a:ext uri="{FF2B5EF4-FFF2-40B4-BE49-F238E27FC236}">
+                <a16:creationId xmlns:a16="http://schemas.microsoft.com/office/drawing/2014/main" id="{3EA8B80F-6596-495E-BAC5-95A2970E200D}"/>
+              </a:ext>
+            </a:extLst>
+          </p:cNvPr>
+          <p:cNvSpPr txBox="1"/>
+          <p:nvPr/>
+        </p:nvSpPr>
+        <p:spPr>
+          <a:xfrm>
             <a:off x="23975423" y="25384836"/>
             <a:ext cx="13269300" cy="1259702"/>
           </a:xfrm>
@@ -18552,6 +22017,11 @@
         </p:txBody>
       </p:sp>
     </p:spTree>
+    <p:extLst>
+      <p:ext uri="{BB962C8B-B14F-4D97-AF65-F5344CB8AC3E}">
+        <p14:creationId xmlns:p14="http://schemas.microsoft.com/office/powerpoint/2010/main" val="2641121709"/>
+      </p:ext>
+    </p:extLst>
   </p:cSld>
   <p:clrMapOvr>
     <a:masterClrMapping/>
@@ -18559,7 +22029,7 @@
 </p:sld>
 </file>
 
-<file path=ppt/slides/slide2.xml><?xml version="1.0" encoding="utf-8"?>
+<file path=ppt/slides/slide3.xml><?xml version="1.0" encoding="utf-8"?>
 <p:sld xmlns:a="http://schemas.openxmlformats.org/drawingml/2006/main" xmlns:r="http://schemas.openxmlformats.org/officeDocument/2006/relationships" xmlns:p="http://schemas.openxmlformats.org/presentationml/2006/main" show="0">
   <p:cSld>
     <p:bg>

--- a/docs/Final_Poster.pptx
+++ b/docs/Final_Poster.pptx
@@ -15671,10 +15671,10 @@
       </p:grpSpPr>
       <p:pic>
         <p:nvPicPr>
-          <p:cNvPr id="24" name="圖片 23">
+          <p:cNvPr id="20" name="圖片 19">
             <a:extLst>
               <a:ext uri="{FF2B5EF4-FFF2-40B4-BE49-F238E27FC236}">
-                <a16:creationId xmlns:a16="http://schemas.microsoft.com/office/drawing/2014/main" id="{9513AB96-7813-A8E4-E069-7505944FE909}"/>
+                <a16:creationId xmlns:a16="http://schemas.microsoft.com/office/drawing/2014/main" id="{AACC6BB5-00F8-6E1F-1C11-0636C9DEC5C1}"/>
               </a:ext>
             </a:extLst>
           </p:cNvPr>
@@ -15691,128 +15691,8 @@
         </p:blipFill>
         <p:spPr>
           <a:xfrm>
-            <a:off x="11298009" y="3924084"/>
-            <a:ext cx="12574328" cy="9101045"/>
-          </a:xfrm>
-          <a:prstGeom prst="rect">
-            <a:avLst/>
-          </a:prstGeom>
-        </p:spPr>
-      </p:pic>
-      <p:pic>
-        <p:nvPicPr>
-          <p:cNvPr id="17" name="圖片 16">
-            <a:extLst>
-              <a:ext uri="{FF2B5EF4-FFF2-40B4-BE49-F238E27FC236}">
-                <a16:creationId xmlns:a16="http://schemas.microsoft.com/office/drawing/2014/main" id="{615EE31A-D76B-B286-9474-CEFAEF6CB233}"/>
-              </a:ext>
-            </a:extLst>
-          </p:cNvPr>
-          <p:cNvPicPr>
-            <a:picLocks noChangeAspect="1"/>
-          </p:cNvPicPr>
-          <p:nvPr/>
-        </p:nvPicPr>
-        <p:blipFill>
-          <a:blip r:embed="rId4"/>
-          <a:stretch>
-            <a:fillRect/>
-          </a:stretch>
-        </p:blipFill>
-        <p:spPr>
-          <a:xfrm>
-            <a:off x="11587699" y="14302481"/>
-            <a:ext cx="11887307" cy="5105696"/>
-          </a:xfrm>
-          <a:prstGeom prst="rect">
-            <a:avLst/>
-          </a:prstGeom>
-        </p:spPr>
-      </p:pic>
-      <p:pic>
-        <p:nvPicPr>
-          <p:cNvPr id="4" name="圖片 3">
-            <a:extLst>
-              <a:ext uri="{FF2B5EF4-FFF2-40B4-BE49-F238E27FC236}">
-                <a16:creationId xmlns:a16="http://schemas.microsoft.com/office/drawing/2014/main" id="{F3173AD5-2B81-D2E0-4F75-FF878A8D7746}"/>
-              </a:ext>
-            </a:extLst>
-          </p:cNvPr>
-          <p:cNvPicPr>
-            <a:picLocks noChangeAspect="1"/>
-          </p:cNvPicPr>
-          <p:nvPr/>
-        </p:nvPicPr>
-        <p:blipFill>
-          <a:blip r:embed="rId5"/>
-          <a:stretch>
-            <a:fillRect/>
-          </a:stretch>
-        </p:blipFill>
-        <p:spPr>
-          <a:xfrm>
-            <a:off x="12444864" y="20595433"/>
-            <a:ext cx="10109706" cy="5007831"/>
-          </a:xfrm>
-          <a:prstGeom prst="rect">
-            <a:avLst/>
-          </a:prstGeom>
-        </p:spPr>
-      </p:pic>
-      <p:pic>
-        <p:nvPicPr>
-          <p:cNvPr id="14" name="圖片 13">
-            <a:extLst>
-              <a:ext uri="{FF2B5EF4-FFF2-40B4-BE49-F238E27FC236}">
-                <a16:creationId xmlns:a16="http://schemas.microsoft.com/office/drawing/2014/main" id="{1C777580-F04D-C4FC-0D0D-FFC23727918D}"/>
-              </a:ext>
-            </a:extLst>
-          </p:cNvPr>
-          <p:cNvPicPr>
-            <a:picLocks noChangeAspect="1"/>
-          </p:cNvPicPr>
-          <p:nvPr/>
-        </p:nvPicPr>
-        <p:blipFill>
-          <a:blip r:embed="rId6"/>
-          <a:stretch>
-            <a:fillRect/>
-          </a:stretch>
-        </p:blipFill>
-        <p:spPr>
-          <a:xfrm>
-            <a:off x="31213354" y="4054716"/>
-            <a:ext cx="6052021" cy="9128828"/>
-          </a:xfrm>
-          <a:prstGeom prst="rect">
-            <a:avLst/>
-          </a:prstGeom>
-        </p:spPr>
-      </p:pic>
-      <p:pic>
-        <p:nvPicPr>
-          <p:cNvPr id="12" name="圖片 11">
-            <a:extLst>
-              <a:ext uri="{FF2B5EF4-FFF2-40B4-BE49-F238E27FC236}">
-                <a16:creationId xmlns:a16="http://schemas.microsoft.com/office/drawing/2014/main" id="{763517E2-B966-369B-FE55-B386AD0B186C}"/>
-              </a:ext>
-            </a:extLst>
-          </p:cNvPr>
-          <p:cNvPicPr>
-            <a:picLocks noChangeAspect="1"/>
-          </p:cNvPicPr>
-          <p:nvPr/>
-        </p:nvPicPr>
-        <p:blipFill>
-          <a:blip r:embed="rId7"/>
-          <a:stretch>
-            <a:fillRect/>
-          </a:stretch>
-        </p:blipFill>
-        <p:spPr>
-          <a:xfrm>
-            <a:off x="24104209" y="3995475"/>
-            <a:ext cx="6939120" cy="9059755"/>
+            <a:off x="11362456" y="4105842"/>
+            <a:ext cx="12318121" cy="8949388"/>
           </a:xfrm>
           <a:prstGeom prst="rect">
             <a:avLst/>
@@ -15827,7 +15707,7 @@
         </p:nvSpPr>
         <p:spPr>
           <a:xfrm>
-            <a:off x="11278344" y="20604205"/>
+            <a:off x="11278342" y="20604205"/>
             <a:ext cx="12486348" cy="6384449"/>
           </a:xfrm>
           <a:prstGeom prst="rect">
@@ -16415,7 +16295,7 @@
           <p:nvPr/>
         </p:nvPicPr>
         <p:blipFill rotWithShape="1">
-          <a:blip r:embed="rId8">
+          <a:blip r:embed="rId4">
             <a:alphaModFix/>
           </a:blip>
           <a:srcRect/>
@@ -16442,7 +16322,7 @@
           <p:nvPr/>
         </p:nvPicPr>
         <p:blipFill rotWithShape="1">
-          <a:blip r:embed="rId9">
+          <a:blip r:embed="rId5">
             <a:alphaModFix/>
           </a:blip>
           <a:srcRect/>
@@ -17148,7 +17028,7 @@
         </p:nvSpPr>
         <p:spPr>
           <a:xfrm>
-            <a:off x="11278343" y="14302481"/>
+            <a:off x="11278340" y="14302481"/>
             <a:ext cx="12486350" cy="5148675"/>
           </a:xfrm>
           <a:prstGeom prst="rect">
@@ -18107,7 +17987,7 @@
         </p:nvSpPr>
         <p:spPr>
           <a:xfrm>
-            <a:off x="11298011" y="3913875"/>
+            <a:off x="11298011" y="3927067"/>
             <a:ext cx="12466682" cy="9268232"/>
           </a:xfrm>
           <a:prstGeom prst="rect">
@@ -18253,7 +18133,7 @@
         </p:nvSpPr>
         <p:spPr>
           <a:xfrm>
-            <a:off x="24031947" y="3909608"/>
+            <a:off x="24031944" y="3915312"/>
             <a:ext cx="13233428" cy="9268231"/>
           </a:xfrm>
           <a:prstGeom prst="rect">
@@ -18781,6 +18661,96 @@
           </a:p>
         </p:txBody>
       </p:sp>
+      <p:pic>
+        <p:nvPicPr>
+          <p:cNvPr id="23" name="圖片 22">
+            <a:extLst>
+              <a:ext uri="{FF2B5EF4-FFF2-40B4-BE49-F238E27FC236}">
+                <a16:creationId xmlns:a16="http://schemas.microsoft.com/office/drawing/2014/main" id="{67AB991F-5E01-287B-54D6-E15FB5F48C96}"/>
+              </a:ext>
+            </a:extLst>
+          </p:cNvPr>
+          <p:cNvPicPr>
+            <a:picLocks noChangeAspect="1"/>
+          </p:cNvPicPr>
+          <p:nvPr/>
+        </p:nvPicPr>
+        <p:blipFill>
+          <a:blip r:embed="rId6"/>
+          <a:stretch>
+            <a:fillRect/>
+          </a:stretch>
+        </p:blipFill>
+        <p:spPr>
+          <a:xfrm>
+            <a:off x="24170076" y="4163606"/>
+            <a:ext cx="12993041" cy="8670237"/>
+          </a:xfrm>
+          <a:prstGeom prst="rect">
+            <a:avLst/>
+          </a:prstGeom>
+        </p:spPr>
+      </p:pic>
+      <p:pic>
+        <p:nvPicPr>
+          <p:cNvPr id="26" name="圖片 25">
+            <a:extLst>
+              <a:ext uri="{FF2B5EF4-FFF2-40B4-BE49-F238E27FC236}">
+                <a16:creationId xmlns:a16="http://schemas.microsoft.com/office/drawing/2014/main" id="{26D6DDAE-8B6E-6B76-B1B4-5A17D739578D}"/>
+              </a:ext>
+            </a:extLst>
+          </p:cNvPr>
+          <p:cNvPicPr>
+            <a:picLocks noChangeAspect="1"/>
+          </p:cNvPicPr>
+          <p:nvPr/>
+        </p:nvPicPr>
+        <p:blipFill>
+          <a:blip r:embed="rId7"/>
+          <a:stretch>
+            <a:fillRect/>
+          </a:stretch>
+        </p:blipFill>
+        <p:spPr>
+          <a:xfrm>
+            <a:off x="12162552" y="20634933"/>
+            <a:ext cx="10717927" cy="5207499"/>
+          </a:xfrm>
+          <a:prstGeom prst="rect">
+            <a:avLst/>
+          </a:prstGeom>
+        </p:spPr>
+      </p:pic>
+      <p:pic>
+        <p:nvPicPr>
+          <p:cNvPr id="30" name="圖片 29">
+            <a:extLst>
+              <a:ext uri="{FF2B5EF4-FFF2-40B4-BE49-F238E27FC236}">
+                <a16:creationId xmlns:a16="http://schemas.microsoft.com/office/drawing/2014/main" id="{0F39DF6E-2399-B88D-844F-00BC0F88E062}"/>
+              </a:ext>
+            </a:extLst>
+          </p:cNvPr>
+          <p:cNvPicPr>
+            <a:picLocks noChangeAspect="1"/>
+          </p:cNvPicPr>
+          <p:nvPr/>
+        </p:nvPicPr>
+        <p:blipFill>
+          <a:blip r:embed="rId8"/>
+          <a:stretch>
+            <a:fillRect/>
+          </a:stretch>
+        </p:blipFill>
+        <p:spPr>
+          <a:xfrm>
+            <a:off x="11503750" y="14348348"/>
+            <a:ext cx="12032973" cy="5102808"/>
+          </a:xfrm>
+          <a:prstGeom prst="rect">
+            <a:avLst/>
+          </a:prstGeom>
+        </p:spPr>
+      </p:pic>
     </p:spTree>
   </p:cSld>
   <p:clrMapOvr>
